--- a/практика Макарова.pptx
+++ b/практика Макарова.pptx
@@ -5,23 +5,19 @@
     <p:sldMasterId id="2147483684" r:id="rId1"/>
   </p:sldMasterIdLst>
   <p:notesMasterIdLst>
-    <p:notesMasterId r:id="rId16"/>
+    <p:notesMasterId r:id="rId12"/>
   </p:notesMasterIdLst>
   <p:sldIdLst>
     <p:sldId id="256" r:id="rId2"/>
     <p:sldId id="258" r:id="rId3"/>
     <p:sldId id="259" r:id="rId4"/>
-    <p:sldId id="260" r:id="rId5"/>
-    <p:sldId id="271" r:id="rId6"/>
-    <p:sldId id="276" r:id="rId7"/>
-    <p:sldId id="261" r:id="rId8"/>
-    <p:sldId id="272" r:id="rId9"/>
-    <p:sldId id="273" r:id="rId10"/>
-    <p:sldId id="262" r:id="rId11"/>
-    <p:sldId id="274" r:id="rId12"/>
-    <p:sldId id="275" r:id="rId13"/>
-    <p:sldId id="278" r:id="rId14"/>
-    <p:sldId id="268" r:id="rId15"/>
+    <p:sldId id="272" r:id="rId5"/>
+    <p:sldId id="275" r:id="rId6"/>
+    <p:sldId id="277" r:id="rId7"/>
+    <p:sldId id="278" r:id="rId8"/>
+    <p:sldId id="279" r:id="rId9"/>
+    <p:sldId id="280" r:id="rId10"/>
+    <p:sldId id="281" r:id="rId11"/>
   </p:sldIdLst>
   <p:sldSz cx="12192000" cy="6858000"/>
   <p:notesSz cx="6858000" cy="9144000"/>
@@ -210,7 +206,7 @@
           <a:p>
             <a:fld id="{BFA4B062-2B11-4248-98E2-3DBC15892DEE}" type="datetimeFigureOut">
               <a:rPr lang="ru-RU" smtClean="0"/>
-              <a:t>17.04.2026</a:t>
+              <a:t>15.05.2026</a:t>
             </a:fld>
             <a:endParaRPr lang="ru-RU"/>
           </a:p>
@@ -566,302 +562,10 @@
   <p:cSld>
     <p:spTree>
       <p:nvGrpSpPr>
-        <p:cNvPr id="1" name=""/>
-        <p:cNvGrpSpPr/>
-        <p:nvPr/>
-      </p:nvGrpSpPr>
-      <p:grpSpPr>
-        <a:xfrm>
-          <a:off x="0" y="0"/>
-          <a:ext cx="0" cy="0"/>
-          <a:chOff x="0" y="0"/>
-          <a:chExt cx="0" cy="0"/>
-        </a:xfrm>
-      </p:grpSpPr>
-      <p:sp>
-        <p:nvSpPr>
-          <p:cNvPr id="2" name="Образ слайда 1"/>
-          <p:cNvSpPr>
-            <a:spLocks noGrp="1" noRot="1" noChangeAspect="1"/>
-          </p:cNvSpPr>
-          <p:nvPr>
-            <p:ph type="sldImg"/>
-          </p:nvPr>
-        </p:nvSpPr>
-        <p:spPr/>
-      </p:sp>
-      <p:sp>
-        <p:nvSpPr>
-          <p:cNvPr id="3" name="Заметки 2"/>
-          <p:cNvSpPr>
-            <a:spLocks noGrp="1"/>
-          </p:cNvSpPr>
-          <p:nvPr>
-            <p:ph type="body" idx="1"/>
-          </p:nvPr>
-        </p:nvSpPr>
-        <p:spPr/>
-        <p:txBody>
-          <a:bodyPr/>
-          <a:lstStyle/>
-          <a:p>
-            <a:r>
-              <a:rPr lang="ru-RU" sz="1800" dirty="0">
-                <a:effectLst/>
-                <a:latin typeface="Times New Roman" panose="02020603050405020304" pitchFamily="18" charset="0"/>
-                <a:ea typeface="Calibri" panose="020F0502020204030204" pitchFamily="34" charset="0"/>
-              </a:rPr>
-              <a:t>В данном разделе сформулированы обязательные требования к пользователям компьютерного класса.</a:t>
-            </a:r>
-            <a:endParaRPr lang="ru-RU" dirty="0"/>
-          </a:p>
-        </p:txBody>
-      </p:sp>
-      <p:sp>
-        <p:nvSpPr>
-          <p:cNvPr id="4" name="Номер слайда 3"/>
-          <p:cNvSpPr>
-            <a:spLocks noGrp="1"/>
-          </p:cNvSpPr>
-          <p:nvPr>
-            <p:ph type="sldNum" sz="quarter" idx="5"/>
-          </p:nvPr>
-        </p:nvSpPr>
-        <p:spPr/>
-        <p:txBody>
-          <a:bodyPr/>
-          <a:lstStyle/>
-          <a:p>
-            <a:fld id="{22D0DB64-6B90-4225-844C-57CC3718F58A}" type="slidenum">
-              <a:rPr lang="ru-RU" smtClean="0"/>
-              <a:t>10</a:t>
-            </a:fld>
-            <a:endParaRPr lang="ru-RU"/>
-          </a:p>
-        </p:txBody>
-      </p:sp>
-    </p:spTree>
-    <p:extLst>
-      <p:ext uri="{BB962C8B-B14F-4D97-AF65-F5344CB8AC3E}">
-        <p14:creationId xmlns:p14="http://schemas.microsoft.com/office/powerpoint/2010/main" val="1140304387"/>
-      </p:ext>
-    </p:extLst>
-  </p:cSld>
-  <p:clrMapOvr>
-    <a:masterClrMapping/>
-  </p:clrMapOvr>
-</p:notes>
-</file>
-
-<file path=ppt/notesSlides/notesSlide11.xml><?xml version="1.0" encoding="utf-8"?>
-<p:notes xmlns:a="http://schemas.openxmlformats.org/drawingml/2006/main" xmlns:r="http://schemas.openxmlformats.org/officeDocument/2006/relationships" xmlns:p="http://schemas.openxmlformats.org/presentationml/2006/main">
-  <p:cSld>
-    <p:spTree>
-      <p:nvGrpSpPr>
-        <p:cNvPr id="1" name=""/>
-        <p:cNvGrpSpPr/>
-        <p:nvPr/>
-      </p:nvGrpSpPr>
-      <p:grpSpPr>
-        <a:xfrm>
-          <a:off x="0" y="0"/>
-          <a:ext cx="0" cy="0"/>
-          <a:chOff x="0" y="0"/>
-          <a:chExt cx="0" cy="0"/>
-        </a:xfrm>
-      </p:grpSpPr>
-      <p:sp>
-        <p:nvSpPr>
-          <p:cNvPr id="2" name="Образ слайда 1"/>
-          <p:cNvSpPr>
-            <a:spLocks noGrp="1" noRot="1" noChangeAspect="1"/>
-          </p:cNvSpPr>
-          <p:nvPr>
-            <p:ph type="sldImg"/>
-          </p:nvPr>
-        </p:nvSpPr>
-        <p:spPr/>
-      </p:sp>
-      <p:sp>
-        <p:nvSpPr>
-          <p:cNvPr id="3" name="Заметки 2"/>
-          <p:cNvSpPr>
-            <a:spLocks noGrp="1"/>
-          </p:cNvSpPr>
-          <p:nvPr>
-            <p:ph type="body" idx="1"/>
-          </p:nvPr>
-        </p:nvSpPr>
-        <p:spPr/>
-        <p:txBody>
-          <a:bodyPr/>
-          <a:lstStyle/>
-          <a:p>
-            <a:r>
-              <a:rPr lang="ru-RU" sz="1800" dirty="0">
-                <a:effectLst/>
-                <a:latin typeface="Times New Roman" panose="02020603050405020304" pitchFamily="18" charset="0"/>
-                <a:ea typeface="Calibri" panose="020F0502020204030204" pitchFamily="34" charset="0"/>
-              </a:rPr>
-              <a:t>Для обеспечения долговечности оборудования разработан пошаговый график обслуживания, адаптированный под школьные реалии и ограниченные ресурсы</a:t>
-            </a:r>
-            <a:endParaRPr lang="ru-RU" dirty="0"/>
-          </a:p>
-        </p:txBody>
-      </p:sp>
-      <p:sp>
-        <p:nvSpPr>
-          <p:cNvPr id="4" name="Номер слайда 3"/>
-          <p:cNvSpPr>
-            <a:spLocks noGrp="1"/>
-          </p:cNvSpPr>
-          <p:nvPr>
-            <p:ph type="sldNum" sz="quarter" idx="5"/>
-          </p:nvPr>
-        </p:nvSpPr>
-        <p:spPr/>
-        <p:txBody>
-          <a:bodyPr/>
-          <a:lstStyle/>
-          <a:p>
-            <a:fld id="{22D0DB64-6B90-4225-844C-57CC3718F58A}" type="slidenum">
-              <a:rPr lang="ru-RU" smtClean="0"/>
-              <a:t>11</a:t>
-            </a:fld>
-            <a:endParaRPr lang="ru-RU"/>
-          </a:p>
-        </p:txBody>
-      </p:sp>
-    </p:spTree>
-    <p:extLst>
-      <p:ext uri="{BB962C8B-B14F-4D97-AF65-F5344CB8AC3E}">
-        <p14:creationId xmlns:p14="http://schemas.microsoft.com/office/powerpoint/2010/main" val="1505393771"/>
-      </p:ext>
-    </p:extLst>
-  </p:cSld>
-  <p:clrMapOvr>
-    <a:masterClrMapping/>
-  </p:clrMapOvr>
-</p:notes>
-</file>
-
-<file path=ppt/notesSlides/notesSlide12.xml><?xml version="1.0" encoding="utf-8"?>
-<p:notes xmlns:a="http://schemas.openxmlformats.org/drawingml/2006/main" xmlns:r="http://schemas.openxmlformats.org/officeDocument/2006/relationships" xmlns:p="http://schemas.openxmlformats.org/presentationml/2006/main">
-  <p:cSld>
-    <p:spTree>
-      <p:nvGrpSpPr>
-        <p:cNvPr id="1" name=""/>
-        <p:cNvGrpSpPr/>
-        <p:nvPr/>
-      </p:nvGrpSpPr>
-      <p:grpSpPr>
-        <a:xfrm>
-          <a:off x="0" y="0"/>
-          <a:ext cx="0" cy="0"/>
-          <a:chOff x="0" y="0"/>
-          <a:chExt cx="0" cy="0"/>
-        </a:xfrm>
-      </p:grpSpPr>
-      <p:sp>
-        <p:nvSpPr>
-          <p:cNvPr id="2" name="Образ слайда 1"/>
-          <p:cNvSpPr>
-            <a:spLocks noGrp="1" noRot="1" noChangeAspect="1"/>
-          </p:cNvSpPr>
-          <p:nvPr>
-            <p:ph type="sldImg"/>
-          </p:nvPr>
-        </p:nvSpPr>
-        <p:spPr/>
-      </p:sp>
-      <p:sp>
-        <p:nvSpPr>
-          <p:cNvPr id="3" name="Заметки 2"/>
-          <p:cNvSpPr>
-            <a:spLocks noGrp="1"/>
-          </p:cNvSpPr>
-          <p:nvPr>
-            <p:ph type="body" idx="1"/>
-          </p:nvPr>
-        </p:nvSpPr>
-        <p:spPr/>
-        <p:txBody>
-          <a:bodyPr/>
-          <a:lstStyle/>
-          <a:p>
-            <a:r>
-              <a:rPr lang="ru-RU" sz="1800" dirty="0">
-                <a:effectLst/>
-                <a:latin typeface="Times New Roman" panose="02020603050405020304" pitchFamily="18" charset="0"/>
-                <a:ea typeface="Calibri" panose="020F0502020204030204" pitchFamily="34" charset="0"/>
-              </a:rPr>
-              <a:t>Раздел выполнен в формате таблицы</a:t>
-            </a:r>
-            <a:r>
-              <a:rPr lang="en-US" sz="1800" dirty="0">
-                <a:effectLst/>
-                <a:latin typeface="Times New Roman" panose="02020603050405020304" pitchFamily="18" charset="0"/>
-                <a:ea typeface="Calibri" panose="020F0502020204030204" pitchFamily="34" charset="0"/>
-              </a:rPr>
-              <a:t>. </a:t>
-            </a:r>
-            <a:r>
-              <a:rPr lang="ru-RU" sz="1800" dirty="0">
-                <a:effectLst/>
-                <a:latin typeface="Times New Roman" panose="02020603050405020304" pitchFamily="18" charset="0"/>
-                <a:ea typeface="Calibri" panose="020F0502020204030204" pitchFamily="34" charset="0"/>
-              </a:rPr>
-              <a:t>В него включены наиболее частые проблемы, возникающие в учебном процессе. Для каждой ситуации прописан пошаговый алгоритм, который позволяет устранить большинство типовых сбоев без привлечения внешних специалистов.</a:t>
-            </a:r>
-            <a:endParaRPr lang="ru-RU" dirty="0"/>
-          </a:p>
-        </p:txBody>
-      </p:sp>
-      <p:sp>
-        <p:nvSpPr>
-          <p:cNvPr id="4" name="Номер слайда 3"/>
-          <p:cNvSpPr>
-            <a:spLocks noGrp="1"/>
-          </p:cNvSpPr>
-          <p:nvPr>
-            <p:ph type="sldNum" sz="quarter" idx="5"/>
-          </p:nvPr>
-        </p:nvSpPr>
-        <p:spPr/>
-        <p:txBody>
-          <a:bodyPr/>
-          <a:lstStyle/>
-          <a:p>
-            <a:fld id="{22D0DB64-6B90-4225-844C-57CC3718F58A}" type="slidenum">
-              <a:rPr lang="ru-RU" smtClean="0"/>
-              <a:t>12</a:t>
-            </a:fld>
-            <a:endParaRPr lang="ru-RU"/>
-          </a:p>
-        </p:txBody>
-      </p:sp>
-    </p:spTree>
-    <p:extLst>
-      <p:ext uri="{BB962C8B-B14F-4D97-AF65-F5344CB8AC3E}">
-        <p14:creationId xmlns:p14="http://schemas.microsoft.com/office/powerpoint/2010/main" val="2782889503"/>
-      </p:ext>
-    </p:extLst>
-  </p:cSld>
-  <p:clrMapOvr>
-    <a:masterClrMapping/>
-  </p:clrMapOvr>
-</p:notes>
-</file>
-
-<file path=ppt/notesSlides/notesSlide13.xml><?xml version="1.0" encoding="utf-8"?>
-<p:notes xmlns:a="http://schemas.openxmlformats.org/drawingml/2006/main" xmlns:r="http://schemas.openxmlformats.org/officeDocument/2006/relationships" xmlns:p="http://schemas.openxmlformats.org/presentationml/2006/main">
-  <p:cSld>
-    <p:spTree>
-      <p:nvGrpSpPr>
         <p:cNvPr id="1" name="">
           <a:extLst>
             <a:ext uri="{FF2B5EF4-FFF2-40B4-BE49-F238E27FC236}">
-              <a16:creationId xmlns:a16="http://schemas.microsoft.com/office/drawing/2014/main" id="{EB4B4C94-1976-EC16-A549-55EF3AD472EB}"/>
+              <a16:creationId xmlns:a16="http://schemas.microsoft.com/office/drawing/2014/main" id="{6ED67EB5-2DA2-FFA9-9C1B-FB8EB18CF08A}"/>
             </a:ext>
           </a:extLst>
         </p:cNvPr>
@@ -881,7 +585,7 @@
           <p:cNvPr id="2" name="Образ слайда 1">
             <a:extLst>
               <a:ext uri="{FF2B5EF4-FFF2-40B4-BE49-F238E27FC236}">
-                <a16:creationId xmlns:a16="http://schemas.microsoft.com/office/drawing/2014/main" id="{9B4909BD-85E2-7406-C605-AF4A4C41D5DA}"/>
+                <a16:creationId xmlns:a16="http://schemas.microsoft.com/office/drawing/2014/main" id="{B87819AE-BA1F-F539-ACCE-E5144D6039BA}"/>
               </a:ext>
             </a:extLst>
           </p:cNvPr>
@@ -899,7 +603,7 @@
           <p:cNvPr id="3" name="Заметки 2">
             <a:extLst>
               <a:ext uri="{FF2B5EF4-FFF2-40B4-BE49-F238E27FC236}">
-                <a16:creationId xmlns:a16="http://schemas.microsoft.com/office/drawing/2014/main" id="{681872EC-C402-9857-8683-EF2AAF33317D}"/>
+                <a16:creationId xmlns:a16="http://schemas.microsoft.com/office/drawing/2014/main" id="{C3A84782-4FCC-6598-1981-7A67B48303B4}"/>
               </a:ext>
             </a:extLst>
           </p:cNvPr>
@@ -915,13 +619,30 @@
           <a:bodyPr/>
           <a:lstStyle/>
           <a:p>
-            <a:r>
-              <a:rPr lang="ru-RU" sz="1800" dirty="0">
+            <a:pPr marL="0" marR="0" lvl="0" indent="0" algn="l" defTabSz="914400" rtl="0" eaLnBrk="1" fontAlgn="auto" latinLnBrk="0" hangingPunct="1">
+              <a:lnSpc>
+                <a:spcPct val="100000"/>
+              </a:lnSpc>
+              <a:spcBef>
+                <a:spcPts val="0"/>
+              </a:spcBef>
+              <a:spcAft>
+                <a:spcPts val="0"/>
+              </a:spcAft>
+              <a:buClrTx/>
+              <a:buSzTx/>
+              <a:buFontTx/>
+              <a:buNone/>
+              <a:tabLst/>
+              <a:defRPr/>
+            </a:pPr>
+            <a:r>
+              <a:rPr lang="ru-RU" sz="1200" dirty="0">
                 <a:effectLst/>
                 <a:latin typeface="Times New Roman" panose="02020603050405020304" pitchFamily="18" charset="0"/>
                 <a:ea typeface="Calibri" panose="020F0502020204030204" pitchFamily="34" charset="0"/>
               </a:rPr>
-              <a:t>Для контроля состояния техники разработан единый журнал. Журнал служит основой для планирования ремонтов, обоснования закупок нового оборудования и отчётности перед администрацией школы</a:t>
+              <a:t>Практика позволила развить компетенции, необходимые для профессиональной деятельности по специальности, а самостоятельное выполнение работ сформировало полезные навыки и умения для работы на предприятии.</a:t>
             </a:r>
             <a:endParaRPr lang="ru-RU" dirty="0"/>
           </a:p>
@@ -932,7 +653,7 @@
           <p:cNvPr id="4" name="Номер слайда 3">
             <a:extLst>
               <a:ext uri="{FF2B5EF4-FFF2-40B4-BE49-F238E27FC236}">
-                <a16:creationId xmlns:a16="http://schemas.microsoft.com/office/drawing/2014/main" id="{4586DA52-600C-4D86-7199-F2EA7C0BFA58}"/>
+                <a16:creationId xmlns:a16="http://schemas.microsoft.com/office/drawing/2014/main" id="{3001C438-9077-F9F7-D3AA-3A2E3EC5DB0C}"/>
               </a:ext>
             </a:extLst>
           </p:cNvPr>
@@ -950,7 +671,7 @@
           <a:p>
             <a:fld id="{22D0DB64-6B90-4225-844C-57CC3718F58A}" type="slidenum">
               <a:rPr lang="ru-RU" smtClean="0"/>
-              <a:t>13</a:t>
+              <a:t>10</a:t>
             </a:fld>
             <a:endParaRPr lang="ru-RU"/>
           </a:p>
@@ -959,115 +680,7 @@
     </p:spTree>
     <p:extLst>
       <p:ext uri="{BB962C8B-B14F-4D97-AF65-F5344CB8AC3E}">
-        <p14:creationId xmlns:p14="http://schemas.microsoft.com/office/powerpoint/2010/main" val="773326381"/>
-      </p:ext>
-    </p:extLst>
-  </p:cSld>
-  <p:clrMapOvr>
-    <a:masterClrMapping/>
-  </p:clrMapOvr>
-</p:notes>
-</file>
-
-<file path=ppt/notesSlides/notesSlide14.xml><?xml version="1.0" encoding="utf-8"?>
-<p:notes xmlns:a="http://schemas.openxmlformats.org/drawingml/2006/main" xmlns:r="http://schemas.openxmlformats.org/officeDocument/2006/relationships" xmlns:p="http://schemas.openxmlformats.org/presentationml/2006/main">
-  <p:cSld>
-    <p:spTree>
-      <p:nvGrpSpPr>
-        <p:cNvPr id="1" name=""/>
-        <p:cNvGrpSpPr/>
-        <p:nvPr/>
-      </p:nvGrpSpPr>
-      <p:grpSpPr>
-        <a:xfrm>
-          <a:off x="0" y="0"/>
-          <a:ext cx="0" cy="0"/>
-          <a:chOff x="0" y="0"/>
-          <a:chExt cx="0" cy="0"/>
-        </a:xfrm>
-      </p:grpSpPr>
-      <p:sp>
-        <p:nvSpPr>
-          <p:cNvPr id="2" name="Образ слайда 1"/>
-          <p:cNvSpPr>
-            <a:spLocks noGrp="1" noRot="1" noChangeAspect="1"/>
-          </p:cNvSpPr>
-          <p:nvPr>
-            <p:ph type="sldImg"/>
-          </p:nvPr>
-        </p:nvSpPr>
-        <p:spPr/>
-      </p:sp>
-      <p:sp>
-        <p:nvSpPr>
-          <p:cNvPr id="3" name="Заметки 2"/>
-          <p:cNvSpPr>
-            <a:spLocks noGrp="1"/>
-          </p:cNvSpPr>
-          <p:nvPr>
-            <p:ph type="body" idx="1"/>
-          </p:nvPr>
-        </p:nvSpPr>
-        <p:spPr/>
-        <p:txBody>
-          <a:bodyPr/>
-          <a:lstStyle/>
-          <a:p>
-            <a:r>
-              <a:rPr lang="ru-RU" sz="1800" dirty="0">
-                <a:effectLst/>
-                <a:latin typeface="Times New Roman" panose="02020603050405020304" pitchFamily="18" charset="0"/>
-                <a:ea typeface="Calibri" panose="020F0502020204030204" pitchFamily="34" charset="0"/>
-              </a:rPr>
-              <a:t>Практическая деятельность позволила развить компетенции, необходимые для профессиональной деятельности в сфере IT-технологий, а приобретённые умения повысили готовность решать реальные производственные задачи, связанные с проектированием, разработкой</a:t>
-            </a:r>
-            <a:r>
-              <a:rPr lang="ru-RU" sz="1800">
-                <a:effectLst/>
-                <a:latin typeface="Times New Roman" panose="02020603050405020304" pitchFamily="18" charset="0"/>
-                <a:ea typeface="Calibri" panose="020F0502020204030204" pitchFamily="34" charset="0"/>
-              </a:rPr>
-              <a:t>, сопровождением и администрированием </a:t>
-            </a:r>
-            <a:r>
-              <a:rPr lang="ru-RU" sz="1800" dirty="0">
-                <a:effectLst/>
-                <a:latin typeface="Times New Roman" panose="02020603050405020304" pitchFamily="18" charset="0"/>
-                <a:ea typeface="Calibri" panose="020F0502020204030204" pitchFamily="34" charset="0"/>
-              </a:rPr>
-              <a:t>информационных систем.</a:t>
-            </a:r>
-            <a:endParaRPr lang="ru-RU" dirty="0"/>
-          </a:p>
-        </p:txBody>
-      </p:sp>
-      <p:sp>
-        <p:nvSpPr>
-          <p:cNvPr id="4" name="Номер слайда 3"/>
-          <p:cNvSpPr>
-            <a:spLocks noGrp="1"/>
-          </p:cNvSpPr>
-          <p:nvPr>
-            <p:ph type="sldNum" sz="quarter" idx="5"/>
-          </p:nvPr>
-        </p:nvSpPr>
-        <p:spPr/>
-        <p:txBody>
-          <a:bodyPr/>
-          <a:lstStyle/>
-          <a:p>
-            <a:fld id="{22D0DB64-6B90-4225-844C-57CC3718F58A}" type="slidenum">
-              <a:rPr lang="ru-RU" smtClean="0"/>
-              <a:t>14</a:t>
-            </a:fld>
-            <a:endParaRPr lang="ru-RU"/>
-          </a:p>
-        </p:txBody>
-      </p:sp>
-    </p:spTree>
-    <p:extLst>
-      <p:ext uri="{BB962C8B-B14F-4D97-AF65-F5344CB8AC3E}">
-        <p14:creationId xmlns:p14="http://schemas.microsoft.com/office/powerpoint/2010/main" val="1428726983"/>
+        <p14:creationId xmlns:p14="http://schemas.microsoft.com/office/powerpoint/2010/main" val="3317320057"/>
       </p:ext>
     </p:extLst>
   </p:cSld>
@@ -1123,8 +736,16 @@
           <a:p>
             <a:r>
               <a:rPr lang="ru-RU" dirty="0"/>
-              <a:t>Цель практики: формирование практических навыков полного жизненного обеспечения ИС</a:t>
-            </a:r>
+              <a:t>Цель практики:</a:t>
+            </a:r>
+            <a:r>
+              <a:rPr lang="ru-RU" b="0" i="0" dirty="0">
+                <a:effectLst/>
+                <a:latin typeface="YS Text"/>
+              </a:rPr>
+              <a:t> подготовка к выполнению дипломной работы и освоение общих и профессиональных компетенций</a:t>
+            </a:r>
+            <a:endParaRPr lang="ru-RU" dirty="0"/>
           </a:p>
         </p:txBody>
       </p:sp>
@@ -1232,7 +853,7 @@
                 <a:ea typeface="Calibri" panose="020F0502020204030204" pitchFamily="34" charset="0"/>
                 <a:cs typeface="Times New Roman" panose="02020603050405020304" pitchFamily="18" charset="0"/>
               </a:rPr>
-              <a:t>«Средняя общеобразовательная школа № 6» является муниципальным бюджетным общеобразовательным учреждением, осуществляющим деятельность в сфере общего образования на территории города Югорска. Организация отвечает за реализацию основных общеобразовательных программ, направленное на качественное обучение, всестороннее развитие, воспитание и социальную адаптацию учащихся. </a:t>
+              <a:t>Преддипломная практика проходила на базе Средней общеобразовательной школы №6 г. Югорска. Организация осуществляет деятельность в сфере общего образования. Школа отвечает за реализацию основных общеобразовательных программ, направленное на качественное обучение, всестороннее развитие и социальную адаптацию учащихся. </a:t>
             </a:r>
             <a:endParaRPr lang="ru-RU" sz="1800" dirty="0">
               <a:effectLst/>
@@ -1326,282 +947,6 @@
           <a:bodyPr/>
           <a:lstStyle/>
           <a:p>
-            <a:r>
-              <a:rPr lang="ru-RU" sz="1800" dirty="0">
-                <a:effectLst/>
-                <a:latin typeface="Times New Roman" panose="02020603050405020304" pitchFamily="18" charset="0"/>
-                <a:ea typeface="Calibri" panose="020F0502020204030204" pitchFamily="34" charset="0"/>
-              </a:rPr>
-              <a:t>Целью прохождения производственной практики по ПМ 05 было освоение жизненного цикла создания информационных систем. Ход работы представлен на экране.</a:t>
-            </a:r>
-            <a:endParaRPr lang="ru-RU" dirty="0"/>
-          </a:p>
-        </p:txBody>
-      </p:sp>
-      <p:sp>
-        <p:nvSpPr>
-          <p:cNvPr id="4" name="Номер слайда 3"/>
-          <p:cNvSpPr>
-            <a:spLocks noGrp="1"/>
-          </p:cNvSpPr>
-          <p:nvPr>
-            <p:ph type="sldNum" sz="quarter" idx="5"/>
-          </p:nvPr>
-        </p:nvSpPr>
-        <p:spPr/>
-        <p:txBody>
-          <a:bodyPr/>
-          <a:lstStyle/>
-          <a:p>
-            <a:fld id="{22D0DB64-6B90-4225-844C-57CC3718F58A}" type="slidenum">
-              <a:rPr lang="ru-RU" smtClean="0"/>
-              <a:t>4</a:t>
-            </a:fld>
-            <a:endParaRPr lang="ru-RU"/>
-          </a:p>
-        </p:txBody>
-      </p:sp>
-    </p:spTree>
-    <p:extLst>
-      <p:ext uri="{BB962C8B-B14F-4D97-AF65-F5344CB8AC3E}">
-        <p14:creationId xmlns:p14="http://schemas.microsoft.com/office/powerpoint/2010/main" val="3592857497"/>
-      </p:ext>
-    </p:extLst>
-  </p:cSld>
-  <p:clrMapOvr>
-    <a:masterClrMapping/>
-  </p:clrMapOvr>
-</p:notes>
-</file>
-
-<file path=ppt/notesSlides/notesSlide5.xml><?xml version="1.0" encoding="utf-8"?>
-<p:notes xmlns:a="http://schemas.openxmlformats.org/drawingml/2006/main" xmlns:r="http://schemas.openxmlformats.org/officeDocument/2006/relationships" xmlns:p="http://schemas.openxmlformats.org/presentationml/2006/main">
-  <p:cSld>
-    <p:spTree>
-      <p:nvGrpSpPr>
-        <p:cNvPr id="1" name=""/>
-        <p:cNvGrpSpPr/>
-        <p:nvPr/>
-      </p:nvGrpSpPr>
-      <p:grpSpPr>
-        <a:xfrm>
-          <a:off x="0" y="0"/>
-          <a:ext cx="0" cy="0"/>
-          <a:chOff x="0" y="0"/>
-          <a:chExt cx="0" cy="0"/>
-        </a:xfrm>
-      </p:grpSpPr>
-      <p:sp>
-        <p:nvSpPr>
-          <p:cNvPr id="2" name="Образ слайда 1"/>
-          <p:cNvSpPr>
-            <a:spLocks noGrp="1" noRot="1" noChangeAspect="1"/>
-          </p:cNvSpPr>
-          <p:nvPr>
-            <p:ph type="sldImg"/>
-          </p:nvPr>
-        </p:nvSpPr>
-        <p:spPr/>
-      </p:sp>
-      <p:sp>
-        <p:nvSpPr>
-          <p:cNvPr id="3" name="Заметки 2"/>
-          <p:cNvSpPr>
-            <a:spLocks noGrp="1"/>
-          </p:cNvSpPr>
-          <p:nvPr>
-            <p:ph type="body" idx="1"/>
-          </p:nvPr>
-        </p:nvSpPr>
-        <p:spPr/>
-        <p:txBody>
-          <a:bodyPr/>
-          <a:lstStyle/>
-          <a:p>
-            <a:r>
-              <a:rPr lang="ru-RU" sz="1800" dirty="0">
-                <a:effectLst/>
-                <a:latin typeface="Times New Roman" panose="02020603050405020304" pitchFamily="18" charset="0"/>
-                <a:ea typeface="Calibri" panose="020F0502020204030204" pitchFamily="34" charset="0"/>
-              </a:rPr>
-              <a:t>Целью прохождения производственной практики по ПМ было освоение процессов технической поддержки и сопровождения информационных систем. Ход работы представлен на экране.</a:t>
-            </a:r>
-            <a:endParaRPr lang="ru-RU" dirty="0"/>
-          </a:p>
-        </p:txBody>
-      </p:sp>
-      <p:sp>
-        <p:nvSpPr>
-          <p:cNvPr id="4" name="Номер слайда 3"/>
-          <p:cNvSpPr>
-            <a:spLocks noGrp="1"/>
-          </p:cNvSpPr>
-          <p:nvPr>
-            <p:ph type="sldNum" sz="quarter" idx="5"/>
-          </p:nvPr>
-        </p:nvSpPr>
-        <p:spPr/>
-        <p:txBody>
-          <a:bodyPr/>
-          <a:lstStyle/>
-          <a:p>
-            <a:fld id="{22D0DB64-6B90-4225-844C-57CC3718F58A}" type="slidenum">
-              <a:rPr lang="ru-RU" smtClean="0"/>
-              <a:t>5</a:t>
-            </a:fld>
-            <a:endParaRPr lang="ru-RU"/>
-          </a:p>
-        </p:txBody>
-      </p:sp>
-    </p:spTree>
-    <p:extLst>
-      <p:ext uri="{BB962C8B-B14F-4D97-AF65-F5344CB8AC3E}">
-        <p14:creationId xmlns:p14="http://schemas.microsoft.com/office/powerpoint/2010/main" val="1678435346"/>
-      </p:ext>
-    </p:extLst>
-  </p:cSld>
-  <p:clrMapOvr>
-    <a:masterClrMapping/>
-  </p:clrMapOvr>
-</p:notes>
-</file>
-
-<file path=ppt/notesSlides/notesSlide6.xml><?xml version="1.0" encoding="utf-8"?>
-<p:notes xmlns:a="http://schemas.openxmlformats.org/drawingml/2006/main" xmlns:r="http://schemas.openxmlformats.org/officeDocument/2006/relationships" xmlns:p="http://schemas.openxmlformats.org/presentationml/2006/main">
-  <p:cSld>
-    <p:spTree>
-      <p:nvGrpSpPr>
-        <p:cNvPr id="1" name=""/>
-        <p:cNvGrpSpPr/>
-        <p:nvPr/>
-      </p:nvGrpSpPr>
-      <p:grpSpPr>
-        <a:xfrm>
-          <a:off x="0" y="0"/>
-          <a:ext cx="0" cy="0"/>
-          <a:chOff x="0" y="0"/>
-          <a:chExt cx="0" cy="0"/>
-        </a:xfrm>
-      </p:grpSpPr>
-      <p:sp>
-        <p:nvSpPr>
-          <p:cNvPr id="2" name="Образ слайда 1"/>
-          <p:cNvSpPr>
-            <a:spLocks noGrp="1" noRot="1" noChangeAspect="1"/>
-          </p:cNvSpPr>
-          <p:nvPr>
-            <p:ph type="sldImg"/>
-          </p:nvPr>
-        </p:nvSpPr>
-        <p:spPr/>
-      </p:sp>
-      <p:sp>
-        <p:nvSpPr>
-          <p:cNvPr id="3" name="Заметки 2"/>
-          <p:cNvSpPr>
-            <a:spLocks noGrp="1"/>
-          </p:cNvSpPr>
-          <p:nvPr>
-            <p:ph type="body" idx="1"/>
-          </p:nvPr>
-        </p:nvSpPr>
-        <p:spPr/>
-        <p:txBody>
-          <a:bodyPr/>
-          <a:lstStyle/>
-          <a:p>
-            <a:r>
-              <a:rPr lang="ru-RU" sz="1800" dirty="0">
-                <a:effectLst/>
-                <a:latin typeface="Times New Roman" panose="02020603050405020304" pitchFamily="18" charset="0"/>
-                <a:ea typeface="Calibri" panose="020F0502020204030204" pitchFamily="34" charset="0"/>
-              </a:rPr>
-              <a:t>Целью прохождения производственной практики по ПМ 07 было освоение процессов администрирования серверной инфраструктуры и систем управления базами данных. Ход работы представлен на экране.</a:t>
-            </a:r>
-            <a:endParaRPr lang="ru-RU" dirty="0"/>
-          </a:p>
-        </p:txBody>
-      </p:sp>
-      <p:sp>
-        <p:nvSpPr>
-          <p:cNvPr id="4" name="Номер слайда 3"/>
-          <p:cNvSpPr>
-            <a:spLocks noGrp="1"/>
-          </p:cNvSpPr>
-          <p:nvPr>
-            <p:ph type="sldNum" sz="quarter" idx="5"/>
-          </p:nvPr>
-        </p:nvSpPr>
-        <p:spPr/>
-        <p:txBody>
-          <a:bodyPr/>
-          <a:lstStyle/>
-          <a:p>
-            <a:fld id="{22D0DB64-6B90-4225-844C-57CC3718F58A}" type="slidenum">
-              <a:rPr lang="ru-RU" smtClean="0"/>
-              <a:t>6</a:t>
-            </a:fld>
-            <a:endParaRPr lang="ru-RU"/>
-          </a:p>
-        </p:txBody>
-      </p:sp>
-    </p:spTree>
-    <p:extLst>
-      <p:ext uri="{BB962C8B-B14F-4D97-AF65-F5344CB8AC3E}">
-        <p14:creationId xmlns:p14="http://schemas.microsoft.com/office/powerpoint/2010/main" val="1995999578"/>
-      </p:ext>
-    </p:extLst>
-  </p:cSld>
-  <p:clrMapOvr>
-    <a:masterClrMapping/>
-  </p:clrMapOvr>
-</p:notes>
-</file>
-
-<file path=ppt/notesSlides/notesSlide7.xml><?xml version="1.0" encoding="utf-8"?>
-<p:notes xmlns:a="http://schemas.openxmlformats.org/drawingml/2006/main" xmlns:r="http://schemas.openxmlformats.org/officeDocument/2006/relationships" xmlns:p="http://schemas.openxmlformats.org/presentationml/2006/main">
-  <p:cSld>
-    <p:spTree>
-      <p:nvGrpSpPr>
-        <p:cNvPr id="1" name=""/>
-        <p:cNvGrpSpPr/>
-        <p:nvPr/>
-      </p:nvGrpSpPr>
-      <p:grpSpPr>
-        <a:xfrm>
-          <a:off x="0" y="0"/>
-          <a:ext cx="0" cy="0"/>
-          <a:chOff x="0" y="0"/>
-          <a:chExt cx="0" cy="0"/>
-        </a:xfrm>
-      </p:grpSpPr>
-      <p:sp>
-        <p:nvSpPr>
-          <p:cNvPr id="2" name="Образ слайда 1"/>
-          <p:cNvSpPr>
-            <a:spLocks noGrp="1" noRot="1" noChangeAspect="1"/>
-          </p:cNvSpPr>
-          <p:nvPr>
-            <p:ph type="sldImg"/>
-          </p:nvPr>
-        </p:nvSpPr>
-        <p:spPr/>
-      </p:sp>
-      <p:sp>
-        <p:nvSpPr>
-          <p:cNvPr id="3" name="Заметки 2"/>
-          <p:cNvSpPr>
-            <a:spLocks noGrp="1"/>
-          </p:cNvSpPr>
-          <p:nvPr>
-            <p:ph type="body" idx="1"/>
-          </p:nvPr>
-        </p:nvSpPr>
-        <p:spPr/>
-        <p:txBody>
-          <a:bodyPr/>
-          <a:lstStyle/>
-          <a:p>
             <a:pPr marL="0" marR="0" lvl="0" indent="0" algn="l" defTabSz="914400" rtl="0" eaLnBrk="1" fontAlgn="auto" latinLnBrk="0" hangingPunct="1">
               <a:lnSpc>
                 <a:spcPct val="100000"/>
@@ -1626,16 +971,53 @@
                 <a:ea typeface="Calibri" panose="020F0502020204030204" pitchFamily="34" charset="0"/>
                 <a:cs typeface="Times New Roman" panose="02020603050405020304" pitchFamily="18" charset="0"/>
               </a:rPr>
-              <a:t>В качестве индивидуального задания для производственной практики была выбрана тема «Разработка эксплуатационной документации для оборудования компьютерного класса».</a:t>
-            </a:r>
-            <a:endParaRPr lang="ru-RU" sz="1800" dirty="0">
-              <a:effectLst/>
-              <a:latin typeface="Calibri" panose="020F0502020204030204" pitchFamily="34" charset="0"/>
-              <a:ea typeface="Calibri" panose="020F0502020204030204" pitchFamily="34" charset="0"/>
-              <a:cs typeface="Times New Roman" panose="02020603050405020304" pitchFamily="18" charset="0"/>
-            </a:endParaRPr>
-          </a:p>
-          <a:p>
+              <a:t>В качестве индивидуального задания для преддипломной практики была выбрана тема «Разработка </a:t>
+            </a:r>
+            <a:r>
+              <a:rPr lang="ru-RU" sz="1800" dirty="0">
+                <a:solidFill>
+                  <a:schemeClr val="tx1"/>
+                </a:solidFill>
+                <a:latin typeface="Times New Roman" panose="02020603050405020304" pitchFamily="18" charset="0"/>
+                <a:cs typeface="Times New Roman" panose="02020603050405020304" pitchFamily="18" charset="0"/>
+              </a:rPr>
+              <a:t>клиентской части веб-сайта для цветочного магазина</a:t>
+            </a:r>
+            <a:r>
+              <a:rPr lang="ru-RU" sz="1800" dirty="0">
+                <a:effectLst/>
+                <a:latin typeface="Times New Roman" panose="02020603050405020304" pitchFamily="18" charset="0"/>
+                <a:ea typeface="Calibri" panose="020F0502020204030204" pitchFamily="34" charset="0"/>
+                <a:cs typeface="Times New Roman" panose="02020603050405020304" pitchFamily="18" charset="0"/>
+              </a:rPr>
+              <a:t>». </a:t>
+            </a:r>
+            <a:r>
+              <a:rPr lang="ru-RU" sz="1800" dirty="0">
+                <a:effectLst/>
+                <a:latin typeface="Times New Roman" panose="02020603050405020304" pitchFamily="18" charset="0"/>
+                <a:ea typeface="Calibri" panose="020F0502020204030204" pitchFamily="34" charset="0"/>
+              </a:rPr>
+              <a:t>Целью задания являлось </a:t>
+            </a:r>
+            <a:r>
+              <a:rPr lang="ru-RU" sz="2800" b="0" i="0" dirty="0">
+                <a:solidFill>
+                  <a:srgbClr val="F7F8FC"/>
+                </a:solidFill>
+                <a:effectLst/>
+                <a:latin typeface="system-ui"/>
+              </a:rPr>
+              <a:t>создание современного, производительного и визуально целостного интерфейса сайта</a:t>
+            </a:r>
+            <a:r>
+              <a:rPr lang="ru-RU" sz="1800" dirty="0">
+                <a:effectLst/>
+                <a:latin typeface="Times New Roman" panose="02020603050405020304" pitchFamily="18" charset="0"/>
+                <a:ea typeface="Calibri" panose="020F0502020204030204" pitchFamily="34" charset="0"/>
+              </a:rPr>
+              <a:t>. Задачи представлены на экране.</a:t>
+            </a:r>
             <a:endParaRPr lang="ru-RU" dirty="0"/>
           </a:p>
         </p:txBody>
@@ -1643,6 +1025,411 @@
       <p:sp>
         <p:nvSpPr>
           <p:cNvPr id="4" name="Номер слайда 3"/>
+          <p:cNvSpPr>
+            <a:spLocks noGrp="1"/>
+          </p:cNvSpPr>
+          <p:nvPr>
+            <p:ph type="sldNum" sz="quarter" idx="5"/>
+          </p:nvPr>
+        </p:nvSpPr>
+        <p:spPr/>
+        <p:txBody>
+          <a:bodyPr/>
+          <a:lstStyle/>
+          <a:p>
+            <a:fld id="{22D0DB64-6B90-4225-844C-57CC3718F58A}" type="slidenum">
+              <a:rPr lang="ru-RU" smtClean="0"/>
+              <a:t>4</a:t>
+            </a:fld>
+            <a:endParaRPr lang="ru-RU"/>
+          </a:p>
+        </p:txBody>
+      </p:sp>
+    </p:spTree>
+    <p:extLst>
+      <p:ext uri="{BB962C8B-B14F-4D97-AF65-F5344CB8AC3E}">
+        <p14:creationId xmlns:p14="http://schemas.microsoft.com/office/powerpoint/2010/main" val="2451100558"/>
+      </p:ext>
+    </p:extLst>
+  </p:cSld>
+  <p:clrMapOvr>
+    <a:masterClrMapping/>
+  </p:clrMapOvr>
+</p:notes>
+</file>
+
+<file path=ppt/notesSlides/notesSlide5.xml><?xml version="1.0" encoding="utf-8"?>
+<p:notes xmlns:a="http://schemas.openxmlformats.org/drawingml/2006/main" xmlns:r="http://schemas.openxmlformats.org/officeDocument/2006/relationships" xmlns:p="http://schemas.openxmlformats.org/presentationml/2006/main">
+  <p:cSld>
+    <p:spTree>
+      <p:nvGrpSpPr>
+        <p:cNvPr id="1" name="">
+          <a:extLst>
+            <a:ext uri="{FF2B5EF4-FFF2-40B4-BE49-F238E27FC236}">
+              <a16:creationId xmlns:a16="http://schemas.microsoft.com/office/drawing/2014/main" id="{BA574691-EFB5-7EE8-DBC1-D304CE4131A8}"/>
+            </a:ext>
+          </a:extLst>
+        </p:cNvPr>
+        <p:cNvGrpSpPr/>
+        <p:nvPr/>
+      </p:nvGrpSpPr>
+      <p:grpSpPr>
+        <a:xfrm>
+          <a:off x="0" y="0"/>
+          <a:ext cx="0" cy="0"/>
+          <a:chOff x="0" y="0"/>
+          <a:chExt cx="0" cy="0"/>
+        </a:xfrm>
+      </p:grpSpPr>
+      <p:sp>
+        <p:nvSpPr>
+          <p:cNvPr id="2" name="Образ слайда 1">
+            <a:extLst>
+              <a:ext uri="{FF2B5EF4-FFF2-40B4-BE49-F238E27FC236}">
+                <a16:creationId xmlns:a16="http://schemas.microsoft.com/office/drawing/2014/main" id="{AF4ED8AF-F723-4E1F-AF83-2D3DA7C04560}"/>
+              </a:ext>
+            </a:extLst>
+          </p:cNvPr>
+          <p:cNvSpPr>
+            <a:spLocks noGrp="1" noRot="1" noChangeAspect="1"/>
+          </p:cNvSpPr>
+          <p:nvPr>
+            <p:ph type="sldImg"/>
+          </p:nvPr>
+        </p:nvSpPr>
+        <p:spPr/>
+      </p:sp>
+      <p:sp>
+        <p:nvSpPr>
+          <p:cNvPr id="3" name="Заметки 2">
+            <a:extLst>
+              <a:ext uri="{FF2B5EF4-FFF2-40B4-BE49-F238E27FC236}">
+                <a16:creationId xmlns:a16="http://schemas.microsoft.com/office/drawing/2014/main" id="{4DB2B8CD-1AA4-6A73-9104-71BBC3A7895C}"/>
+              </a:ext>
+            </a:extLst>
+          </p:cNvPr>
+          <p:cNvSpPr>
+            <a:spLocks noGrp="1"/>
+          </p:cNvSpPr>
+          <p:nvPr>
+            <p:ph type="body" idx="1"/>
+          </p:nvPr>
+        </p:nvSpPr>
+        <p:spPr/>
+        <p:txBody>
+          <a:bodyPr/>
+          <a:lstStyle/>
+          <a:p>
+            <a:pPr marL="0" marR="0" lvl="0" indent="0" algn="l" defTabSz="914400" rtl="0" eaLnBrk="1" fontAlgn="auto" latinLnBrk="0" hangingPunct="1">
+              <a:lnSpc>
+                <a:spcPct val="100000"/>
+              </a:lnSpc>
+              <a:spcBef>
+                <a:spcPts val="0"/>
+              </a:spcBef>
+              <a:spcAft>
+                <a:spcPts val="0"/>
+              </a:spcAft>
+              <a:buClrTx/>
+              <a:buSzTx/>
+              <a:buFontTx/>
+              <a:buNone/>
+              <a:tabLst/>
+              <a:defRPr/>
+            </a:pPr>
+            <a:r>
+              <a:rPr lang="ru-RU" b="0" i="0" dirty="0">
+                <a:solidFill>
+                  <a:srgbClr val="A9AAB8"/>
+                </a:solidFill>
+                <a:effectLst/>
+                <a:latin typeface="+mn-lt"/>
+              </a:rPr>
+              <a:t>Разработка велась с использованием современного стека технологий. </a:t>
+            </a:r>
+            <a:r>
+              <a:rPr lang="ru-RU" i="0" dirty="0">
+                <a:latin typeface="+mn-lt"/>
+              </a:rPr>
+              <a:t>Структура </a:t>
+            </a:r>
+            <a:r>
+              <a:rPr lang="ru-RU" dirty="0"/>
+              <a:t>интерфейса веб-сайта на примере главной страницы состояла из элементов, представленных на экране</a:t>
+            </a:r>
+          </a:p>
+        </p:txBody>
+      </p:sp>
+      <p:sp>
+        <p:nvSpPr>
+          <p:cNvPr id="4" name="Номер слайда 3">
+            <a:extLst>
+              <a:ext uri="{FF2B5EF4-FFF2-40B4-BE49-F238E27FC236}">
+                <a16:creationId xmlns:a16="http://schemas.microsoft.com/office/drawing/2014/main" id="{D2C81E2E-98DB-8831-5FC1-2B81A96F5C5A}"/>
+              </a:ext>
+            </a:extLst>
+          </p:cNvPr>
+          <p:cNvSpPr>
+            <a:spLocks noGrp="1"/>
+          </p:cNvSpPr>
+          <p:nvPr>
+            <p:ph type="sldNum" sz="quarter" idx="5"/>
+          </p:nvPr>
+        </p:nvSpPr>
+        <p:spPr/>
+        <p:txBody>
+          <a:bodyPr/>
+          <a:lstStyle/>
+          <a:p>
+            <a:fld id="{22D0DB64-6B90-4225-844C-57CC3718F58A}" type="slidenum">
+              <a:rPr lang="ru-RU" smtClean="0"/>
+              <a:t>5</a:t>
+            </a:fld>
+            <a:endParaRPr lang="ru-RU"/>
+          </a:p>
+        </p:txBody>
+      </p:sp>
+    </p:spTree>
+    <p:extLst>
+      <p:ext uri="{BB962C8B-B14F-4D97-AF65-F5344CB8AC3E}">
+        <p14:creationId xmlns:p14="http://schemas.microsoft.com/office/powerpoint/2010/main" val="1853308493"/>
+      </p:ext>
+    </p:extLst>
+  </p:cSld>
+  <p:clrMapOvr>
+    <a:masterClrMapping/>
+  </p:clrMapOvr>
+</p:notes>
+</file>
+
+<file path=ppt/notesSlides/notesSlide6.xml><?xml version="1.0" encoding="utf-8"?>
+<p:notes xmlns:a="http://schemas.openxmlformats.org/drawingml/2006/main" xmlns:r="http://schemas.openxmlformats.org/officeDocument/2006/relationships" xmlns:p="http://schemas.openxmlformats.org/presentationml/2006/main">
+  <p:cSld>
+    <p:spTree>
+      <p:nvGrpSpPr>
+        <p:cNvPr id="1" name="">
+          <a:extLst>
+            <a:ext uri="{FF2B5EF4-FFF2-40B4-BE49-F238E27FC236}">
+              <a16:creationId xmlns:a16="http://schemas.microsoft.com/office/drawing/2014/main" id="{8B453C8C-71E5-88C7-9BB1-4972C5C42E1B}"/>
+            </a:ext>
+          </a:extLst>
+        </p:cNvPr>
+        <p:cNvGrpSpPr/>
+        <p:nvPr/>
+      </p:nvGrpSpPr>
+      <p:grpSpPr>
+        <a:xfrm>
+          <a:off x="0" y="0"/>
+          <a:ext cx="0" cy="0"/>
+          <a:chOff x="0" y="0"/>
+          <a:chExt cx="0" cy="0"/>
+        </a:xfrm>
+      </p:grpSpPr>
+      <p:sp>
+        <p:nvSpPr>
+          <p:cNvPr id="2" name="Образ слайда 1">
+            <a:extLst>
+              <a:ext uri="{FF2B5EF4-FFF2-40B4-BE49-F238E27FC236}">
+                <a16:creationId xmlns:a16="http://schemas.microsoft.com/office/drawing/2014/main" id="{86A80B4D-B7B7-21FA-E641-A0A7713A7EF4}"/>
+              </a:ext>
+            </a:extLst>
+          </p:cNvPr>
+          <p:cNvSpPr>
+            <a:spLocks noGrp="1" noRot="1" noChangeAspect="1"/>
+          </p:cNvSpPr>
+          <p:nvPr>
+            <p:ph type="sldImg"/>
+          </p:nvPr>
+        </p:nvSpPr>
+        <p:spPr/>
+      </p:sp>
+      <p:sp>
+        <p:nvSpPr>
+          <p:cNvPr id="3" name="Заметки 2">
+            <a:extLst>
+              <a:ext uri="{FF2B5EF4-FFF2-40B4-BE49-F238E27FC236}">
+                <a16:creationId xmlns:a16="http://schemas.microsoft.com/office/drawing/2014/main" id="{398EF42D-4821-1F22-B341-E1352CCAAF74}"/>
+              </a:ext>
+            </a:extLst>
+          </p:cNvPr>
+          <p:cNvSpPr>
+            <a:spLocks noGrp="1"/>
+          </p:cNvSpPr>
+          <p:nvPr>
+            <p:ph type="body" idx="1"/>
+          </p:nvPr>
+        </p:nvSpPr>
+        <p:spPr/>
+        <p:txBody>
+          <a:bodyPr/>
+          <a:lstStyle/>
+          <a:p>
+            <a:pPr algn="l"/>
+            <a:r>
+              <a:rPr lang="ru-RU" b="0" i="0" dirty="0">
+                <a:solidFill>
+                  <a:srgbClr val="F7F8FC"/>
+                </a:solidFill>
+                <a:effectLst/>
+                <a:latin typeface="+mn-lt"/>
+              </a:rPr>
+              <a:t>Данный слайд демонстрирует шапку интерфейса. Элемент включает в себя логотип, который одновременно является ссылкой на главную страницу</a:t>
+            </a:r>
+            <a:r>
+              <a:rPr lang="ru-RU" b="0" i="1" dirty="0">
+                <a:solidFill>
+                  <a:srgbClr val="F7F8FC"/>
+                </a:solidFill>
+                <a:effectLst/>
+                <a:latin typeface="system-ui"/>
+              </a:rPr>
+              <a:t>,</a:t>
+            </a:r>
+            <a:r>
+              <a:rPr lang="ru-RU" b="0" i="0" dirty="0">
+                <a:solidFill>
+                  <a:srgbClr val="F7F8FC"/>
+                </a:solidFill>
+                <a:effectLst/>
+                <a:latin typeface="+mn-lt"/>
+              </a:rPr>
+              <a:t> и контактную информацию: адрес магазина и номер телефона.</a:t>
+            </a:r>
+            <a:endParaRPr lang="ru-RU" dirty="0"/>
+          </a:p>
+        </p:txBody>
+      </p:sp>
+      <p:sp>
+        <p:nvSpPr>
+          <p:cNvPr id="4" name="Номер слайда 3">
+            <a:extLst>
+              <a:ext uri="{FF2B5EF4-FFF2-40B4-BE49-F238E27FC236}">
+                <a16:creationId xmlns:a16="http://schemas.microsoft.com/office/drawing/2014/main" id="{CA8EDD90-4A77-F993-916D-92D5ADD631E7}"/>
+              </a:ext>
+            </a:extLst>
+          </p:cNvPr>
+          <p:cNvSpPr>
+            <a:spLocks noGrp="1"/>
+          </p:cNvSpPr>
+          <p:nvPr>
+            <p:ph type="sldNum" sz="quarter" idx="5"/>
+          </p:nvPr>
+        </p:nvSpPr>
+        <p:spPr/>
+        <p:txBody>
+          <a:bodyPr/>
+          <a:lstStyle/>
+          <a:p>
+            <a:fld id="{22D0DB64-6B90-4225-844C-57CC3718F58A}" type="slidenum">
+              <a:rPr lang="ru-RU" smtClean="0"/>
+              <a:t>6</a:t>
+            </a:fld>
+            <a:endParaRPr lang="ru-RU"/>
+          </a:p>
+        </p:txBody>
+      </p:sp>
+    </p:spTree>
+    <p:extLst>
+      <p:ext uri="{BB962C8B-B14F-4D97-AF65-F5344CB8AC3E}">
+        <p14:creationId xmlns:p14="http://schemas.microsoft.com/office/powerpoint/2010/main" val="2267890905"/>
+      </p:ext>
+    </p:extLst>
+  </p:cSld>
+  <p:clrMapOvr>
+    <a:masterClrMapping/>
+  </p:clrMapOvr>
+</p:notes>
+</file>
+
+<file path=ppt/notesSlides/notesSlide7.xml><?xml version="1.0" encoding="utf-8"?>
+<p:notes xmlns:a="http://schemas.openxmlformats.org/drawingml/2006/main" xmlns:r="http://schemas.openxmlformats.org/officeDocument/2006/relationships" xmlns:p="http://schemas.openxmlformats.org/presentationml/2006/main">
+  <p:cSld>
+    <p:spTree>
+      <p:nvGrpSpPr>
+        <p:cNvPr id="1" name="">
+          <a:extLst>
+            <a:ext uri="{FF2B5EF4-FFF2-40B4-BE49-F238E27FC236}">
+              <a16:creationId xmlns:a16="http://schemas.microsoft.com/office/drawing/2014/main" id="{4CD8A17B-6767-2C25-527F-975E6F4CD51A}"/>
+            </a:ext>
+          </a:extLst>
+        </p:cNvPr>
+        <p:cNvGrpSpPr/>
+        <p:nvPr/>
+      </p:nvGrpSpPr>
+      <p:grpSpPr>
+        <a:xfrm>
+          <a:off x="0" y="0"/>
+          <a:ext cx="0" cy="0"/>
+          <a:chOff x="0" y="0"/>
+          <a:chExt cx="0" cy="0"/>
+        </a:xfrm>
+      </p:grpSpPr>
+      <p:sp>
+        <p:nvSpPr>
+          <p:cNvPr id="2" name="Образ слайда 1">
+            <a:extLst>
+              <a:ext uri="{FF2B5EF4-FFF2-40B4-BE49-F238E27FC236}">
+                <a16:creationId xmlns:a16="http://schemas.microsoft.com/office/drawing/2014/main" id="{65638460-6D19-AAFE-20F7-C1A7CA5E6BCF}"/>
+              </a:ext>
+            </a:extLst>
+          </p:cNvPr>
+          <p:cNvSpPr>
+            <a:spLocks noGrp="1" noRot="1" noChangeAspect="1"/>
+          </p:cNvSpPr>
+          <p:nvPr>
+            <p:ph type="sldImg"/>
+          </p:nvPr>
+        </p:nvSpPr>
+        <p:spPr/>
+      </p:sp>
+      <p:sp>
+        <p:nvSpPr>
+          <p:cNvPr id="3" name="Заметки 2">
+            <a:extLst>
+              <a:ext uri="{FF2B5EF4-FFF2-40B4-BE49-F238E27FC236}">
+                <a16:creationId xmlns:a16="http://schemas.microsoft.com/office/drawing/2014/main" id="{B6970271-7910-A436-6136-2D99FB83812E}"/>
+              </a:ext>
+            </a:extLst>
+          </p:cNvPr>
+          <p:cNvSpPr>
+            <a:spLocks noGrp="1"/>
+          </p:cNvSpPr>
+          <p:nvPr>
+            <p:ph type="body" idx="1"/>
+          </p:nvPr>
+        </p:nvSpPr>
+        <p:spPr/>
+        <p:txBody>
+          <a:bodyPr/>
+          <a:lstStyle/>
+          <a:p>
+            <a:pPr algn="l"/>
+            <a:r>
+              <a:rPr lang="ru-RU" b="0" i="0" dirty="0">
+                <a:solidFill>
+                  <a:srgbClr val="F7F8FC"/>
+                </a:solidFill>
+                <a:effectLst/>
+                <a:latin typeface="+mn-lt"/>
+              </a:rPr>
+              <a:t>Навигационное меню – обеспечивает быстрый переход между основными разделами сайта. включает четыре пункта. Каждый элемент меню оформлен как ссылка.</a:t>
+            </a:r>
+            <a:br>
+              <a:rPr lang="ru-RU" dirty="0"/>
+            </a:br>
+            <a:endParaRPr lang="ru-RU" dirty="0"/>
+          </a:p>
+        </p:txBody>
+      </p:sp>
+      <p:sp>
+        <p:nvSpPr>
+          <p:cNvPr id="4" name="Номер слайда 3">
+            <a:extLst>
+              <a:ext uri="{FF2B5EF4-FFF2-40B4-BE49-F238E27FC236}">
+                <a16:creationId xmlns:a16="http://schemas.microsoft.com/office/drawing/2014/main" id="{D9C23B4C-C8BE-3B85-BAF2-937D9280E3B6}"/>
+              </a:ext>
+            </a:extLst>
+          </p:cNvPr>
           <p:cNvSpPr>
             <a:spLocks noGrp="1"/>
           </p:cNvSpPr>
@@ -1666,7 +1453,7 @@
     </p:spTree>
     <p:extLst>
       <p:ext uri="{BB962C8B-B14F-4D97-AF65-F5344CB8AC3E}">
-        <p14:creationId xmlns:p14="http://schemas.microsoft.com/office/powerpoint/2010/main" val="1471337130"/>
+        <p14:creationId xmlns:p14="http://schemas.microsoft.com/office/powerpoint/2010/main" val="3271228268"/>
       </p:ext>
     </p:extLst>
   </p:cSld>
@@ -1681,7 +1468,13 @@
   <p:cSld>
     <p:spTree>
       <p:nvGrpSpPr>
-        <p:cNvPr id="1" name=""/>
+        <p:cNvPr id="1" name="">
+          <a:extLst>
+            <a:ext uri="{FF2B5EF4-FFF2-40B4-BE49-F238E27FC236}">
+              <a16:creationId xmlns:a16="http://schemas.microsoft.com/office/drawing/2014/main" id="{F0954ABA-A856-359C-8AB0-46F08C81BF6A}"/>
+            </a:ext>
+          </a:extLst>
+        </p:cNvPr>
         <p:cNvGrpSpPr/>
         <p:nvPr/>
       </p:nvGrpSpPr>
@@ -1695,7 +1488,13 @@
       </p:grpSpPr>
       <p:sp>
         <p:nvSpPr>
-          <p:cNvPr id="2" name="Образ слайда 1"/>
+          <p:cNvPr id="2" name="Образ слайда 1">
+            <a:extLst>
+              <a:ext uri="{FF2B5EF4-FFF2-40B4-BE49-F238E27FC236}">
+                <a16:creationId xmlns:a16="http://schemas.microsoft.com/office/drawing/2014/main" id="{6EEA92F1-0F13-C300-0FA8-D76B4888FDAA}"/>
+              </a:ext>
+            </a:extLst>
+          </p:cNvPr>
           <p:cNvSpPr>
             <a:spLocks noGrp="1" noRot="1" noChangeAspect="1"/>
           </p:cNvSpPr>
@@ -1707,7 +1506,13 @@
       </p:sp>
       <p:sp>
         <p:nvSpPr>
-          <p:cNvPr id="3" name="Заметки 2"/>
+          <p:cNvPr id="3" name="Заметки 2">
+            <a:extLst>
+              <a:ext uri="{FF2B5EF4-FFF2-40B4-BE49-F238E27FC236}">
+                <a16:creationId xmlns:a16="http://schemas.microsoft.com/office/drawing/2014/main" id="{ACEF27DE-EF6C-BCCE-5408-0C28D956CB84}"/>
+              </a:ext>
+            </a:extLst>
+          </p:cNvPr>
           <p:cNvSpPr>
             <a:spLocks noGrp="1"/>
           </p:cNvSpPr>
@@ -1720,21 +1525,49 @@
           <a:bodyPr/>
           <a:lstStyle/>
           <a:p>
-            <a:r>
-              <a:rPr lang="ru-RU" sz="1800" dirty="0">
+            <a:pPr algn="l"/>
+            <a:r>
+              <a:rPr lang="ru-RU" b="0" i="0" dirty="0">
+                <a:solidFill>
+                  <a:srgbClr val="F7F8FC"/>
+                </a:solidFill>
                 <a:effectLst/>
-                <a:latin typeface="Times New Roman" panose="02020603050405020304" pitchFamily="18" charset="0"/>
-                <a:ea typeface="Calibri" panose="020F0502020204030204" pitchFamily="34" charset="0"/>
+                <a:latin typeface="+mn-lt"/>
               </a:rPr>
-              <a:t>Цель индивидуального задания: создание комплекта нормативно-методических документов, регламентирующих порядок использования и технического обслуживания оборудования школьного компьютерного класса. Задачи представлены на экране.</a:t>
-            </a:r>
-            <a:endParaRPr lang="ru-RU" dirty="0"/>
-          </a:p>
-        </p:txBody>
-      </p:sp>
-      <p:sp>
-        <p:nvSpPr>
-          <p:cNvPr id="4" name="Номер слайда 3"/>
+              <a:t>Данный слайд демонстрирует секцию категорий товаров. Каталог представлен в виде адаптивной сетки из четырёх элементов. Каждая </a:t>
+            </a:r>
+            <a:r>
+              <a:rPr lang="ru-RU" b="0" i="0" dirty="0" err="1">
+                <a:solidFill>
+                  <a:srgbClr val="F7F8FC"/>
+                </a:solidFill>
+                <a:effectLst/>
+                <a:latin typeface="+mn-lt"/>
+              </a:rPr>
+              <a:t>каиегория</a:t>
+            </a:r>
+            <a:r>
+              <a:rPr lang="ru-RU" b="0" i="0" dirty="0">
+                <a:solidFill>
+                  <a:srgbClr val="F7F8FC"/>
+                </a:solidFill>
+                <a:effectLst/>
+                <a:latin typeface="+mn-lt"/>
+              </a:rPr>
+              <a:t> включает визуальный элемент — изображение категории и текстовое описание. Изображения обернуты в ссылки, что позволяет перейти к просмотру товаров конкретной категории.</a:t>
+            </a:r>
+          </a:p>
+        </p:txBody>
+      </p:sp>
+      <p:sp>
+        <p:nvSpPr>
+          <p:cNvPr id="4" name="Номер слайда 3">
+            <a:extLst>
+              <a:ext uri="{FF2B5EF4-FFF2-40B4-BE49-F238E27FC236}">
+                <a16:creationId xmlns:a16="http://schemas.microsoft.com/office/drawing/2014/main" id="{5965EC2E-16FA-AEF0-6FB0-50B79C22AF68}"/>
+              </a:ext>
+            </a:extLst>
+          </p:cNvPr>
           <p:cNvSpPr>
             <a:spLocks noGrp="1"/>
           </p:cNvSpPr>
@@ -1758,7 +1591,7 @@
     </p:spTree>
     <p:extLst>
       <p:ext uri="{BB962C8B-B14F-4D97-AF65-F5344CB8AC3E}">
-        <p14:creationId xmlns:p14="http://schemas.microsoft.com/office/powerpoint/2010/main" val="2451100558"/>
+        <p14:creationId xmlns:p14="http://schemas.microsoft.com/office/powerpoint/2010/main" val="1223650252"/>
       </p:ext>
     </p:extLst>
   </p:cSld>
@@ -1773,7 +1606,13 @@
   <p:cSld>
     <p:spTree>
       <p:nvGrpSpPr>
-        <p:cNvPr id="1" name=""/>
+        <p:cNvPr id="1" name="">
+          <a:extLst>
+            <a:ext uri="{FF2B5EF4-FFF2-40B4-BE49-F238E27FC236}">
+              <a16:creationId xmlns:a16="http://schemas.microsoft.com/office/drawing/2014/main" id="{ED4E404D-B680-C2E3-C07D-C97E20545CEE}"/>
+            </a:ext>
+          </a:extLst>
+        </p:cNvPr>
         <p:cNvGrpSpPr/>
         <p:nvPr/>
       </p:nvGrpSpPr>
@@ -1787,7 +1626,13 @@
       </p:grpSpPr>
       <p:sp>
         <p:nvSpPr>
-          <p:cNvPr id="2" name="Образ слайда 1"/>
+          <p:cNvPr id="2" name="Образ слайда 1">
+            <a:extLst>
+              <a:ext uri="{FF2B5EF4-FFF2-40B4-BE49-F238E27FC236}">
+                <a16:creationId xmlns:a16="http://schemas.microsoft.com/office/drawing/2014/main" id="{C53F7931-59BC-63AA-DC8B-A51F0180EC91}"/>
+              </a:ext>
+            </a:extLst>
+          </p:cNvPr>
           <p:cNvSpPr>
             <a:spLocks noGrp="1" noRot="1" noChangeAspect="1"/>
           </p:cNvSpPr>
@@ -1799,7 +1644,13 @@
       </p:sp>
       <p:sp>
         <p:nvSpPr>
-          <p:cNvPr id="3" name="Заметки 2"/>
+          <p:cNvPr id="3" name="Заметки 2">
+            <a:extLst>
+              <a:ext uri="{FF2B5EF4-FFF2-40B4-BE49-F238E27FC236}">
+                <a16:creationId xmlns:a16="http://schemas.microsoft.com/office/drawing/2014/main" id="{2AC93504-2BA7-926E-D37A-DF68B50D5893}"/>
+              </a:ext>
+            </a:extLst>
+          </p:cNvPr>
           <p:cNvSpPr>
             <a:spLocks noGrp="1"/>
           </p:cNvSpPr>
@@ -1812,21 +1663,49 @@
           <a:bodyPr/>
           <a:lstStyle/>
           <a:p>
-            <a:r>
-              <a:rPr lang="ru-RU" sz="1800" dirty="0">
+            <a:pPr algn="l"/>
+            <a:r>
+              <a:rPr lang="ru-RU" b="0" i="0" dirty="0">
+                <a:solidFill>
+                  <a:srgbClr val="F7F8FC"/>
+                </a:solidFill>
                 <a:effectLst/>
-                <a:latin typeface="Times New Roman" panose="02020603050405020304" pitchFamily="18" charset="0"/>
-                <a:ea typeface="Calibri" panose="020F0502020204030204" pitchFamily="34" charset="0"/>
+                <a:latin typeface="+mn-lt"/>
               </a:rPr>
-              <a:t>Эксплуатационная документация состоит из четырёх разделов, каждый из которых закрывает определённый аспект эксплуатации оборудования.</a:t>
-            </a:r>
-            <a:endParaRPr lang="ru-RU" dirty="0"/>
-          </a:p>
-        </p:txBody>
-      </p:sp>
-      <p:sp>
-        <p:nvSpPr>
-          <p:cNvPr id="4" name="Номер слайда 3"/>
+              <a:t>подвал сайта — завершающий элемент страницы. Блок содержит дублирующую навигацию, которая повторяет пункты основного меню, ссылку на сообщество в социальной сети и кнопку «Наверх», реализованной с помощью JavaScript-события </a:t>
+            </a:r>
+            <a:r>
+              <a:rPr lang="ru-RU" b="0" i="0" dirty="0" err="1">
+                <a:solidFill>
+                  <a:srgbClr val="F7F8FC"/>
+                </a:solidFill>
+                <a:effectLst/>
+                <a:latin typeface="+mn-lt"/>
+              </a:rPr>
+              <a:t>onclick</a:t>
+            </a:r>
+            <a:r>
+              <a:rPr lang="ru-RU" b="0" i="0" dirty="0">
+                <a:solidFill>
+                  <a:srgbClr val="F7F8FC"/>
+                </a:solidFill>
+                <a:effectLst/>
+                <a:latin typeface="+mn-lt"/>
+              </a:rPr>
+              <a:t>. </a:t>
+            </a:r>
+          </a:p>
+        </p:txBody>
+      </p:sp>
+      <p:sp>
+        <p:nvSpPr>
+          <p:cNvPr id="4" name="Номер слайда 3">
+            <a:extLst>
+              <a:ext uri="{FF2B5EF4-FFF2-40B4-BE49-F238E27FC236}">
+                <a16:creationId xmlns:a16="http://schemas.microsoft.com/office/drawing/2014/main" id="{06E20109-5483-4007-7155-0126B6FF227B}"/>
+              </a:ext>
+            </a:extLst>
+          </p:cNvPr>
           <p:cNvSpPr>
             <a:spLocks noGrp="1"/>
           </p:cNvSpPr>
@@ -1850,7 +1729,7 @@
     </p:spTree>
     <p:extLst>
       <p:ext uri="{BB962C8B-B14F-4D97-AF65-F5344CB8AC3E}">
-        <p14:creationId xmlns:p14="http://schemas.microsoft.com/office/powerpoint/2010/main" val="2557127207"/>
+        <p14:creationId xmlns:p14="http://schemas.microsoft.com/office/powerpoint/2010/main" val="1319147387"/>
       </p:ext>
     </p:extLst>
   </p:cSld>
@@ -2086,7 +1965,7 @@
           <a:p>
             <a:fld id="{D0E9117A-C41E-4579-A031-EC76166658D6}" type="datetimeFigureOut">
               <a:rPr lang="ru-RU" smtClean="0"/>
-              <a:t>17.04.2026</a:t>
+              <a:t>15.05.2026</a:t>
             </a:fld>
             <a:endParaRPr lang="ru-RU"/>
           </a:p>
@@ -2294,7 +2173,7 @@
           <a:p>
             <a:fld id="{D0E9117A-C41E-4579-A031-EC76166658D6}" type="datetimeFigureOut">
               <a:rPr lang="ru-RU" smtClean="0"/>
-              <a:t>17.04.2026</a:t>
+              <a:t>15.05.2026</a:t>
             </a:fld>
             <a:endParaRPr lang="ru-RU"/>
           </a:p>
@@ -2550,7 +2429,7 @@
           <a:p>
             <a:fld id="{D0E9117A-C41E-4579-A031-EC76166658D6}" type="datetimeFigureOut">
               <a:rPr lang="ru-RU" smtClean="0"/>
-              <a:t>17.04.2026</a:t>
+              <a:t>15.05.2026</a:t>
             </a:fld>
             <a:endParaRPr lang="ru-RU"/>
           </a:p>
@@ -2720,7 +2599,7 @@
           <a:p>
             <a:fld id="{D0E9117A-C41E-4579-A031-EC76166658D6}" type="datetimeFigureOut">
               <a:rPr lang="ru-RU" smtClean="0"/>
-              <a:t>17.04.2026</a:t>
+              <a:t>15.05.2026</a:t>
             </a:fld>
             <a:endParaRPr lang="ru-RU"/>
           </a:p>
@@ -3063,7 +2942,7 @@
           <a:p>
             <a:fld id="{D0E9117A-C41E-4579-A031-EC76166658D6}" type="datetimeFigureOut">
               <a:rPr lang="ru-RU" smtClean="0"/>
-              <a:t>17.04.2026</a:t>
+              <a:t>15.05.2026</a:t>
             </a:fld>
             <a:endParaRPr lang="ru-RU"/>
           </a:p>
@@ -3338,7 +3217,7 @@
           <a:p>
             <a:fld id="{D0E9117A-C41E-4579-A031-EC76166658D6}" type="datetimeFigureOut">
               <a:rPr lang="ru-RU" smtClean="0"/>
-              <a:t>17.04.2026</a:t>
+              <a:t>15.05.2026</a:t>
             </a:fld>
             <a:endParaRPr lang="ru-RU"/>
           </a:p>
@@ -3717,7 +3596,7 @@
           <a:p>
             <a:fld id="{D0E9117A-C41E-4579-A031-EC76166658D6}" type="datetimeFigureOut">
               <a:rPr lang="ru-RU" smtClean="0"/>
-              <a:t>17.04.2026</a:t>
+              <a:t>15.05.2026</a:t>
             </a:fld>
             <a:endParaRPr lang="ru-RU"/>
           </a:p>
@@ -3835,7 +3714,7 @@
           <a:p>
             <a:fld id="{D0E9117A-C41E-4579-A031-EC76166658D6}" type="datetimeFigureOut">
               <a:rPr lang="ru-RU" smtClean="0"/>
-              <a:t>17.04.2026</a:t>
+              <a:t>15.05.2026</a:t>
             </a:fld>
             <a:endParaRPr lang="ru-RU"/>
           </a:p>
@@ -4006,7 +3885,7 @@
           <a:p>
             <a:fld id="{D0E9117A-C41E-4579-A031-EC76166658D6}" type="datetimeFigureOut">
               <a:rPr lang="ru-RU" smtClean="0"/>
-              <a:t>17.04.2026</a:t>
+              <a:t>15.05.2026</a:t>
             </a:fld>
             <a:endParaRPr lang="ru-RU"/>
           </a:p>
@@ -4360,7 +4239,7 @@
           <a:p>
             <a:fld id="{D0E9117A-C41E-4579-A031-EC76166658D6}" type="datetimeFigureOut">
               <a:rPr lang="ru-RU" smtClean="0"/>
-              <a:t>17.04.2026</a:t>
+              <a:t>15.05.2026</a:t>
             </a:fld>
             <a:endParaRPr lang="ru-RU"/>
           </a:p>
@@ -4737,7 +4616,7 @@
           <a:p>
             <a:fld id="{D0E9117A-C41E-4579-A031-EC76166658D6}" type="datetimeFigureOut">
               <a:rPr lang="ru-RU" smtClean="0"/>
-              <a:t>17.04.2026</a:t>
+              <a:t>15.05.2026</a:t>
             </a:fld>
             <a:endParaRPr lang="ru-RU"/>
           </a:p>
@@ -5024,7 +4903,7 @@
           <a:p>
             <a:fld id="{D0E9117A-C41E-4579-A031-EC76166658D6}" type="datetimeFigureOut">
               <a:rPr lang="ru-RU" smtClean="0"/>
-              <a:t>17.04.2026</a:t>
+              <a:t>15.05.2026</a:t>
             </a:fld>
             <a:endParaRPr lang="ru-RU"/>
           </a:p>
@@ -5872,87 +5751,6 @@
       </p:sp>
       <p:sp>
         <p:nvSpPr>
-          <p:cNvPr id="3" name="Подзаголовок 2">
-            <a:extLst>
-              <a:ext uri="{FF2B5EF4-FFF2-40B4-BE49-F238E27FC236}">
-                <a16:creationId xmlns:a16="http://schemas.microsoft.com/office/drawing/2014/main" id="{F6004F80-9FF8-DB93-EE85-2BE43927CADA}"/>
-              </a:ext>
-            </a:extLst>
-          </p:cNvPr>
-          <p:cNvSpPr>
-            <a:spLocks noGrp="1"/>
-          </p:cNvSpPr>
-          <p:nvPr>
-            <p:ph type="subTitle" idx="1"/>
-          </p:nvPr>
-        </p:nvSpPr>
-        <p:spPr>
-          <a:xfrm>
-            <a:off x="1524000" y="1962122"/>
-            <a:ext cx="9144000" cy="454262"/>
-          </a:xfrm>
-        </p:spPr>
-        <p:txBody>
-          <a:bodyPr>
-            <a:normAutofit/>
-          </a:bodyPr>
-          <a:lstStyle/>
-          <a:p>
-            <a:pPr algn="ctr">
-              <a:lnSpc>
-                <a:spcPct val="100000"/>
-              </a:lnSpc>
-              <a:spcBef>
-                <a:spcPts val="0"/>
-              </a:spcBef>
-            </a:pPr>
-            <a:r>
-              <a:rPr lang="ru-RU" sz="1500" b="1" dirty="0">
-                <a:solidFill>
-                  <a:schemeClr val="tx1"/>
-                </a:solidFill>
-                <a:effectLst/>
-                <a:latin typeface="Times New Roman" panose="02020603050405020304" pitchFamily="18" charset="0"/>
-                <a:ea typeface="Times New Roman" panose="02020603050405020304" pitchFamily="18" charset="0"/>
-                <a:cs typeface="Times New Roman" panose="02020603050405020304" pitchFamily="18" charset="0"/>
-              </a:rPr>
-              <a:t>КУРСОВОЙ</a:t>
-            </a:r>
-            <a:r>
-              <a:rPr lang="ru-RU" sz="1500" b="1" dirty="0">
-                <a:effectLst/>
-                <a:latin typeface="Times New Roman" panose="02020603050405020304" pitchFamily="18" charset="0"/>
-                <a:ea typeface="Times New Roman" panose="02020603050405020304" pitchFamily="18" charset="0"/>
-                <a:cs typeface="Times New Roman" panose="02020603050405020304" pitchFamily="18" charset="0"/>
-              </a:rPr>
-              <a:t> </a:t>
-            </a:r>
-            <a:r>
-              <a:rPr lang="ru-RU" sz="1500" b="1" dirty="0">
-                <a:solidFill>
-                  <a:schemeClr val="tx1"/>
-                </a:solidFill>
-                <a:effectLst/>
-                <a:latin typeface="Times New Roman" panose="02020603050405020304" pitchFamily="18" charset="0"/>
-                <a:ea typeface="Times New Roman" panose="02020603050405020304" pitchFamily="18" charset="0"/>
-                <a:cs typeface="Times New Roman" panose="02020603050405020304" pitchFamily="18" charset="0"/>
-              </a:rPr>
-              <a:t>ПРОЕКТ</a:t>
-            </a:r>
-            <a:endParaRPr lang="ru-RU" sz="1500" dirty="0">
-              <a:solidFill>
-                <a:schemeClr val="tx1"/>
-              </a:solidFill>
-              <a:effectLst/>
-              <a:latin typeface="Calibri" panose="020F0502020204030204" pitchFamily="34" charset="0"/>
-              <a:ea typeface="Calibri" panose="020F0502020204030204" pitchFamily="34" charset="0"/>
-              <a:cs typeface="Times New Roman" panose="02020603050405020304" pitchFamily="18" charset="0"/>
-            </a:endParaRPr>
-          </a:p>
-        </p:txBody>
-      </p:sp>
-      <p:sp>
-        <p:nvSpPr>
           <p:cNvPr id="5" name="TextBox 4">
             <a:extLst>
               <a:ext uri="{FF2B5EF4-FFF2-40B4-BE49-F238E27FC236}">
@@ -5965,7 +5763,7 @@
         </p:nvSpPr>
         <p:spPr>
           <a:xfrm>
-            <a:off x="867967" y="2464919"/>
+            <a:off x="867967" y="2261887"/>
             <a:ext cx="7385538" cy="323165"/>
           </a:xfrm>
           <a:prstGeom prst="rect">
@@ -6015,7 +5813,7 @@
         </p:nvSpPr>
         <p:spPr>
           <a:xfrm>
-            <a:off x="3493247" y="3022263"/>
+            <a:off x="3493247" y="2909102"/>
             <a:ext cx="5205505" cy="960328"/>
           </a:xfrm>
           <a:prstGeom prst="rect">
@@ -6063,7 +5861,7 @@
                 <a:ea typeface="+mn-ea"/>
                 <a:cs typeface="Times New Roman" panose="02020603050405020304" pitchFamily="18" charset="0"/>
               </a:rPr>
-              <a:t>ПРОИЗВОДСТВЕННАЯ ПРАКТИКА ПО ПМ 05, ПМ 06 и ПМ 07</a:t>
+              <a:t>ОТЧЕТ ПО ПРЕДДИПЛОМНОЙ ПРАКТИКЕ</a:t>
             </a:r>
             <a:endParaRPr kumimoji="0" lang="ru-RU" sz="2000" b="1" i="0" u="none" strike="noStrike" kern="1200" cap="none" spc="0" normalizeH="0" baseline="0" noProof="0" dirty="0">
               <a:ln>
@@ -6267,6 +6065,31 @@
               </a:rPr>
               <a:t>(БУ «ЮГОРСКИЙ ПОЛИТЕХНИЧЕСКИЙ КОЛЛЕДЖ»)</a:t>
             </a:r>
+          </a:p>
+        </p:txBody>
+      </p:sp>
+      <p:sp>
+        <p:nvSpPr>
+          <p:cNvPr id="8" name="Подзаголовок 7">
+            <a:extLst>
+              <a:ext uri="{FF2B5EF4-FFF2-40B4-BE49-F238E27FC236}">
+                <a16:creationId xmlns:a16="http://schemas.microsoft.com/office/drawing/2014/main" id="{EC084210-F161-02E4-4EF9-1161AAEE1A7C}"/>
+              </a:ext>
+            </a:extLst>
+          </p:cNvPr>
+          <p:cNvSpPr>
+            <a:spLocks noGrp="1"/>
+          </p:cNvSpPr>
+          <p:nvPr>
+            <p:ph type="subTitle" idx="1"/>
+          </p:nvPr>
+        </p:nvSpPr>
+        <p:spPr/>
+        <p:txBody>
+          <a:bodyPr/>
+          <a:lstStyle/>
+          <a:p>
+            <a:endParaRPr lang="ru-RU"/>
           </a:p>
         </p:txBody>
       </p:sp>
@@ -6288,238 +6111,10 @@
   <p:cSld>
     <p:spTree>
       <p:nvGrpSpPr>
-        <p:cNvPr id="1" name=""/>
-        <p:cNvGrpSpPr/>
-        <p:nvPr/>
-      </p:nvGrpSpPr>
-      <p:grpSpPr>
-        <a:xfrm>
-          <a:off x="0" y="0"/>
-          <a:ext cx="0" cy="0"/>
-          <a:chOff x="0" y="0"/>
-          <a:chExt cx="0" cy="0"/>
-        </a:xfrm>
-      </p:grpSpPr>
-      <p:sp>
-        <p:nvSpPr>
-          <p:cNvPr id="2" name="Заголовок 1">
-            <a:extLst>
-              <a:ext uri="{FF2B5EF4-FFF2-40B4-BE49-F238E27FC236}">
-                <a16:creationId xmlns:a16="http://schemas.microsoft.com/office/drawing/2014/main" id="{BF146A11-449D-0D61-C702-F0555702557A}"/>
-              </a:ext>
-            </a:extLst>
-          </p:cNvPr>
-          <p:cNvSpPr>
-            <a:spLocks noGrp="1"/>
-          </p:cNvSpPr>
-          <p:nvPr>
-            <p:ph type="title"/>
-          </p:nvPr>
-        </p:nvSpPr>
-        <p:spPr>
-          <a:xfrm>
-            <a:off x="1111162" y="187016"/>
-            <a:ext cx="10058400" cy="1347144"/>
-          </a:xfrm>
-        </p:spPr>
-        <p:txBody>
-          <a:bodyPr>
-            <a:normAutofit/>
-          </a:bodyPr>
-          <a:lstStyle/>
-          <a:p>
-            <a:pPr lvl="0" algn="ctr">
-              <a:lnSpc>
-                <a:spcPct val="150000"/>
-              </a:lnSpc>
-              <a:tabLst>
-                <a:tab pos="630555" algn="l"/>
-              </a:tabLst>
-            </a:pPr>
-            <a:r>
-              <a:rPr lang="ru-RU" sz="3600" dirty="0">
-                <a:solidFill>
-                  <a:schemeClr val="tx1"/>
-                </a:solidFill>
-                <a:latin typeface="Times New Roman" panose="02020603050405020304" pitchFamily="18" charset="0"/>
-                <a:ea typeface="Calibri" panose="020F0502020204030204" pitchFamily="34" charset="0"/>
-                <a:cs typeface="Times New Roman" panose="02020603050405020304" pitchFamily="18" charset="0"/>
-              </a:rPr>
-              <a:t>Правила эксплуатации и техника безопасности</a:t>
-            </a:r>
-            <a:endParaRPr lang="ru-RU" sz="3600" dirty="0">
-              <a:solidFill>
-                <a:schemeClr val="tx1"/>
-              </a:solidFill>
-              <a:latin typeface="Times New Roman" panose="02020603050405020304" pitchFamily="18" charset="0"/>
-              <a:cs typeface="Times New Roman" panose="02020603050405020304" pitchFamily="18" charset="0"/>
-            </a:endParaRPr>
-          </a:p>
-        </p:txBody>
-      </p:sp>
-      <p:sp>
-        <p:nvSpPr>
-          <p:cNvPr id="4" name="Объект 3">
-            <a:extLst>
-              <a:ext uri="{FF2B5EF4-FFF2-40B4-BE49-F238E27FC236}">
-                <a16:creationId xmlns:a16="http://schemas.microsoft.com/office/drawing/2014/main" id="{A06EDABA-DA95-3CF1-4AD3-A12E84BD3B8E}"/>
-              </a:ext>
-            </a:extLst>
-          </p:cNvPr>
-          <p:cNvSpPr>
-            <a:spLocks noGrp="1"/>
-          </p:cNvSpPr>
-          <p:nvPr>
-            <p:ph idx="1"/>
-          </p:nvPr>
-        </p:nvSpPr>
-        <p:spPr>
-          <a:xfrm>
-            <a:off x="914400" y="1803400"/>
-            <a:ext cx="10363200" cy="4447097"/>
-          </a:xfrm>
-        </p:spPr>
-        <p:txBody>
-          <a:bodyPr>
-            <a:normAutofit/>
-          </a:bodyPr>
-          <a:lstStyle/>
-          <a:p>
-            <a:pPr marL="0" lvl="0" indent="450000" algn="just">
-              <a:lnSpc>
-                <a:spcPct val="150000"/>
-              </a:lnSpc>
-              <a:spcBef>
-                <a:spcPts val="0"/>
-              </a:spcBef>
-              <a:spcAft>
-                <a:spcPts val="0"/>
-              </a:spcAft>
-              <a:buFont typeface="+mj-lt"/>
-              <a:buAutoNum type="arabicParenR"/>
-            </a:pPr>
-            <a:r>
-              <a:rPr lang="ru-RU" sz="2600" dirty="0">
-                <a:solidFill>
-                  <a:schemeClr val="tx1"/>
-                </a:solidFill>
-                <a:latin typeface="Times New Roman" panose="02020603050405020304" pitchFamily="18" charset="0"/>
-                <a:ea typeface="Calibri" panose="020F0502020204030204" pitchFamily="34" charset="0"/>
-                <a:cs typeface="Times New Roman" panose="02020603050405020304" pitchFamily="18" charset="0"/>
-              </a:rPr>
-              <a:t>Учащиеся обязаны соблюдать правила поведения;</a:t>
-            </a:r>
-          </a:p>
-          <a:p>
-            <a:pPr marL="0" lvl="0" indent="450000" algn="just">
-              <a:lnSpc>
-                <a:spcPct val="150000"/>
-              </a:lnSpc>
-              <a:spcBef>
-                <a:spcPts val="0"/>
-              </a:spcBef>
-              <a:spcAft>
-                <a:spcPts val="0"/>
-              </a:spcAft>
-              <a:buFont typeface="+mj-lt"/>
-              <a:buAutoNum type="arabicParenR"/>
-            </a:pPr>
-            <a:r>
-              <a:rPr lang="ru-RU" sz="2600" dirty="0">
-                <a:solidFill>
-                  <a:schemeClr val="tx1"/>
-                </a:solidFill>
-                <a:latin typeface="Times New Roman" panose="02020603050405020304" pitchFamily="18" charset="0"/>
-                <a:ea typeface="Calibri" panose="020F0502020204030204" pitchFamily="34" charset="0"/>
-                <a:cs typeface="Times New Roman" panose="02020603050405020304" pitchFamily="18" charset="0"/>
-              </a:rPr>
-              <a:t>Учащимся запрещено изменять настройки операционной системы;</a:t>
-            </a:r>
-          </a:p>
-          <a:p>
-            <a:pPr marL="0" lvl="0" indent="450000" algn="just">
-              <a:lnSpc>
-                <a:spcPct val="150000"/>
-              </a:lnSpc>
-              <a:spcBef>
-                <a:spcPts val="0"/>
-              </a:spcBef>
-              <a:spcAft>
-                <a:spcPts val="0"/>
-              </a:spcAft>
-              <a:buFont typeface="+mj-lt"/>
-              <a:buAutoNum type="arabicParenR"/>
-            </a:pPr>
-            <a:r>
-              <a:rPr lang="ru-RU" sz="2600" dirty="0">
-                <a:solidFill>
-                  <a:schemeClr val="tx1"/>
-                </a:solidFill>
-                <a:latin typeface="Times New Roman" panose="02020603050405020304" pitchFamily="18" charset="0"/>
-                <a:ea typeface="Calibri" panose="020F0502020204030204" pitchFamily="34" charset="0"/>
-                <a:cs typeface="Times New Roman" panose="02020603050405020304" pitchFamily="18" charset="0"/>
-              </a:rPr>
-              <a:t>Учащимся запрещено подключать внешние носители без разрешения преподавателя;</a:t>
-            </a:r>
-          </a:p>
-          <a:p>
-            <a:pPr marL="0" lvl="0" indent="450000" algn="just">
-              <a:lnSpc>
-                <a:spcPct val="150000"/>
-              </a:lnSpc>
-              <a:spcBef>
-                <a:spcPts val="0"/>
-              </a:spcBef>
-              <a:spcAft>
-                <a:spcPts val="0"/>
-              </a:spcAft>
-              <a:buFont typeface="+mj-lt"/>
-              <a:buAutoNum type="arabicParenR"/>
-            </a:pPr>
-            <a:r>
-              <a:rPr lang="ru-RU" sz="2600" dirty="0">
-                <a:solidFill>
-                  <a:schemeClr val="tx1"/>
-                </a:solidFill>
-                <a:latin typeface="Times New Roman" panose="02020603050405020304" pitchFamily="18" charset="0"/>
-                <a:ea typeface="Calibri" panose="020F0502020204030204" pitchFamily="34" charset="0"/>
-                <a:cs typeface="Times New Roman" panose="02020603050405020304" pitchFamily="18" charset="0"/>
-              </a:rPr>
-              <a:t>Преподаватели несут ответственность за соблюдение регламента во время урока, своевременное выключение техники по окончании занятия и фиксацию замечаний в журнале.</a:t>
-            </a:r>
-          </a:p>
-          <a:p>
-            <a:endParaRPr lang="ru-RU" sz="1800" dirty="0">
-              <a:effectLst/>
-              <a:latin typeface="Calibri" panose="020F0502020204030204" pitchFamily="34" charset="0"/>
-              <a:ea typeface="Calibri" panose="020F0502020204030204" pitchFamily="34" charset="0"/>
-              <a:cs typeface="Times New Roman" panose="02020603050405020304" pitchFamily="18" charset="0"/>
-            </a:endParaRPr>
-          </a:p>
-        </p:txBody>
-      </p:sp>
-    </p:spTree>
-    <p:extLst>
-      <p:ext uri="{BB962C8B-B14F-4D97-AF65-F5344CB8AC3E}">
-        <p14:creationId xmlns:p14="http://schemas.microsoft.com/office/powerpoint/2010/main" val="938494527"/>
-      </p:ext>
-    </p:extLst>
-  </p:cSld>
-  <p:clrMapOvr>
-    <a:masterClrMapping/>
-  </p:clrMapOvr>
-</p:sld>
-</file>
-
-<file path=ppt/slides/slide11.xml><?xml version="1.0" encoding="utf-8"?>
-<p:sld xmlns:a="http://schemas.openxmlformats.org/drawingml/2006/main" xmlns:r="http://schemas.openxmlformats.org/officeDocument/2006/relationships" xmlns:p="http://schemas.openxmlformats.org/presentationml/2006/main">
-  <p:cSld>
-    <p:spTree>
-      <p:nvGrpSpPr>
         <p:cNvPr id="1" name="">
           <a:extLst>
             <a:ext uri="{FF2B5EF4-FFF2-40B4-BE49-F238E27FC236}">
-              <a16:creationId xmlns:a16="http://schemas.microsoft.com/office/drawing/2014/main" id="{7141F9D8-5272-D2F0-DCFB-F03C4DB9C065}"/>
+              <a16:creationId xmlns:a16="http://schemas.microsoft.com/office/drawing/2014/main" id="{23C0F288-ED5F-3E6C-949A-87AC070B3CA8}"/>
             </a:ext>
           </a:extLst>
         </p:cNvPr>
@@ -6536,10 +6131,10 @@
       </p:grpSpPr>
       <p:sp>
         <p:nvSpPr>
-          <p:cNvPr id="2" name="Заголовок 1">
+          <p:cNvPr id="7" name="Объект 6">
             <a:extLst>
               <a:ext uri="{FF2B5EF4-FFF2-40B4-BE49-F238E27FC236}">
-                <a16:creationId xmlns:a16="http://schemas.microsoft.com/office/drawing/2014/main" id="{AB7F0BAC-CE7B-8C8A-CDC6-4CDD7D05B429}"/>
+                <a16:creationId xmlns:a16="http://schemas.microsoft.com/office/drawing/2014/main" id="{EB71ACEE-D45F-58D0-5789-E718C15E88E5}"/>
               </a:ext>
             </a:extLst>
           </p:cNvPr>
@@ -6547,31 +6142,109 @@
             <a:spLocks noGrp="1"/>
           </p:cNvSpPr>
           <p:nvPr>
-            <p:ph type="title"/>
-          </p:nvPr>
-        </p:nvSpPr>
-        <p:spPr>
-          <a:xfrm>
-            <a:off x="1111162" y="187016"/>
-            <a:ext cx="10058400" cy="1347144"/>
-          </a:xfrm>
-        </p:spPr>
-        <p:txBody>
-          <a:bodyPr>
-            <a:normAutofit/>
+            <p:ph type="title" idx="4294967295"/>
+          </p:nvPr>
+        </p:nvSpPr>
+        <p:spPr>
+          <a:xfrm>
+            <a:off x="2066102" y="788762"/>
+            <a:ext cx="8724842" cy="815983"/>
+          </a:xfrm>
+          <a:prstGeom prst="rect">
+            <a:avLst/>
+          </a:prstGeom>
+          <a:noFill/>
+          <a:ln>
+            <a:noFill/>
+            <a:prstDash/>
+          </a:ln>
+          <a:effectLst/>
+        </p:spPr>
+        <p:txBody>
+          <a:bodyPr rot="0" spcFirstLastPara="0" vertOverflow="overflow" horzOverflow="overflow" vert="horz" wrap="square" lIns="0" tIns="45720" rIns="0" bIns="45720" numCol="1" spcCol="0" rtlCol="0" fromWordArt="0" anchor="t" anchorCtr="0" forceAA="0" compatLnSpc="1">
+            <a:prstTxWarp prst="textNoShape">
+              <a:avLst/>
+            </a:prstTxWarp>
+            <a:noAutofit/>
           </a:bodyPr>
           <a:lstStyle/>
           <a:p>
-            <a:pPr lvl="0" algn="ctr">
+            <a:pPr marR="0" lvl="0" algn="ctr" defTabSz="914400" rtl="0" eaLnBrk="1" fontAlgn="auto" latinLnBrk="0" hangingPunct="1">
               <a:lnSpc>
                 <a:spcPct val="150000"/>
               </a:lnSpc>
-              <a:tabLst>
-                <a:tab pos="630555" algn="l"/>
-              </a:tabLst>
+              <a:spcBef>
+                <a:spcPts val="0"/>
+              </a:spcBef>
+              <a:buClr>
+                <a:schemeClr val="accent1"/>
+              </a:buClr>
+              <a:buSzPct val="100000"/>
+              <a:tabLst/>
+              <a:defRPr/>
             </a:pPr>
             <a:r>
               <a:rPr lang="ru-RU" sz="3600" dirty="0">
+                <a:solidFill>
+                  <a:schemeClr val="tx1"/>
+                </a:solidFill>
+                <a:latin typeface="Times New Roman" panose="02020603050405020304" pitchFamily="18" charset="0"/>
+                <a:cs typeface="Times New Roman" panose="02020603050405020304" pitchFamily="18" charset="0"/>
+              </a:rPr>
+              <a:t>Заключение</a:t>
+            </a:r>
+            <a:endParaRPr kumimoji="0" lang="ru-RU" sz="3600" b="0" i="0" u="none" strike="noStrike" kern="1200" cap="none" spc="0" normalizeH="0" baseline="0" noProof="0" dirty="0">
+              <a:ln>
+                <a:noFill/>
+              </a:ln>
+              <a:solidFill>
+                <a:schemeClr val="tx1"/>
+              </a:solidFill>
+              <a:effectLst/>
+              <a:uLnTx/>
+              <a:uFillTx/>
+              <a:latin typeface="Times New Roman" panose="02020603050405020304" pitchFamily="18" charset="0"/>
+              <a:ea typeface="+mn-ea"/>
+              <a:cs typeface="Times New Roman" panose="02020603050405020304" pitchFamily="18" charset="0"/>
+            </a:endParaRPr>
+          </a:p>
+        </p:txBody>
+      </p:sp>
+      <p:sp>
+        <p:nvSpPr>
+          <p:cNvPr id="11" name="TextBox 10">
+            <a:extLst>
+              <a:ext uri="{FF2B5EF4-FFF2-40B4-BE49-F238E27FC236}">
+                <a16:creationId xmlns:a16="http://schemas.microsoft.com/office/drawing/2014/main" id="{BCB74ADC-17B6-5BCA-2544-3E881208A74F}"/>
+              </a:ext>
+            </a:extLst>
+          </p:cNvPr>
+          <p:cNvSpPr txBox="1"/>
+          <p:nvPr/>
+        </p:nvSpPr>
+        <p:spPr>
+          <a:xfrm>
+            <a:off x="1411188" y="2042479"/>
+            <a:ext cx="10068719" cy="1133965"/>
+          </a:xfrm>
+          <a:prstGeom prst="rect">
+            <a:avLst/>
+          </a:prstGeom>
+          <a:noFill/>
+        </p:spPr>
+        <p:txBody>
+          <a:bodyPr wrap="square" rtlCol="0">
+            <a:spAutoFit/>
+          </a:bodyPr>
+          <a:lstStyle/>
+          <a:p>
+            <a:pPr>
+              <a:lnSpc>
+                <a:spcPct val="150000"/>
+              </a:lnSpc>
+            </a:pPr>
+            <a:r>
+              <a:rPr lang="ru-RU" sz="2400" dirty="0">
                 <a:solidFill>
                   <a:schemeClr val="tx1"/>
                 </a:solidFill>
@@ -6579,61 +6252,124 @@
                 <a:ea typeface="Calibri" panose="020F0502020204030204" pitchFamily="34" charset="0"/>
                 <a:cs typeface="Times New Roman" panose="02020603050405020304" pitchFamily="18" charset="0"/>
               </a:rPr>
-              <a:t>Регламент технического обслуживания</a:t>
-            </a:r>
-            <a:endParaRPr lang="ru-RU" sz="3600" dirty="0">
-              <a:solidFill>
-                <a:schemeClr val="tx1"/>
-              </a:solidFill>
-              <a:latin typeface="Times New Roman" panose="02020603050405020304" pitchFamily="18" charset="0"/>
-              <a:cs typeface="Times New Roman" panose="02020603050405020304" pitchFamily="18" charset="0"/>
-            </a:endParaRPr>
-          </a:p>
-        </p:txBody>
-      </p:sp>
-      <p:sp>
-        <p:nvSpPr>
-          <p:cNvPr id="4" name="Объект 3">
+              <a:t>Практика успешно пройдена в МБОУ «СОШ №6» г. Югорска, все поставленные задачи выполнены;</a:t>
+            </a:r>
+          </a:p>
+        </p:txBody>
+      </p:sp>
+      <p:pic>
+        <p:nvPicPr>
+          <p:cNvPr id="26" name="Рисунок 25" descr="Линия со стрелкой: небольшой изгиб">
             <a:extLst>
               <a:ext uri="{FF2B5EF4-FFF2-40B4-BE49-F238E27FC236}">
-                <a16:creationId xmlns:a16="http://schemas.microsoft.com/office/drawing/2014/main" id="{BDA0DCD5-EC06-1A58-6DEA-625A554157C8}"/>
+                <a16:creationId xmlns:a16="http://schemas.microsoft.com/office/drawing/2014/main" id="{884A986E-EB74-AE13-4DA9-3033A9D1C326}"/>
               </a:ext>
             </a:extLst>
           </p:cNvPr>
-          <p:cNvSpPr>
-            <a:spLocks noGrp="1"/>
-          </p:cNvSpPr>
-          <p:nvPr>
-            <p:ph idx="1"/>
-          </p:nvPr>
-        </p:nvSpPr>
-        <p:spPr>
-          <a:xfrm>
-            <a:off x="768350" y="1943100"/>
-            <a:ext cx="10655300" cy="3810000"/>
-          </a:xfrm>
-        </p:spPr>
-        <p:txBody>
-          <a:bodyPr>
-            <a:normAutofit/>
+          <p:cNvPicPr>
+            <a:picLocks noChangeAspect="1"/>
+          </p:cNvPicPr>
+          <p:nvPr/>
+        </p:nvPicPr>
+        <p:blipFill>
+          <a:blip r:embed="rId3">
+            <a:extLst>
+              <a:ext uri="{28A0092B-C50C-407E-A947-70E740481C1C}">
+                <a14:useLocalDpi xmlns:a14="http://schemas.microsoft.com/office/drawing/2010/main" val="0"/>
+              </a:ext>
+              <a:ext uri="{96DAC541-7B7A-43D3-8B79-37D633B846F1}">
+                <asvg:svgBlip xmlns:asvg="http://schemas.microsoft.com/office/drawing/2016/SVG/main" r:embed="rId4"/>
+              </a:ext>
+            </a:extLst>
+          </a:blip>
+          <a:stretch>
+            <a:fillRect/>
+          </a:stretch>
+        </p:blipFill>
+        <p:spPr>
+          <a:xfrm>
+            <a:off x="712093" y="2079179"/>
+            <a:ext cx="631001" cy="631001"/>
+          </a:xfrm>
+          <a:prstGeom prst="rect">
+            <a:avLst/>
+          </a:prstGeom>
+        </p:spPr>
+      </p:pic>
+      <p:pic>
+        <p:nvPicPr>
+          <p:cNvPr id="4" name="Рисунок 3" descr="Линия со стрелкой: небольшой изгиб">
+            <a:extLst>
+              <a:ext uri="{FF2B5EF4-FFF2-40B4-BE49-F238E27FC236}">
+                <a16:creationId xmlns:a16="http://schemas.microsoft.com/office/drawing/2014/main" id="{850B0CE6-0065-6550-B3C4-76793BDC75B1}"/>
+              </a:ext>
+            </a:extLst>
+          </p:cNvPr>
+          <p:cNvPicPr>
+            <a:picLocks noChangeAspect="1"/>
+          </p:cNvPicPr>
+          <p:nvPr/>
+        </p:nvPicPr>
+        <p:blipFill>
+          <a:blip r:embed="rId3">
+            <a:extLst>
+              <a:ext uri="{28A0092B-C50C-407E-A947-70E740481C1C}">
+                <a14:useLocalDpi xmlns:a14="http://schemas.microsoft.com/office/drawing/2010/main" val="0"/>
+              </a:ext>
+              <a:ext uri="{96DAC541-7B7A-43D3-8B79-37D633B846F1}">
+                <asvg:svgBlip xmlns:asvg="http://schemas.microsoft.com/office/drawing/2016/SVG/main" r:embed="rId4"/>
+              </a:ext>
+            </a:extLst>
+          </a:blip>
+          <a:stretch>
+            <a:fillRect/>
+          </a:stretch>
+        </p:blipFill>
+        <p:spPr>
+          <a:xfrm>
+            <a:off x="712093" y="4166178"/>
+            <a:ext cx="631001" cy="631001"/>
+          </a:xfrm>
+          <a:prstGeom prst="rect">
+            <a:avLst/>
+          </a:prstGeom>
+        </p:spPr>
+      </p:pic>
+      <p:sp>
+        <p:nvSpPr>
+          <p:cNvPr id="6" name="TextBox 5">
+            <a:extLst>
+              <a:ext uri="{FF2B5EF4-FFF2-40B4-BE49-F238E27FC236}">
+                <a16:creationId xmlns:a16="http://schemas.microsoft.com/office/drawing/2014/main" id="{6EED792B-7A9B-329C-3A7C-F5E4C023A5E3}"/>
+              </a:ext>
+            </a:extLst>
+          </p:cNvPr>
+          <p:cNvSpPr txBox="1"/>
+          <p:nvPr/>
+        </p:nvSpPr>
+        <p:spPr>
+          <a:xfrm>
+            <a:off x="1411188" y="4166178"/>
+            <a:ext cx="10034671" cy="1133965"/>
+          </a:xfrm>
+          <a:prstGeom prst="rect">
+            <a:avLst/>
+          </a:prstGeom>
+          <a:noFill/>
+        </p:spPr>
+        <p:txBody>
+          <a:bodyPr wrap="square" rtlCol="0">
+            <a:spAutoFit/>
           </a:bodyPr>
           <a:lstStyle/>
           <a:p>
-            <a:pPr marL="0" lvl="5" indent="450000" algn="just">
+            <a:pPr>
               <a:lnSpc>
                 <a:spcPct val="150000"/>
               </a:lnSpc>
-              <a:spcBef>
-                <a:spcPts val="0"/>
-              </a:spcBef>
-              <a:spcAft>
-                <a:spcPts val="0"/>
-              </a:spcAft>
-              <a:buFont typeface="+mj-lt"/>
-              <a:buAutoNum type="arabicParenR"/>
             </a:pPr>
             <a:r>
-              <a:rPr lang="ru-RU" sz="2600" dirty="0">
+              <a:rPr lang="ru-RU" sz="2400" dirty="0">
                 <a:solidFill>
                   <a:schemeClr val="tx1"/>
                 </a:solidFill>
@@ -6641,25 +6377,85 @@
                 <a:ea typeface="Calibri" panose="020F0502020204030204" pitchFamily="34" charset="0"/>
                 <a:cs typeface="Times New Roman" panose="02020603050405020304" pitchFamily="18" charset="0"/>
               </a:rPr>
-              <a:t>Ежедневные операции: визуальный осмотр рабочего места, проверка целостности кабелей питания и сетевого подключения и др.;</a:t>
-            </a:r>
-          </a:p>
-          <a:p>
-            <a:pPr marL="0" lvl="5" indent="450000" algn="just">
+              <a:t>Клиентская часть готова к интеграции с серверной частью, развёртыванию и дальнейшему развитию функционала.</a:t>
+            </a:r>
+          </a:p>
+        </p:txBody>
+      </p:sp>
+      <p:pic>
+        <p:nvPicPr>
+          <p:cNvPr id="12" name="Рисунок 11" descr="Линия со стрелкой: небольшой изгиб">
+            <a:extLst>
+              <a:ext uri="{FF2B5EF4-FFF2-40B4-BE49-F238E27FC236}">
+                <a16:creationId xmlns:a16="http://schemas.microsoft.com/office/drawing/2014/main" id="{FB3D6377-77EA-3CA3-CCBA-7BC7FED41779}"/>
+              </a:ext>
+            </a:extLst>
+          </p:cNvPr>
+          <p:cNvPicPr>
+            <a:picLocks noChangeAspect="1"/>
+          </p:cNvPicPr>
+          <p:nvPr/>
+        </p:nvPicPr>
+        <p:blipFill>
+          <a:blip r:embed="rId3">
+            <a:extLst>
+              <a:ext uri="{28A0092B-C50C-407E-A947-70E740481C1C}">
+                <a14:useLocalDpi xmlns:a14="http://schemas.microsoft.com/office/drawing/2010/main" val="0"/>
+              </a:ext>
+              <a:ext uri="{96DAC541-7B7A-43D3-8B79-37D633B846F1}">
+                <asvg:svgBlip xmlns:asvg="http://schemas.microsoft.com/office/drawing/2016/SVG/main" r:embed="rId4"/>
+              </a:ext>
+            </a:extLst>
+          </a:blip>
+          <a:stretch>
+            <a:fillRect/>
+          </a:stretch>
+        </p:blipFill>
+        <p:spPr>
+          <a:xfrm>
+            <a:off x="712093" y="3368687"/>
+            <a:ext cx="631001" cy="631001"/>
+          </a:xfrm>
+          <a:prstGeom prst="rect">
+            <a:avLst/>
+          </a:prstGeom>
+        </p:spPr>
+      </p:pic>
+      <p:sp>
+        <p:nvSpPr>
+          <p:cNvPr id="13" name="TextBox 12">
+            <a:extLst>
+              <a:ext uri="{FF2B5EF4-FFF2-40B4-BE49-F238E27FC236}">
+                <a16:creationId xmlns:a16="http://schemas.microsoft.com/office/drawing/2014/main" id="{4C6AAC22-AE00-C819-D3D1-1A0C842ABBA6}"/>
+              </a:ext>
+            </a:extLst>
+          </p:cNvPr>
+          <p:cNvSpPr txBox="1"/>
+          <p:nvPr/>
+        </p:nvSpPr>
+        <p:spPr>
+          <a:xfrm>
+            <a:off x="1411188" y="3345460"/>
+            <a:ext cx="10034671" cy="579967"/>
+          </a:xfrm>
+          <a:prstGeom prst="rect">
+            <a:avLst/>
+          </a:prstGeom>
+          <a:noFill/>
+        </p:spPr>
+        <p:txBody>
+          <a:bodyPr wrap="square" rtlCol="0">
+            <a:spAutoFit/>
+          </a:bodyPr>
+          <a:lstStyle/>
+          <a:p>
+            <a:pPr>
               <a:lnSpc>
                 <a:spcPct val="150000"/>
               </a:lnSpc>
-              <a:spcBef>
-                <a:spcPts val="0"/>
-              </a:spcBef>
-              <a:spcAft>
-                <a:spcPts val="0"/>
-              </a:spcAft>
-              <a:buFont typeface="+mj-lt"/>
-              <a:buAutoNum type="arabicParenR"/>
             </a:pPr>
             <a:r>
-              <a:rPr lang="ru-RU" sz="2600" dirty="0">
+              <a:rPr lang="ru-RU" sz="2400" dirty="0">
                 <a:solidFill>
                   <a:schemeClr val="tx1"/>
                 </a:solidFill>
@@ -6667,1538 +6463,15 @@
                 <a:ea typeface="Calibri" panose="020F0502020204030204" pitchFamily="34" charset="0"/>
                 <a:cs typeface="Times New Roman" panose="02020603050405020304" pitchFamily="18" charset="0"/>
               </a:rPr>
-              <a:t>Еженедельные операции: очистка системных блоков и мониторов от пыли, проверка актуальности антивирусных баз и др.;</a:t>
-            </a:r>
-          </a:p>
-          <a:p>
-            <a:pPr marL="0" lvl="5" indent="450000" algn="just">
-              <a:lnSpc>
-                <a:spcPct val="150000"/>
-              </a:lnSpc>
-              <a:spcBef>
-                <a:spcPts val="0"/>
-              </a:spcBef>
-              <a:spcAft>
-                <a:spcPts val="0"/>
-              </a:spcAft>
-              <a:buFont typeface="+mj-lt"/>
-              <a:buAutoNum type="arabicParenR"/>
-            </a:pPr>
-            <a:r>
-              <a:rPr lang="ru-RU" sz="2600" dirty="0">
-                <a:solidFill>
-                  <a:schemeClr val="tx1"/>
-                </a:solidFill>
-                <a:latin typeface="Times New Roman" panose="02020603050405020304" pitchFamily="18" charset="0"/>
-                <a:ea typeface="Calibri" panose="020F0502020204030204" pitchFamily="34" charset="0"/>
-                <a:cs typeface="Times New Roman" panose="02020603050405020304" pitchFamily="18" charset="0"/>
-              </a:rPr>
-              <a:t>Ежемесячные/каникулярные операции: глубокое тестирование сетевой инфраструктуры, проверка целостности системных файлов и др.</a:t>
-            </a:r>
-            <a:endParaRPr lang="ru-RU" sz="2600" dirty="0">
-              <a:effectLst/>
-              <a:latin typeface="Calibri" panose="020F0502020204030204" pitchFamily="34" charset="0"/>
-              <a:ea typeface="Calibri" panose="020F0502020204030204" pitchFamily="34" charset="0"/>
-              <a:cs typeface="Times New Roman" panose="02020603050405020304" pitchFamily="18" charset="0"/>
-            </a:endParaRPr>
+              <a:t>Разработанный интерфейс отвечает поставленным требованиям; </a:t>
+            </a:r>
           </a:p>
         </p:txBody>
       </p:sp>
     </p:spTree>
     <p:extLst>
       <p:ext uri="{BB962C8B-B14F-4D97-AF65-F5344CB8AC3E}">
-        <p14:creationId xmlns:p14="http://schemas.microsoft.com/office/powerpoint/2010/main" val="2691917738"/>
-      </p:ext>
-    </p:extLst>
-  </p:cSld>
-  <p:clrMapOvr>
-    <a:masterClrMapping/>
-  </p:clrMapOvr>
-</p:sld>
-</file>
-
-<file path=ppt/slides/slide12.xml><?xml version="1.0" encoding="utf-8"?>
-<p:sld xmlns:a="http://schemas.openxmlformats.org/drawingml/2006/main" xmlns:r="http://schemas.openxmlformats.org/officeDocument/2006/relationships" xmlns:p="http://schemas.openxmlformats.org/presentationml/2006/main">
-  <p:cSld>
-    <p:spTree>
-      <p:nvGrpSpPr>
-        <p:cNvPr id="1" name="">
-          <a:extLst>
-            <a:ext uri="{FF2B5EF4-FFF2-40B4-BE49-F238E27FC236}">
-              <a16:creationId xmlns:a16="http://schemas.microsoft.com/office/drawing/2014/main" id="{AF388CE2-2443-7E5F-1E8D-D956B5A25884}"/>
-            </a:ext>
-          </a:extLst>
-        </p:cNvPr>
-        <p:cNvGrpSpPr/>
-        <p:nvPr/>
-      </p:nvGrpSpPr>
-      <p:grpSpPr>
-        <a:xfrm>
-          <a:off x="0" y="0"/>
-          <a:ext cx="0" cy="0"/>
-          <a:chOff x="0" y="0"/>
-          <a:chExt cx="0" cy="0"/>
-        </a:xfrm>
-      </p:grpSpPr>
-      <p:sp>
-        <p:nvSpPr>
-          <p:cNvPr id="2" name="Заголовок 1">
-            <a:extLst>
-              <a:ext uri="{FF2B5EF4-FFF2-40B4-BE49-F238E27FC236}">
-                <a16:creationId xmlns:a16="http://schemas.microsoft.com/office/drawing/2014/main" id="{1EFD6D3D-9A4F-7F99-3852-F22498A72893}"/>
-              </a:ext>
-            </a:extLst>
-          </p:cNvPr>
-          <p:cNvSpPr>
-            <a:spLocks noGrp="1"/>
-          </p:cNvSpPr>
-          <p:nvPr>
-            <p:ph type="title"/>
-          </p:nvPr>
-        </p:nvSpPr>
-        <p:spPr>
-          <a:xfrm>
-            <a:off x="1111162" y="187016"/>
-            <a:ext cx="10058400" cy="1347144"/>
-          </a:xfrm>
-        </p:spPr>
-        <p:txBody>
-          <a:bodyPr>
-            <a:normAutofit/>
-          </a:bodyPr>
-          <a:lstStyle/>
-          <a:p>
-            <a:pPr lvl="0" algn="ctr">
-              <a:lnSpc>
-                <a:spcPct val="150000"/>
-              </a:lnSpc>
-              <a:tabLst>
-                <a:tab pos="630555" algn="l"/>
-              </a:tabLst>
-            </a:pPr>
-            <a:r>
-              <a:rPr lang="ru-RU" sz="3600" dirty="0">
-                <a:solidFill>
-                  <a:schemeClr val="tx1"/>
-                </a:solidFill>
-                <a:latin typeface="Times New Roman" panose="02020603050405020304" pitchFamily="18" charset="0"/>
-                <a:ea typeface="Calibri" panose="020F0502020204030204" pitchFamily="34" charset="0"/>
-                <a:cs typeface="Times New Roman" panose="02020603050405020304" pitchFamily="18" charset="0"/>
-              </a:rPr>
-              <a:t>Справочник типовых неисправностей</a:t>
-            </a:r>
-            <a:endParaRPr lang="ru-RU" sz="3600" dirty="0">
-              <a:solidFill>
-                <a:schemeClr val="tx1"/>
-              </a:solidFill>
-              <a:latin typeface="Times New Roman" panose="02020603050405020304" pitchFamily="18" charset="0"/>
-              <a:cs typeface="Times New Roman" panose="02020603050405020304" pitchFamily="18" charset="0"/>
-            </a:endParaRPr>
-          </a:p>
-        </p:txBody>
-      </p:sp>
-      <p:graphicFrame>
-        <p:nvGraphicFramePr>
-          <p:cNvPr id="3" name="Объект 2">
-            <a:extLst>
-              <a:ext uri="{FF2B5EF4-FFF2-40B4-BE49-F238E27FC236}">
-                <a16:creationId xmlns:a16="http://schemas.microsoft.com/office/drawing/2014/main" id="{E26F85F0-0DB9-8C37-AA2D-C6C411DEDEEF}"/>
-              </a:ext>
-            </a:extLst>
-          </p:cNvPr>
-          <p:cNvGraphicFramePr>
-            <a:graphicFrameLocks noGrp="1"/>
-          </p:cNvGraphicFramePr>
-          <p:nvPr>
-            <p:ph idx="1"/>
-            <p:extLst>
-              <p:ext uri="{D42A27DB-BD31-4B8C-83A1-F6EECF244321}">
-                <p14:modId xmlns:p14="http://schemas.microsoft.com/office/powerpoint/2010/main" val="3556229195"/>
-              </p:ext>
-            </p:extLst>
-          </p:nvPr>
-        </p:nvGraphicFramePr>
-        <p:xfrm>
-          <a:off x="899160" y="2105660"/>
-          <a:ext cx="10393680" cy="3636264"/>
-        </p:xfrm>
-        <a:graphic>
-          <a:graphicData uri="http://schemas.openxmlformats.org/drawingml/2006/table">
-            <a:tbl>
-              <a:tblPr firstRow="1" bandRow="1">
-                <a:tableStyleId>{5C22544A-7EE6-4342-B048-85BDC9FD1C3A}</a:tableStyleId>
-              </a:tblPr>
-              <a:tblGrid>
-                <a:gridCol w="2263866">
-                  <a:extLst>
-                    <a:ext uri="{9D8B030D-6E8A-4147-A177-3AD203B41FA5}">
-                      <a16:colId xmlns:a16="http://schemas.microsoft.com/office/drawing/2014/main" val="1763597850"/>
-                    </a:ext>
-                  </a:extLst>
-                </a:gridCol>
-                <a:gridCol w="2932974">
-                  <a:extLst>
-                    <a:ext uri="{9D8B030D-6E8A-4147-A177-3AD203B41FA5}">
-                      <a16:colId xmlns:a16="http://schemas.microsoft.com/office/drawing/2014/main" val="4105250466"/>
-                    </a:ext>
-                  </a:extLst>
-                </a:gridCol>
-                <a:gridCol w="3025019">
-                  <a:extLst>
-                    <a:ext uri="{9D8B030D-6E8A-4147-A177-3AD203B41FA5}">
-                      <a16:colId xmlns:a16="http://schemas.microsoft.com/office/drawing/2014/main" val="3318648439"/>
-                    </a:ext>
-                  </a:extLst>
-                </a:gridCol>
-                <a:gridCol w="2171821">
-                  <a:extLst>
-                    <a:ext uri="{9D8B030D-6E8A-4147-A177-3AD203B41FA5}">
-                      <a16:colId xmlns:a16="http://schemas.microsoft.com/office/drawing/2014/main" val="2511566228"/>
-                    </a:ext>
-                  </a:extLst>
-                </a:gridCol>
-              </a:tblGrid>
-              <a:tr h="724408">
-                <a:tc>
-                  <a:txBody>
-                    <a:bodyPr/>
-                    <a:lstStyle/>
-                    <a:p>
-                      <a:pPr algn="ctr"/>
-                      <a:r>
-                        <a:rPr lang="ru-RU" sz="2100" dirty="0">
-                          <a:solidFill>
-                            <a:schemeClr val="tx1"/>
-                          </a:solidFill>
-                          <a:latin typeface="Times New Roman" panose="02020603050405020304" pitchFamily="18" charset="0"/>
-                          <a:cs typeface="Times New Roman" panose="02020603050405020304" pitchFamily="18" charset="0"/>
-                        </a:rPr>
-                        <a:t>Симптом</a:t>
-                      </a:r>
-                      <a:r>
-                        <a:rPr lang="ru-RU" sz="2100" dirty="0">
-                          <a:latin typeface="Times New Roman" panose="02020603050405020304" pitchFamily="18" charset="0"/>
-                          <a:cs typeface="Times New Roman" panose="02020603050405020304" pitchFamily="18" charset="0"/>
-                        </a:rPr>
-                        <a:t> </a:t>
-                      </a:r>
-                    </a:p>
-                  </a:txBody>
-                  <a:tcPr marL="94488" marR="94488" marT="47244" marB="47244"/>
-                </a:tc>
-                <a:tc>
-                  <a:txBody>
-                    <a:bodyPr/>
-                    <a:lstStyle/>
-                    <a:p>
-                      <a:pPr algn="ctr"/>
-                      <a:r>
-                        <a:rPr lang="ru-RU" sz="2100" dirty="0">
-                          <a:solidFill>
-                            <a:schemeClr val="tx1"/>
-                          </a:solidFill>
-                          <a:latin typeface="Times New Roman" panose="02020603050405020304" pitchFamily="18" charset="0"/>
-                          <a:cs typeface="Times New Roman" panose="02020603050405020304" pitchFamily="18" charset="0"/>
-                        </a:rPr>
-                        <a:t>Вероятная причина </a:t>
-                      </a:r>
-                    </a:p>
-                  </a:txBody>
-                  <a:tcPr marL="94488" marR="94488" marT="47244" marB="47244"/>
-                </a:tc>
-                <a:tc>
-                  <a:txBody>
-                    <a:bodyPr/>
-                    <a:lstStyle/>
-                    <a:p>
-                      <a:pPr algn="ctr"/>
-                      <a:r>
-                        <a:rPr lang="ru-RU" sz="2100" dirty="0">
-                          <a:solidFill>
-                            <a:schemeClr val="tx1"/>
-                          </a:solidFill>
-                          <a:latin typeface="Times New Roman" panose="02020603050405020304" pitchFamily="18" charset="0"/>
-                          <a:cs typeface="Times New Roman" panose="02020603050405020304" pitchFamily="18" charset="0"/>
-                        </a:rPr>
-                        <a:t>Алгоритм действий </a:t>
-                      </a:r>
-                    </a:p>
-                  </a:txBody>
-                  <a:tcPr marL="94488" marR="94488" marT="47244" marB="47244"/>
-                </a:tc>
-                <a:tc>
-                  <a:txBody>
-                    <a:bodyPr/>
-                    <a:lstStyle/>
-                    <a:p>
-                      <a:pPr algn="ctr"/>
-                      <a:r>
-                        <a:rPr lang="ru-RU" sz="2100" dirty="0">
-                          <a:solidFill>
-                            <a:schemeClr val="tx1"/>
-                          </a:solidFill>
-                          <a:latin typeface="Times New Roman" panose="02020603050405020304" pitchFamily="18" charset="0"/>
-                          <a:cs typeface="Times New Roman" panose="02020603050405020304" pitchFamily="18" charset="0"/>
-                        </a:rPr>
-                        <a:t>Статус обращения</a:t>
-                      </a:r>
-                    </a:p>
-                  </a:txBody>
-                  <a:tcPr marL="94488" marR="94488" marT="47244" marB="47244"/>
-                </a:tc>
-                <a:extLst>
-                  <a:ext uri="{0D108BD9-81ED-4DB2-BD59-A6C34878D82A}">
-                    <a16:rowId xmlns:a16="http://schemas.microsoft.com/office/drawing/2014/main" val="3570103619"/>
-                  </a:ext>
-                </a:extLst>
-              </a:tr>
-              <a:tr h="409448">
-                <a:tc>
-                  <a:txBody>
-                    <a:bodyPr/>
-                    <a:lstStyle/>
-                    <a:p>
-                      <a:endParaRPr lang="ru-RU" sz="2100" dirty="0">
-                        <a:latin typeface="Times New Roman" panose="02020603050405020304" pitchFamily="18" charset="0"/>
-                        <a:cs typeface="Times New Roman" panose="02020603050405020304" pitchFamily="18" charset="0"/>
-                      </a:endParaRPr>
-                    </a:p>
-                  </a:txBody>
-                  <a:tcPr marL="94488" marR="94488" marT="47244" marB="47244"/>
-                </a:tc>
-                <a:tc>
-                  <a:txBody>
-                    <a:bodyPr/>
-                    <a:lstStyle/>
-                    <a:p>
-                      <a:endParaRPr lang="ru-RU" sz="2100" dirty="0">
-                        <a:latin typeface="Times New Roman" panose="02020603050405020304" pitchFamily="18" charset="0"/>
-                        <a:cs typeface="Times New Roman" panose="02020603050405020304" pitchFamily="18" charset="0"/>
-                      </a:endParaRPr>
-                    </a:p>
-                  </a:txBody>
-                  <a:tcPr marL="94488" marR="94488" marT="47244" marB="47244"/>
-                </a:tc>
-                <a:tc>
-                  <a:txBody>
-                    <a:bodyPr/>
-                    <a:lstStyle/>
-                    <a:p>
-                      <a:endParaRPr lang="ru-RU" sz="2100" dirty="0">
-                        <a:latin typeface="Times New Roman" panose="02020603050405020304" pitchFamily="18" charset="0"/>
-                        <a:cs typeface="Times New Roman" panose="02020603050405020304" pitchFamily="18" charset="0"/>
-                      </a:endParaRPr>
-                    </a:p>
-                  </a:txBody>
-                  <a:tcPr marL="94488" marR="94488" marT="47244" marB="47244"/>
-                </a:tc>
-                <a:tc>
-                  <a:txBody>
-                    <a:bodyPr/>
-                    <a:lstStyle/>
-                    <a:p>
-                      <a:endParaRPr lang="ru-RU" sz="2100">
-                        <a:latin typeface="Times New Roman" panose="02020603050405020304" pitchFamily="18" charset="0"/>
-                        <a:cs typeface="Times New Roman" panose="02020603050405020304" pitchFamily="18" charset="0"/>
-                      </a:endParaRPr>
-                    </a:p>
-                  </a:txBody>
-                  <a:tcPr marL="94488" marR="94488" marT="47244" marB="47244"/>
-                </a:tc>
-                <a:extLst>
-                  <a:ext uri="{0D108BD9-81ED-4DB2-BD59-A6C34878D82A}">
-                    <a16:rowId xmlns:a16="http://schemas.microsoft.com/office/drawing/2014/main" val="2172369348"/>
-                  </a:ext>
-                </a:extLst>
-              </a:tr>
-              <a:tr h="409448">
-                <a:tc>
-                  <a:txBody>
-                    <a:bodyPr/>
-                    <a:lstStyle/>
-                    <a:p>
-                      <a:endParaRPr lang="ru-RU" sz="2100" dirty="0">
-                        <a:latin typeface="Times New Roman" panose="02020603050405020304" pitchFamily="18" charset="0"/>
-                        <a:cs typeface="Times New Roman" panose="02020603050405020304" pitchFamily="18" charset="0"/>
-                      </a:endParaRPr>
-                    </a:p>
-                  </a:txBody>
-                  <a:tcPr marL="94488" marR="94488" marT="47244" marB="47244"/>
-                </a:tc>
-                <a:tc>
-                  <a:txBody>
-                    <a:bodyPr/>
-                    <a:lstStyle/>
-                    <a:p>
-                      <a:endParaRPr lang="ru-RU" sz="2100" dirty="0">
-                        <a:latin typeface="Times New Roman" panose="02020603050405020304" pitchFamily="18" charset="0"/>
-                        <a:cs typeface="Times New Roman" panose="02020603050405020304" pitchFamily="18" charset="0"/>
-                      </a:endParaRPr>
-                    </a:p>
-                  </a:txBody>
-                  <a:tcPr marL="94488" marR="94488" marT="47244" marB="47244"/>
-                </a:tc>
-                <a:tc>
-                  <a:txBody>
-                    <a:bodyPr/>
-                    <a:lstStyle/>
-                    <a:p>
-                      <a:endParaRPr lang="ru-RU" sz="2100" dirty="0">
-                        <a:latin typeface="Times New Roman" panose="02020603050405020304" pitchFamily="18" charset="0"/>
-                        <a:cs typeface="Times New Roman" panose="02020603050405020304" pitchFamily="18" charset="0"/>
-                      </a:endParaRPr>
-                    </a:p>
-                  </a:txBody>
-                  <a:tcPr marL="94488" marR="94488" marT="47244" marB="47244"/>
-                </a:tc>
-                <a:tc>
-                  <a:txBody>
-                    <a:bodyPr/>
-                    <a:lstStyle/>
-                    <a:p>
-                      <a:endParaRPr lang="ru-RU" sz="2100" dirty="0">
-                        <a:latin typeface="Times New Roman" panose="02020603050405020304" pitchFamily="18" charset="0"/>
-                        <a:cs typeface="Times New Roman" panose="02020603050405020304" pitchFamily="18" charset="0"/>
-                      </a:endParaRPr>
-                    </a:p>
-                  </a:txBody>
-                  <a:tcPr marL="94488" marR="94488" marT="47244" marB="47244"/>
-                </a:tc>
-                <a:extLst>
-                  <a:ext uri="{0D108BD9-81ED-4DB2-BD59-A6C34878D82A}">
-                    <a16:rowId xmlns:a16="http://schemas.microsoft.com/office/drawing/2014/main" val="104439073"/>
-                  </a:ext>
-                </a:extLst>
-              </a:tr>
-              <a:tr h="409448">
-                <a:tc>
-                  <a:txBody>
-                    <a:bodyPr/>
-                    <a:lstStyle/>
-                    <a:p>
-                      <a:endParaRPr lang="ru-RU" sz="2100" dirty="0">
-                        <a:latin typeface="Times New Roman" panose="02020603050405020304" pitchFamily="18" charset="0"/>
-                        <a:cs typeface="Times New Roman" panose="02020603050405020304" pitchFamily="18" charset="0"/>
-                      </a:endParaRPr>
-                    </a:p>
-                  </a:txBody>
-                  <a:tcPr marL="94488" marR="94488" marT="47244" marB="47244"/>
-                </a:tc>
-                <a:tc>
-                  <a:txBody>
-                    <a:bodyPr/>
-                    <a:lstStyle/>
-                    <a:p>
-                      <a:endParaRPr lang="ru-RU" sz="2100" dirty="0">
-                        <a:latin typeface="Times New Roman" panose="02020603050405020304" pitchFamily="18" charset="0"/>
-                        <a:cs typeface="Times New Roman" panose="02020603050405020304" pitchFamily="18" charset="0"/>
-                      </a:endParaRPr>
-                    </a:p>
-                  </a:txBody>
-                  <a:tcPr marL="94488" marR="94488" marT="47244" marB="47244"/>
-                </a:tc>
-                <a:tc>
-                  <a:txBody>
-                    <a:bodyPr/>
-                    <a:lstStyle/>
-                    <a:p>
-                      <a:endParaRPr lang="ru-RU" sz="2100" dirty="0">
-                        <a:latin typeface="Times New Roman" panose="02020603050405020304" pitchFamily="18" charset="0"/>
-                        <a:cs typeface="Times New Roman" panose="02020603050405020304" pitchFamily="18" charset="0"/>
-                      </a:endParaRPr>
-                    </a:p>
-                  </a:txBody>
-                  <a:tcPr marL="94488" marR="94488" marT="47244" marB="47244"/>
-                </a:tc>
-                <a:tc>
-                  <a:txBody>
-                    <a:bodyPr/>
-                    <a:lstStyle/>
-                    <a:p>
-                      <a:endParaRPr lang="ru-RU" sz="2100" dirty="0">
-                        <a:latin typeface="Times New Roman" panose="02020603050405020304" pitchFamily="18" charset="0"/>
-                        <a:cs typeface="Times New Roman" panose="02020603050405020304" pitchFamily="18" charset="0"/>
-                      </a:endParaRPr>
-                    </a:p>
-                  </a:txBody>
-                  <a:tcPr marL="94488" marR="94488" marT="47244" marB="47244"/>
-                </a:tc>
-                <a:extLst>
-                  <a:ext uri="{0D108BD9-81ED-4DB2-BD59-A6C34878D82A}">
-                    <a16:rowId xmlns:a16="http://schemas.microsoft.com/office/drawing/2014/main" val="2276334557"/>
-                  </a:ext>
-                </a:extLst>
-              </a:tr>
-              <a:tr h="409448">
-                <a:tc>
-                  <a:txBody>
-                    <a:bodyPr/>
-                    <a:lstStyle/>
-                    <a:p>
-                      <a:endParaRPr lang="ru-RU" sz="2100" dirty="0">
-                        <a:latin typeface="Times New Roman" panose="02020603050405020304" pitchFamily="18" charset="0"/>
-                        <a:cs typeface="Times New Roman" panose="02020603050405020304" pitchFamily="18" charset="0"/>
-                      </a:endParaRPr>
-                    </a:p>
-                  </a:txBody>
-                  <a:tcPr marL="94488" marR="94488" marT="47244" marB="47244"/>
-                </a:tc>
-                <a:tc>
-                  <a:txBody>
-                    <a:bodyPr/>
-                    <a:lstStyle/>
-                    <a:p>
-                      <a:endParaRPr lang="ru-RU" sz="2100" dirty="0">
-                        <a:latin typeface="Times New Roman" panose="02020603050405020304" pitchFamily="18" charset="0"/>
-                        <a:cs typeface="Times New Roman" panose="02020603050405020304" pitchFamily="18" charset="0"/>
-                      </a:endParaRPr>
-                    </a:p>
-                  </a:txBody>
-                  <a:tcPr marL="94488" marR="94488" marT="47244" marB="47244"/>
-                </a:tc>
-                <a:tc>
-                  <a:txBody>
-                    <a:bodyPr/>
-                    <a:lstStyle/>
-                    <a:p>
-                      <a:endParaRPr lang="ru-RU" sz="2100" dirty="0">
-                        <a:latin typeface="Times New Roman" panose="02020603050405020304" pitchFamily="18" charset="0"/>
-                        <a:cs typeface="Times New Roman" panose="02020603050405020304" pitchFamily="18" charset="0"/>
-                      </a:endParaRPr>
-                    </a:p>
-                  </a:txBody>
-                  <a:tcPr marL="94488" marR="94488" marT="47244" marB="47244"/>
-                </a:tc>
-                <a:tc>
-                  <a:txBody>
-                    <a:bodyPr/>
-                    <a:lstStyle/>
-                    <a:p>
-                      <a:endParaRPr lang="ru-RU" sz="2100" dirty="0">
-                        <a:latin typeface="Times New Roman" panose="02020603050405020304" pitchFamily="18" charset="0"/>
-                        <a:cs typeface="Times New Roman" panose="02020603050405020304" pitchFamily="18" charset="0"/>
-                      </a:endParaRPr>
-                    </a:p>
-                  </a:txBody>
-                  <a:tcPr marL="94488" marR="94488" marT="47244" marB="47244"/>
-                </a:tc>
-                <a:extLst>
-                  <a:ext uri="{0D108BD9-81ED-4DB2-BD59-A6C34878D82A}">
-                    <a16:rowId xmlns:a16="http://schemas.microsoft.com/office/drawing/2014/main" val="4160189740"/>
-                  </a:ext>
-                </a:extLst>
-              </a:tr>
-              <a:tr h="409448">
-                <a:tc>
-                  <a:txBody>
-                    <a:bodyPr/>
-                    <a:lstStyle/>
-                    <a:p>
-                      <a:endParaRPr lang="ru-RU" sz="2100" dirty="0">
-                        <a:latin typeface="Times New Roman" panose="02020603050405020304" pitchFamily="18" charset="0"/>
-                        <a:cs typeface="Times New Roman" panose="02020603050405020304" pitchFamily="18" charset="0"/>
-                      </a:endParaRPr>
-                    </a:p>
-                  </a:txBody>
-                  <a:tcPr marL="94488" marR="94488" marT="47244" marB="47244"/>
-                </a:tc>
-                <a:tc>
-                  <a:txBody>
-                    <a:bodyPr/>
-                    <a:lstStyle/>
-                    <a:p>
-                      <a:endParaRPr lang="ru-RU" sz="2100" dirty="0">
-                        <a:latin typeface="Times New Roman" panose="02020603050405020304" pitchFamily="18" charset="0"/>
-                        <a:cs typeface="Times New Roman" panose="02020603050405020304" pitchFamily="18" charset="0"/>
-                      </a:endParaRPr>
-                    </a:p>
-                  </a:txBody>
-                  <a:tcPr marL="94488" marR="94488" marT="47244" marB="47244"/>
-                </a:tc>
-                <a:tc>
-                  <a:txBody>
-                    <a:bodyPr/>
-                    <a:lstStyle/>
-                    <a:p>
-                      <a:endParaRPr lang="ru-RU" sz="2100" dirty="0">
-                        <a:latin typeface="Times New Roman" panose="02020603050405020304" pitchFamily="18" charset="0"/>
-                        <a:cs typeface="Times New Roman" panose="02020603050405020304" pitchFamily="18" charset="0"/>
-                      </a:endParaRPr>
-                    </a:p>
-                  </a:txBody>
-                  <a:tcPr marL="94488" marR="94488" marT="47244" marB="47244"/>
-                </a:tc>
-                <a:tc>
-                  <a:txBody>
-                    <a:bodyPr/>
-                    <a:lstStyle/>
-                    <a:p>
-                      <a:endParaRPr lang="ru-RU" sz="2100" dirty="0">
-                        <a:latin typeface="Times New Roman" panose="02020603050405020304" pitchFamily="18" charset="0"/>
-                        <a:cs typeface="Times New Roman" panose="02020603050405020304" pitchFamily="18" charset="0"/>
-                      </a:endParaRPr>
-                    </a:p>
-                  </a:txBody>
-                  <a:tcPr marL="94488" marR="94488" marT="47244" marB="47244"/>
-                </a:tc>
-                <a:extLst>
-                  <a:ext uri="{0D108BD9-81ED-4DB2-BD59-A6C34878D82A}">
-                    <a16:rowId xmlns:a16="http://schemas.microsoft.com/office/drawing/2014/main" val="1944425680"/>
-                  </a:ext>
-                </a:extLst>
-              </a:tr>
-              <a:tr h="409448">
-                <a:tc>
-                  <a:txBody>
-                    <a:bodyPr/>
-                    <a:lstStyle/>
-                    <a:p>
-                      <a:endParaRPr lang="ru-RU" sz="2100" dirty="0">
-                        <a:latin typeface="Times New Roman" panose="02020603050405020304" pitchFamily="18" charset="0"/>
-                        <a:cs typeface="Times New Roman" panose="02020603050405020304" pitchFamily="18" charset="0"/>
-                      </a:endParaRPr>
-                    </a:p>
-                  </a:txBody>
-                  <a:tcPr marL="94488" marR="94488" marT="47244" marB="47244"/>
-                </a:tc>
-                <a:tc>
-                  <a:txBody>
-                    <a:bodyPr/>
-                    <a:lstStyle/>
-                    <a:p>
-                      <a:endParaRPr lang="ru-RU" sz="2100" dirty="0">
-                        <a:latin typeface="Times New Roman" panose="02020603050405020304" pitchFamily="18" charset="0"/>
-                        <a:cs typeface="Times New Roman" panose="02020603050405020304" pitchFamily="18" charset="0"/>
-                      </a:endParaRPr>
-                    </a:p>
-                  </a:txBody>
-                  <a:tcPr marL="94488" marR="94488" marT="47244" marB="47244"/>
-                </a:tc>
-                <a:tc>
-                  <a:txBody>
-                    <a:bodyPr/>
-                    <a:lstStyle/>
-                    <a:p>
-                      <a:endParaRPr lang="ru-RU" sz="2100" dirty="0">
-                        <a:latin typeface="Times New Roman" panose="02020603050405020304" pitchFamily="18" charset="0"/>
-                        <a:cs typeface="Times New Roman" panose="02020603050405020304" pitchFamily="18" charset="0"/>
-                      </a:endParaRPr>
-                    </a:p>
-                  </a:txBody>
-                  <a:tcPr marL="94488" marR="94488" marT="47244" marB="47244"/>
-                </a:tc>
-                <a:tc>
-                  <a:txBody>
-                    <a:bodyPr/>
-                    <a:lstStyle/>
-                    <a:p>
-                      <a:endParaRPr lang="ru-RU" sz="2100" dirty="0">
-                        <a:latin typeface="Times New Roman" panose="02020603050405020304" pitchFamily="18" charset="0"/>
-                        <a:cs typeface="Times New Roman" panose="02020603050405020304" pitchFamily="18" charset="0"/>
-                      </a:endParaRPr>
-                    </a:p>
-                  </a:txBody>
-                  <a:tcPr marL="94488" marR="94488" marT="47244" marB="47244"/>
-                </a:tc>
-                <a:extLst>
-                  <a:ext uri="{0D108BD9-81ED-4DB2-BD59-A6C34878D82A}">
-                    <a16:rowId xmlns:a16="http://schemas.microsoft.com/office/drawing/2014/main" val="201303084"/>
-                  </a:ext>
-                </a:extLst>
-              </a:tr>
-              <a:tr h="409448">
-                <a:tc>
-                  <a:txBody>
-                    <a:bodyPr/>
-                    <a:lstStyle/>
-                    <a:p>
-                      <a:endParaRPr lang="ru-RU" sz="2100" dirty="0">
-                        <a:latin typeface="Times New Roman" panose="02020603050405020304" pitchFamily="18" charset="0"/>
-                        <a:cs typeface="Times New Roman" panose="02020603050405020304" pitchFamily="18" charset="0"/>
-                      </a:endParaRPr>
-                    </a:p>
-                  </a:txBody>
-                  <a:tcPr marL="94488" marR="94488" marT="47244" marB="47244"/>
-                </a:tc>
-                <a:tc>
-                  <a:txBody>
-                    <a:bodyPr/>
-                    <a:lstStyle/>
-                    <a:p>
-                      <a:endParaRPr lang="ru-RU" sz="2100" dirty="0">
-                        <a:latin typeface="Times New Roman" panose="02020603050405020304" pitchFamily="18" charset="0"/>
-                        <a:cs typeface="Times New Roman" panose="02020603050405020304" pitchFamily="18" charset="0"/>
-                      </a:endParaRPr>
-                    </a:p>
-                  </a:txBody>
-                  <a:tcPr marL="94488" marR="94488" marT="47244" marB="47244"/>
-                </a:tc>
-                <a:tc>
-                  <a:txBody>
-                    <a:bodyPr/>
-                    <a:lstStyle/>
-                    <a:p>
-                      <a:endParaRPr lang="ru-RU" sz="2100" dirty="0">
-                        <a:latin typeface="Times New Roman" panose="02020603050405020304" pitchFamily="18" charset="0"/>
-                        <a:cs typeface="Times New Roman" panose="02020603050405020304" pitchFamily="18" charset="0"/>
-                      </a:endParaRPr>
-                    </a:p>
-                  </a:txBody>
-                  <a:tcPr marL="94488" marR="94488" marT="47244" marB="47244"/>
-                </a:tc>
-                <a:tc>
-                  <a:txBody>
-                    <a:bodyPr/>
-                    <a:lstStyle/>
-                    <a:p>
-                      <a:endParaRPr lang="ru-RU" sz="2100" dirty="0">
-                        <a:latin typeface="Times New Roman" panose="02020603050405020304" pitchFamily="18" charset="0"/>
-                        <a:cs typeface="Times New Roman" panose="02020603050405020304" pitchFamily="18" charset="0"/>
-                      </a:endParaRPr>
-                    </a:p>
-                  </a:txBody>
-                  <a:tcPr marL="94488" marR="94488" marT="47244" marB="47244"/>
-                </a:tc>
-                <a:extLst>
-                  <a:ext uri="{0D108BD9-81ED-4DB2-BD59-A6C34878D82A}">
-                    <a16:rowId xmlns:a16="http://schemas.microsoft.com/office/drawing/2014/main" val="2194967367"/>
-                  </a:ext>
-                </a:extLst>
-              </a:tr>
-            </a:tbl>
-          </a:graphicData>
-        </a:graphic>
-      </p:graphicFrame>
-    </p:spTree>
-    <p:extLst>
-      <p:ext uri="{BB962C8B-B14F-4D97-AF65-F5344CB8AC3E}">
-        <p14:creationId xmlns:p14="http://schemas.microsoft.com/office/powerpoint/2010/main" val="1453594145"/>
-      </p:ext>
-    </p:extLst>
-  </p:cSld>
-  <p:clrMapOvr>
-    <a:masterClrMapping/>
-  </p:clrMapOvr>
-</p:sld>
-</file>
-
-<file path=ppt/slides/slide13.xml><?xml version="1.0" encoding="utf-8"?>
-<p:sld xmlns:a="http://schemas.openxmlformats.org/drawingml/2006/main" xmlns:r="http://schemas.openxmlformats.org/officeDocument/2006/relationships" xmlns:p="http://schemas.openxmlformats.org/presentationml/2006/main">
-  <p:cSld>
-    <p:spTree>
-      <p:nvGrpSpPr>
-        <p:cNvPr id="1" name="">
-          <a:extLst>
-            <a:ext uri="{FF2B5EF4-FFF2-40B4-BE49-F238E27FC236}">
-              <a16:creationId xmlns:a16="http://schemas.microsoft.com/office/drawing/2014/main" id="{F2DD0B5B-1556-8910-20F6-948A86C49812}"/>
-            </a:ext>
-          </a:extLst>
-        </p:cNvPr>
-        <p:cNvGrpSpPr/>
-        <p:nvPr/>
-      </p:nvGrpSpPr>
-      <p:grpSpPr>
-        <a:xfrm>
-          <a:off x="0" y="0"/>
-          <a:ext cx="0" cy="0"/>
-          <a:chOff x="0" y="0"/>
-          <a:chExt cx="0" cy="0"/>
-        </a:xfrm>
-      </p:grpSpPr>
-      <p:sp>
-        <p:nvSpPr>
-          <p:cNvPr id="2" name="Заголовок 1">
-            <a:extLst>
-              <a:ext uri="{FF2B5EF4-FFF2-40B4-BE49-F238E27FC236}">
-                <a16:creationId xmlns:a16="http://schemas.microsoft.com/office/drawing/2014/main" id="{D590CEEE-92C5-4D0C-D510-8FAC8AC397B7}"/>
-              </a:ext>
-            </a:extLst>
-          </p:cNvPr>
-          <p:cNvSpPr>
-            <a:spLocks noGrp="1"/>
-          </p:cNvSpPr>
-          <p:nvPr>
-            <p:ph type="title"/>
-          </p:nvPr>
-        </p:nvSpPr>
-        <p:spPr>
-          <a:xfrm>
-            <a:off x="1111162" y="187016"/>
-            <a:ext cx="10058400" cy="1347144"/>
-          </a:xfrm>
-        </p:spPr>
-        <p:txBody>
-          <a:bodyPr>
-            <a:normAutofit/>
-          </a:bodyPr>
-          <a:lstStyle/>
-          <a:p>
-            <a:pPr lvl="0" algn="ctr">
-              <a:lnSpc>
-                <a:spcPct val="150000"/>
-              </a:lnSpc>
-              <a:tabLst>
-                <a:tab pos="630555" algn="l"/>
-              </a:tabLst>
-            </a:pPr>
-            <a:r>
-              <a:rPr lang="ru-RU" sz="3600" dirty="0">
-                <a:solidFill>
-                  <a:schemeClr val="tx1"/>
-                </a:solidFill>
-                <a:latin typeface="Times New Roman" panose="02020603050405020304" pitchFamily="18" charset="0"/>
-                <a:ea typeface="Calibri" panose="020F0502020204030204" pitchFamily="34" charset="0"/>
-                <a:cs typeface="Times New Roman" panose="02020603050405020304" pitchFamily="18" charset="0"/>
-              </a:rPr>
-              <a:t>Журнал учёта и регистрации инцидентов</a:t>
-            </a:r>
-            <a:endParaRPr lang="ru-RU" sz="3600" dirty="0">
-              <a:solidFill>
-                <a:schemeClr val="tx1"/>
-              </a:solidFill>
-              <a:latin typeface="Times New Roman" panose="02020603050405020304" pitchFamily="18" charset="0"/>
-              <a:cs typeface="Times New Roman" panose="02020603050405020304" pitchFamily="18" charset="0"/>
-            </a:endParaRPr>
-          </a:p>
-        </p:txBody>
-      </p:sp>
-      <p:graphicFrame>
-        <p:nvGraphicFramePr>
-          <p:cNvPr id="3" name="Объект 2">
-            <a:extLst>
-              <a:ext uri="{FF2B5EF4-FFF2-40B4-BE49-F238E27FC236}">
-                <a16:creationId xmlns:a16="http://schemas.microsoft.com/office/drawing/2014/main" id="{17CEBB98-D2C8-7707-4A4B-D05FCA821A95}"/>
-              </a:ext>
-            </a:extLst>
-          </p:cNvPr>
-          <p:cNvGraphicFramePr>
-            <a:graphicFrameLocks noGrp="1"/>
-          </p:cNvGraphicFramePr>
-          <p:nvPr>
-            <p:ph idx="1"/>
-            <p:extLst>
-              <p:ext uri="{D42A27DB-BD31-4B8C-83A1-F6EECF244321}">
-                <p14:modId xmlns:p14="http://schemas.microsoft.com/office/powerpoint/2010/main" val="662620387"/>
-              </p:ext>
-            </p:extLst>
-          </p:nvPr>
-        </p:nvGraphicFramePr>
-        <p:xfrm>
-          <a:off x="899160" y="2105660"/>
-          <a:ext cx="10393680" cy="3636264"/>
-        </p:xfrm>
-        <a:graphic>
-          <a:graphicData uri="http://schemas.openxmlformats.org/drawingml/2006/table">
-            <a:tbl>
-              <a:tblPr firstRow="1" bandRow="1">
-                <a:tableStyleId>{5C22544A-7EE6-4342-B048-85BDC9FD1C3A}</a:tableStyleId>
-              </a:tblPr>
-              <a:tblGrid>
-                <a:gridCol w="1348740">
-                  <a:extLst>
-                    <a:ext uri="{9D8B030D-6E8A-4147-A177-3AD203B41FA5}">
-                      <a16:colId xmlns:a16="http://schemas.microsoft.com/office/drawing/2014/main" val="1763597850"/>
-                    </a:ext>
-                  </a:extLst>
-                </a:gridCol>
-                <a:gridCol w="2387600">
-                  <a:extLst>
-                    <a:ext uri="{9D8B030D-6E8A-4147-A177-3AD203B41FA5}">
-                      <a16:colId xmlns:a16="http://schemas.microsoft.com/office/drawing/2014/main" val="4105250466"/>
-                    </a:ext>
-                  </a:extLst>
-                </a:gridCol>
-                <a:gridCol w="4216400">
-                  <a:extLst>
-                    <a:ext uri="{9D8B030D-6E8A-4147-A177-3AD203B41FA5}">
-                      <a16:colId xmlns:a16="http://schemas.microsoft.com/office/drawing/2014/main" val="3318648439"/>
-                    </a:ext>
-                  </a:extLst>
-                </a:gridCol>
-                <a:gridCol w="2440940">
-                  <a:extLst>
-                    <a:ext uri="{9D8B030D-6E8A-4147-A177-3AD203B41FA5}">
-                      <a16:colId xmlns:a16="http://schemas.microsoft.com/office/drawing/2014/main" val="2511566228"/>
-                    </a:ext>
-                  </a:extLst>
-                </a:gridCol>
-              </a:tblGrid>
-              <a:tr h="724408">
-                <a:tc>
-                  <a:txBody>
-                    <a:bodyPr/>
-                    <a:lstStyle/>
-                    <a:p>
-                      <a:pPr algn="ctr"/>
-                      <a:r>
-                        <a:rPr lang="ru-RU" sz="2100" dirty="0">
-                          <a:solidFill>
-                            <a:schemeClr val="tx1"/>
-                          </a:solidFill>
-                          <a:latin typeface="Times New Roman" panose="02020603050405020304" pitchFamily="18" charset="0"/>
-                          <a:cs typeface="Times New Roman" panose="02020603050405020304" pitchFamily="18" charset="0"/>
-                        </a:rPr>
-                        <a:t>Дата</a:t>
-                      </a:r>
-                      <a:endParaRPr lang="ru-RU" sz="2100" dirty="0">
-                        <a:latin typeface="Times New Roman" panose="02020603050405020304" pitchFamily="18" charset="0"/>
-                        <a:cs typeface="Times New Roman" panose="02020603050405020304" pitchFamily="18" charset="0"/>
-                      </a:endParaRPr>
-                    </a:p>
-                  </a:txBody>
-                  <a:tcPr marL="94488" marR="94488" marT="47244" marB="47244"/>
-                </a:tc>
-                <a:tc>
-                  <a:txBody>
-                    <a:bodyPr/>
-                    <a:lstStyle/>
-                    <a:p>
-                      <a:pPr algn="ctr"/>
-                      <a:r>
-                        <a:rPr lang="ru-RU" sz="2100" dirty="0">
-                          <a:solidFill>
-                            <a:schemeClr val="tx1"/>
-                          </a:solidFill>
-                          <a:latin typeface="Times New Roman" panose="02020603050405020304" pitchFamily="18" charset="0"/>
-                          <a:cs typeface="Times New Roman" panose="02020603050405020304" pitchFamily="18" charset="0"/>
-                        </a:rPr>
-                        <a:t>Номер оборудования</a:t>
-                      </a:r>
-                    </a:p>
-                  </a:txBody>
-                  <a:tcPr marL="94488" marR="94488" marT="47244" marB="47244"/>
-                </a:tc>
-                <a:tc>
-                  <a:txBody>
-                    <a:bodyPr/>
-                    <a:lstStyle/>
-                    <a:p>
-                      <a:pPr algn="ctr"/>
-                      <a:r>
-                        <a:rPr lang="ru-RU" sz="2100" dirty="0">
-                          <a:solidFill>
-                            <a:schemeClr val="tx1"/>
-                          </a:solidFill>
-                          <a:latin typeface="Times New Roman" panose="02020603050405020304" pitchFamily="18" charset="0"/>
-                          <a:cs typeface="Times New Roman" panose="02020603050405020304" pitchFamily="18" charset="0"/>
-                        </a:rPr>
-                        <a:t>Описание проблемы</a:t>
-                      </a:r>
-                    </a:p>
-                  </a:txBody>
-                  <a:tcPr marL="94488" marR="94488" marT="47244" marB="47244"/>
-                </a:tc>
-                <a:tc>
-                  <a:txBody>
-                    <a:bodyPr/>
-                    <a:lstStyle/>
-                    <a:p>
-                      <a:pPr algn="ctr"/>
-                      <a:r>
-                        <a:rPr lang="ru-RU" sz="2100" dirty="0">
-                          <a:solidFill>
-                            <a:schemeClr val="tx1"/>
-                          </a:solidFill>
-                          <a:latin typeface="Times New Roman" panose="02020603050405020304" pitchFamily="18" charset="0"/>
-                          <a:cs typeface="Times New Roman" panose="02020603050405020304" pitchFamily="18" charset="0"/>
-                        </a:rPr>
-                        <a:t>Статус выполнения </a:t>
-                      </a:r>
-                    </a:p>
-                  </a:txBody>
-                  <a:tcPr marL="94488" marR="94488" marT="47244" marB="47244"/>
-                </a:tc>
-                <a:extLst>
-                  <a:ext uri="{0D108BD9-81ED-4DB2-BD59-A6C34878D82A}">
-                    <a16:rowId xmlns:a16="http://schemas.microsoft.com/office/drawing/2014/main" val="3570103619"/>
-                  </a:ext>
-                </a:extLst>
-              </a:tr>
-              <a:tr h="409448">
-                <a:tc>
-                  <a:txBody>
-                    <a:bodyPr/>
-                    <a:lstStyle/>
-                    <a:p>
-                      <a:endParaRPr lang="ru-RU" sz="2100" dirty="0">
-                        <a:latin typeface="Times New Roman" panose="02020603050405020304" pitchFamily="18" charset="0"/>
-                        <a:cs typeface="Times New Roman" panose="02020603050405020304" pitchFamily="18" charset="0"/>
-                      </a:endParaRPr>
-                    </a:p>
-                  </a:txBody>
-                  <a:tcPr marL="94488" marR="94488" marT="47244" marB="47244"/>
-                </a:tc>
-                <a:tc>
-                  <a:txBody>
-                    <a:bodyPr/>
-                    <a:lstStyle/>
-                    <a:p>
-                      <a:endParaRPr lang="ru-RU" sz="2100" dirty="0">
-                        <a:latin typeface="Times New Roman" panose="02020603050405020304" pitchFamily="18" charset="0"/>
-                        <a:cs typeface="Times New Roman" panose="02020603050405020304" pitchFamily="18" charset="0"/>
-                      </a:endParaRPr>
-                    </a:p>
-                  </a:txBody>
-                  <a:tcPr marL="94488" marR="94488" marT="47244" marB="47244"/>
-                </a:tc>
-                <a:tc>
-                  <a:txBody>
-                    <a:bodyPr/>
-                    <a:lstStyle/>
-                    <a:p>
-                      <a:endParaRPr lang="ru-RU" sz="2100" dirty="0">
-                        <a:latin typeface="Times New Roman" panose="02020603050405020304" pitchFamily="18" charset="0"/>
-                        <a:cs typeface="Times New Roman" panose="02020603050405020304" pitchFamily="18" charset="0"/>
-                      </a:endParaRPr>
-                    </a:p>
-                  </a:txBody>
-                  <a:tcPr marL="94488" marR="94488" marT="47244" marB="47244"/>
-                </a:tc>
-                <a:tc>
-                  <a:txBody>
-                    <a:bodyPr/>
-                    <a:lstStyle/>
-                    <a:p>
-                      <a:endParaRPr lang="ru-RU" sz="2100" dirty="0">
-                        <a:latin typeface="Times New Roman" panose="02020603050405020304" pitchFamily="18" charset="0"/>
-                        <a:cs typeface="Times New Roman" panose="02020603050405020304" pitchFamily="18" charset="0"/>
-                      </a:endParaRPr>
-                    </a:p>
-                  </a:txBody>
-                  <a:tcPr marL="94488" marR="94488" marT="47244" marB="47244"/>
-                </a:tc>
-                <a:extLst>
-                  <a:ext uri="{0D108BD9-81ED-4DB2-BD59-A6C34878D82A}">
-                    <a16:rowId xmlns:a16="http://schemas.microsoft.com/office/drawing/2014/main" val="2172369348"/>
-                  </a:ext>
-                </a:extLst>
-              </a:tr>
-              <a:tr h="409448">
-                <a:tc>
-                  <a:txBody>
-                    <a:bodyPr/>
-                    <a:lstStyle/>
-                    <a:p>
-                      <a:endParaRPr lang="ru-RU" sz="2100" dirty="0">
-                        <a:latin typeface="Times New Roman" panose="02020603050405020304" pitchFamily="18" charset="0"/>
-                        <a:cs typeface="Times New Roman" panose="02020603050405020304" pitchFamily="18" charset="0"/>
-                      </a:endParaRPr>
-                    </a:p>
-                  </a:txBody>
-                  <a:tcPr marL="94488" marR="94488" marT="47244" marB="47244"/>
-                </a:tc>
-                <a:tc>
-                  <a:txBody>
-                    <a:bodyPr/>
-                    <a:lstStyle/>
-                    <a:p>
-                      <a:endParaRPr lang="ru-RU" sz="2100" dirty="0">
-                        <a:latin typeface="Times New Roman" panose="02020603050405020304" pitchFamily="18" charset="0"/>
-                        <a:cs typeface="Times New Roman" panose="02020603050405020304" pitchFamily="18" charset="0"/>
-                      </a:endParaRPr>
-                    </a:p>
-                  </a:txBody>
-                  <a:tcPr marL="94488" marR="94488" marT="47244" marB="47244"/>
-                </a:tc>
-                <a:tc>
-                  <a:txBody>
-                    <a:bodyPr/>
-                    <a:lstStyle/>
-                    <a:p>
-                      <a:endParaRPr lang="ru-RU" sz="2100" dirty="0">
-                        <a:latin typeface="Times New Roman" panose="02020603050405020304" pitchFamily="18" charset="0"/>
-                        <a:cs typeface="Times New Roman" panose="02020603050405020304" pitchFamily="18" charset="0"/>
-                      </a:endParaRPr>
-                    </a:p>
-                  </a:txBody>
-                  <a:tcPr marL="94488" marR="94488" marT="47244" marB="47244"/>
-                </a:tc>
-                <a:tc>
-                  <a:txBody>
-                    <a:bodyPr/>
-                    <a:lstStyle/>
-                    <a:p>
-                      <a:endParaRPr lang="ru-RU" sz="2100" dirty="0">
-                        <a:latin typeface="Times New Roman" panose="02020603050405020304" pitchFamily="18" charset="0"/>
-                        <a:cs typeface="Times New Roman" panose="02020603050405020304" pitchFamily="18" charset="0"/>
-                      </a:endParaRPr>
-                    </a:p>
-                  </a:txBody>
-                  <a:tcPr marL="94488" marR="94488" marT="47244" marB="47244"/>
-                </a:tc>
-                <a:extLst>
-                  <a:ext uri="{0D108BD9-81ED-4DB2-BD59-A6C34878D82A}">
-                    <a16:rowId xmlns:a16="http://schemas.microsoft.com/office/drawing/2014/main" val="104439073"/>
-                  </a:ext>
-                </a:extLst>
-              </a:tr>
-              <a:tr h="409448">
-                <a:tc>
-                  <a:txBody>
-                    <a:bodyPr/>
-                    <a:lstStyle/>
-                    <a:p>
-                      <a:endParaRPr lang="ru-RU" sz="2100" dirty="0">
-                        <a:latin typeface="Times New Roman" panose="02020603050405020304" pitchFamily="18" charset="0"/>
-                        <a:cs typeface="Times New Roman" panose="02020603050405020304" pitchFamily="18" charset="0"/>
-                      </a:endParaRPr>
-                    </a:p>
-                  </a:txBody>
-                  <a:tcPr marL="94488" marR="94488" marT="47244" marB="47244"/>
-                </a:tc>
-                <a:tc>
-                  <a:txBody>
-                    <a:bodyPr/>
-                    <a:lstStyle/>
-                    <a:p>
-                      <a:endParaRPr lang="ru-RU" sz="2100" dirty="0">
-                        <a:latin typeface="Times New Roman" panose="02020603050405020304" pitchFamily="18" charset="0"/>
-                        <a:cs typeface="Times New Roman" panose="02020603050405020304" pitchFamily="18" charset="0"/>
-                      </a:endParaRPr>
-                    </a:p>
-                  </a:txBody>
-                  <a:tcPr marL="94488" marR="94488" marT="47244" marB="47244"/>
-                </a:tc>
-                <a:tc>
-                  <a:txBody>
-                    <a:bodyPr/>
-                    <a:lstStyle/>
-                    <a:p>
-                      <a:endParaRPr lang="ru-RU" sz="2100" dirty="0">
-                        <a:latin typeface="Times New Roman" panose="02020603050405020304" pitchFamily="18" charset="0"/>
-                        <a:cs typeface="Times New Roman" panose="02020603050405020304" pitchFamily="18" charset="0"/>
-                      </a:endParaRPr>
-                    </a:p>
-                  </a:txBody>
-                  <a:tcPr marL="94488" marR="94488" marT="47244" marB="47244"/>
-                </a:tc>
-                <a:tc>
-                  <a:txBody>
-                    <a:bodyPr/>
-                    <a:lstStyle/>
-                    <a:p>
-                      <a:endParaRPr lang="ru-RU" sz="2100" dirty="0">
-                        <a:latin typeface="Times New Roman" panose="02020603050405020304" pitchFamily="18" charset="0"/>
-                        <a:cs typeface="Times New Roman" panose="02020603050405020304" pitchFamily="18" charset="0"/>
-                      </a:endParaRPr>
-                    </a:p>
-                  </a:txBody>
-                  <a:tcPr marL="94488" marR="94488" marT="47244" marB="47244"/>
-                </a:tc>
-                <a:extLst>
-                  <a:ext uri="{0D108BD9-81ED-4DB2-BD59-A6C34878D82A}">
-                    <a16:rowId xmlns:a16="http://schemas.microsoft.com/office/drawing/2014/main" val="2276334557"/>
-                  </a:ext>
-                </a:extLst>
-              </a:tr>
-              <a:tr h="409448">
-                <a:tc>
-                  <a:txBody>
-                    <a:bodyPr/>
-                    <a:lstStyle/>
-                    <a:p>
-                      <a:endParaRPr lang="ru-RU" sz="2100" dirty="0">
-                        <a:latin typeface="Times New Roman" panose="02020603050405020304" pitchFamily="18" charset="0"/>
-                        <a:cs typeface="Times New Roman" panose="02020603050405020304" pitchFamily="18" charset="0"/>
-                      </a:endParaRPr>
-                    </a:p>
-                  </a:txBody>
-                  <a:tcPr marL="94488" marR="94488" marT="47244" marB="47244"/>
-                </a:tc>
-                <a:tc>
-                  <a:txBody>
-                    <a:bodyPr/>
-                    <a:lstStyle/>
-                    <a:p>
-                      <a:endParaRPr lang="ru-RU" sz="2100" dirty="0">
-                        <a:latin typeface="Times New Roman" panose="02020603050405020304" pitchFamily="18" charset="0"/>
-                        <a:cs typeface="Times New Roman" panose="02020603050405020304" pitchFamily="18" charset="0"/>
-                      </a:endParaRPr>
-                    </a:p>
-                  </a:txBody>
-                  <a:tcPr marL="94488" marR="94488" marT="47244" marB="47244"/>
-                </a:tc>
-                <a:tc>
-                  <a:txBody>
-                    <a:bodyPr/>
-                    <a:lstStyle/>
-                    <a:p>
-                      <a:endParaRPr lang="ru-RU" sz="2100" dirty="0">
-                        <a:latin typeface="Times New Roman" panose="02020603050405020304" pitchFamily="18" charset="0"/>
-                        <a:cs typeface="Times New Roman" panose="02020603050405020304" pitchFamily="18" charset="0"/>
-                      </a:endParaRPr>
-                    </a:p>
-                  </a:txBody>
-                  <a:tcPr marL="94488" marR="94488" marT="47244" marB="47244"/>
-                </a:tc>
-                <a:tc>
-                  <a:txBody>
-                    <a:bodyPr/>
-                    <a:lstStyle/>
-                    <a:p>
-                      <a:endParaRPr lang="ru-RU" sz="2100" dirty="0">
-                        <a:latin typeface="Times New Roman" panose="02020603050405020304" pitchFamily="18" charset="0"/>
-                        <a:cs typeface="Times New Roman" panose="02020603050405020304" pitchFamily="18" charset="0"/>
-                      </a:endParaRPr>
-                    </a:p>
-                  </a:txBody>
-                  <a:tcPr marL="94488" marR="94488" marT="47244" marB="47244"/>
-                </a:tc>
-                <a:extLst>
-                  <a:ext uri="{0D108BD9-81ED-4DB2-BD59-A6C34878D82A}">
-                    <a16:rowId xmlns:a16="http://schemas.microsoft.com/office/drawing/2014/main" val="4160189740"/>
-                  </a:ext>
-                </a:extLst>
-              </a:tr>
-              <a:tr h="409448">
-                <a:tc>
-                  <a:txBody>
-                    <a:bodyPr/>
-                    <a:lstStyle/>
-                    <a:p>
-                      <a:endParaRPr lang="ru-RU" sz="2100" dirty="0">
-                        <a:latin typeface="Times New Roman" panose="02020603050405020304" pitchFamily="18" charset="0"/>
-                        <a:cs typeface="Times New Roman" panose="02020603050405020304" pitchFamily="18" charset="0"/>
-                      </a:endParaRPr>
-                    </a:p>
-                  </a:txBody>
-                  <a:tcPr marL="94488" marR="94488" marT="47244" marB="47244"/>
-                </a:tc>
-                <a:tc>
-                  <a:txBody>
-                    <a:bodyPr/>
-                    <a:lstStyle/>
-                    <a:p>
-                      <a:endParaRPr lang="ru-RU" sz="2100" dirty="0">
-                        <a:latin typeface="Times New Roman" panose="02020603050405020304" pitchFamily="18" charset="0"/>
-                        <a:cs typeface="Times New Roman" panose="02020603050405020304" pitchFamily="18" charset="0"/>
-                      </a:endParaRPr>
-                    </a:p>
-                  </a:txBody>
-                  <a:tcPr marL="94488" marR="94488" marT="47244" marB="47244"/>
-                </a:tc>
-                <a:tc>
-                  <a:txBody>
-                    <a:bodyPr/>
-                    <a:lstStyle/>
-                    <a:p>
-                      <a:endParaRPr lang="ru-RU" sz="2100" dirty="0">
-                        <a:latin typeface="Times New Roman" panose="02020603050405020304" pitchFamily="18" charset="0"/>
-                        <a:cs typeface="Times New Roman" panose="02020603050405020304" pitchFamily="18" charset="0"/>
-                      </a:endParaRPr>
-                    </a:p>
-                  </a:txBody>
-                  <a:tcPr marL="94488" marR="94488" marT="47244" marB="47244"/>
-                </a:tc>
-                <a:tc>
-                  <a:txBody>
-                    <a:bodyPr/>
-                    <a:lstStyle/>
-                    <a:p>
-                      <a:endParaRPr lang="ru-RU" sz="2100" dirty="0">
-                        <a:latin typeface="Times New Roman" panose="02020603050405020304" pitchFamily="18" charset="0"/>
-                        <a:cs typeface="Times New Roman" panose="02020603050405020304" pitchFamily="18" charset="0"/>
-                      </a:endParaRPr>
-                    </a:p>
-                  </a:txBody>
-                  <a:tcPr marL="94488" marR="94488" marT="47244" marB="47244"/>
-                </a:tc>
-                <a:extLst>
-                  <a:ext uri="{0D108BD9-81ED-4DB2-BD59-A6C34878D82A}">
-                    <a16:rowId xmlns:a16="http://schemas.microsoft.com/office/drawing/2014/main" val="1944425680"/>
-                  </a:ext>
-                </a:extLst>
-              </a:tr>
-              <a:tr h="409448">
-                <a:tc>
-                  <a:txBody>
-                    <a:bodyPr/>
-                    <a:lstStyle/>
-                    <a:p>
-                      <a:endParaRPr lang="ru-RU" sz="2100" dirty="0">
-                        <a:latin typeface="Times New Roman" panose="02020603050405020304" pitchFamily="18" charset="0"/>
-                        <a:cs typeface="Times New Roman" panose="02020603050405020304" pitchFamily="18" charset="0"/>
-                      </a:endParaRPr>
-                    </a:p>
-                  </a:txBody>
-                  <a:tcPr marL="94488" marR="94488" marT="47244" marB="47244"/>
-                </a:tc>
-                <a:tc>
-                  <a:txBody>
-                    <a:bodyPr/>
-                    <a:lstStyle/>
-                    <a:p>
-                      <a:endParaRPr lang="ru-RU" sz="2100" dirty="0">
-                        <a:latin typeface="Times New Roman" panose="02020603050405020304" pitchFamily="18" charset="0"/>
-                        <a:cs typeface="Times New Roman" panose="02020603050405020304" pitchFamily="18" charset="0"/>
-                      </a:endParaRPr>
-                    </a:p>
-                  </a:txBody>
-                  <a:tcPr marL="94488" marR="94488" marT="47244" marB="47244"/>
-                </a:tc>
-                <a:tc>
-                  <a:txBody>
-                    <a:bodyPr/>
-                    <a:lstStyle/>
-                    <a:p>
-                      <a:endParaRPr lang="ru-RU" sz="2100" dirty="0">
-                        <a:latin typeface="Times New Roman" panose="02020603050405020304" pitchFamily="18" charset="0"/>
-                        <a:cs typeface="Times New Roman" panose="02020603050405020304" pitchFamily="18" charset="0"/>
-                      </a:endParaRPr>
-                    </a:p>
-                  </a:txBody>
-                  <a:tcPr marL="94488" marR="94488" marT="47244" marB="47244"/>
-                </a:tc>
-                <a:tc>
-                  <a:txBody>
-                    <a:bodyPr/>
-                    <a:lstStyle/>
-                    <a:p>
-                      <a:endParaRPr lang="ru-RU" sz="2100" dirty="0">
-                        <a:latin typeface="Times New Roman" panose="02020603050405020304" pitchFamily="18" charset="0"/>
-                        <a:cs typeface="Times New Roman" panose="02020603050405020304" pitchFamily="18" charset="0"/>
-                      </a:endParaRPr>
-                    </a:p>
-                  </a:txBody>
-                  <a:tcPr marL="94488" marR="94488" marT="47244" marB="47244"/>
-                </a:tc>
-                <a:extLst>
-                  <a:ext uri="{0D108BD9-81ED-4DB2-BD59-A6C34878D82A}">
-                    <a16:rowId xmlns:a16="http://schemas.microsoft.com/office/drawing/2014/main" val="201303084"/>
-                  </a:ext>
-                </a:extLst>
-              </a:tr>
-              <a:tr h="409448">
-                <a:tc>
-                  <a:txBody>
-                    <a:bodyPr/>
-                    <a:lstStyle/>
-                    <a:p>
-                      <a:endParaRPr lang="ru-RU" sz="2100" dirty="0">
-                        <a:latin typeface="Times New Roman" panose="02020603050405020304" pitchFamily="18" charset="0"/>
-                        <a:cs typeface="Times New Roman" panose="02020603050405020304" pitchFamily="18" charset="0"/>
-                      </a:endParaRPr>
-                    </a:p>
-                  </a:txBody>
-                  <a:tcPr marL="94488" marR="94488" marT="47244" marB="47244"/>
-                </a:tc>
-                <a:tc>
-                  <a:txBody>
-                    <a:bodyPr/>
-                    <a:lstStyle/>
-                    <a:p>
-                      <a:endParaRPr lang="ru-RU" sz="2100" dirty="0">
-                        <a:latin typeface="Times New Roman" panose="02020603050405020304" pitchFamily="18" charset="0"/>
-                        <a:cs typeface="Times New Roman" panose="02020603050405020304" pitchFamily="18" charset="0"/>
-                      </a:endParaRPr>
-                    </a:p>
-                  </a:txBody>
-                  <a:tcPr marL="94488" marR="94488" marT="47244" marB="47244"/>
-                </a:tc>
-                <a:tc>
-                  <a:txBody>
-                    <a:bodyPr/>
-                    <a:lstStyle/>
-                    <a:p>
-                      <a:endParaRPr lang="ru-RU" sz="2100" dirty="0">
-                        <a:latin typeface="Times New Roman" panose="02020603050405020304" pitchFamily="18" charset="0"/>
-                        <a:cs typeface="Times New Roman" panose="02020603050405020304" pitchFamily="18" charset="0"/>
-                      </a:endParaRPr>
-                    </a:p>
-                  </a:txBody>
-                  <a:tcPr marL="94488" marR="94488" marT="47244" marB="47244"/>
-                </a:tc>
-                <a:tc>
-                  <a:txBody>
-                    <a:bodyPr/>
-                    <a:lstStyle/>
-                    <a:p>
-                      <a:endParaRPr lang="ru-RU" sz="2100" dirty="0">
-                        <a:latin typeface="Times New Roman" panose="02020603050405020304" pitchFamily="18" charset="0"/>
-                        <a:cs typeface="Times New Roman" panose="02020603050405020304" pitchFamily="18" charset="0"/>
-                      </a:endParaRPr>
-                    </a:p>
-                  </a:txBody>
-                  <a:tcPr marL="94488" marR="94488" marT="47244" marB="47244"/>
-                </a:tc>
-                <a:extLst>
-                  <a:ext uri="{0D108BD9-81ED-4DB2-BD59-A6C34878D82A}">
-                    <a16:rowId xmlns:a16="http://schemas.microsoft.com/office/drawing/2014/main" val="2194967367"/>
-                  </a:ext>
-                </a:extLst>
-              </a:tr>
-            </a:tbl>
-          </a:graphicData>
-        </a:graphic>
-      </p:graphicFrame>
-    </p:spTree>
-    <p:extLst>
-      <p:ext uri="{BB962C8B-B14F-4D97-AF65-F5344CB8AC3E}">
-        <p14:creationId xmlns:p14="http://schemas.microsoft.com/office/powerpoint/2010/main" val="3911408945"/>
-      </p:ext>
-    </p:extLst>
-  </p:cSld>
-  <p:clrMapOvr>
-    <a:masterClrMapping/>
-  </p:clrMapOvr>
-</p:sld>
-</file>
-
-<file path=ppt/slides/slide14.xml><?xml version="1.0" encoding="utf-8"?>
-<p:sld xmlns:a="http://schemas.openxmlformats.org/drawingml/2006/main" xmlns:r="http://schemas.openxmlformats.org/officeDocument/2006/relationships" xmlns:p="http://schemas.openxmlformats.org/presentationml/2006/main">
-  <p:cSld>
-    <p:spTree>
-      <p:nvGrpSpPr>
-        <p:cNvPr id="1" name=""/>
-        <p:cNvGrpSpPr/>
-        <p:nvPr/>
-      </p:nvGrpSpPr>
-      <p:grpSpPr>
-        <a:xfrm>
-          <a:off x="0" y="0"/>
-          <a:ext cx="0" cy="0"/>
-          <a:chOff x="0" y="0"/>
-          <a:chExt cx="0" cy="0"/>
-        </a:xfrm>
-      </p:grpSpPr>
-      <p:sp>
-        <p:nvSpPr>
-          <p:cNvPr id="2" name="Заголовок 1">
-            <a:extLst>
-              <a:ext uri="{FF2B5EF4-FFF2-40B4-BE49-F238E27FC236}">
-                <a16:creationId xmlns:a16="http://schemas.microsoft.com/office/drawing/2014/main" id="{CD6CAC1F-0F84-4B46-413D-AEE57B9EE6F6}"/>
-              </a:ext>
-            </a:extLst>
-          </p:cNvPr>
-          <p:cNvSpPr>
-            <a:spLocks noGrp="1"/>
-          </p:cNvSpPr>
-          <p:nvPr>
-            <p:ph type="title"/>
-          </p:nvPr>
-        </p:nvSpPr>
-        <p:spPr>
-          <a:xfrm>
-            <a:off x="1066800" y="683488"/>
-            <a:ext cx="10058400" cy="923330"/>
-          </a:xfrm>
-        </p:spPr>
-        <p:txBody>
-          <a:bodyPr>
-            <a:normAutofit/>
-          </a:bodyPr>
-          <a:lstStyle/>
-          <a:p>
-            <a:pPr algn="ctr">
-              <a:lnSpc>
-                <a:spcPct val="150000"/>
-              </a:lnSpc>
-            </a:pPr>
-            <a:r>
-              <a:rPr lang="ru-RU" sz="3600" dirty="0">
-                <a:solidFill>
-                  <a:schemeClr val="tx1"/>
-                </a:solidFill>
-                <a:effectLst/>
-                <a:latin typeface="Times New Roman" panose="02020603050405020304" pitchFamily="18" charset="0"/>
-                <a:ea typeface="Calibri" panose="020F0502020204030204" pitchFamily="34" charset="0"/>
-                <a:cs typeface="Times New Roman" panose="02020603050405020304" pitchFamily="18" charset="0"/>
-              </a:rPr>
-              <a:t>Заключение</a:t>
-            </a:r>
-            <a:endParaRPr lang="ru-RU" sz="8800" dirty="0">
-              <a:solidFill>
-                <a:schemeClr val="tx1"/>
-              </a:solidFill>
-              <a:latin typeface="Times New Roman" panose="02020603050405020304" pitchFamily="18" charset="0"/>
-              <a:cs typeface="Times New Roman" panose="02020603050405020304" pitchFamily="18" charset="0"/>
-            </a:endParaRPr>
-          </a:p>
-        </p:txBody>
-      </p:sp>
-      <p:sp>
-        <p:nvSpPr>
-          <p:cNvPr id="3" name="TextBox 2">
-            <a:extLst>
-              <a:ext uri="{FF2B5EF4-FFF2-40B4-BE49-F238E27FC236}">
-                <a16:creationId xmlns:a16="http://schemas.microsoft.com/office/drawing/2014/main" id="{F94A4C34-79CC-E1A8-BF78-A4A4D8D3A10E}"/>
-              </a:ext>
-            </a:extLst>
-          </p:cNvPr>
-          <p:cNvSpPr txBox="1"/>
-          <p:nvPr/>
-        </p:nvSpPr>
-        <p:spPr>
-          <a:xfrm>
-            <a:off x="602249" y="1716560"/>
-            <a:ext cx="10987501" cy="4457952"/>
-          </a:xfrm>
-          <a:prstGeom prst="rect">
-            <a:avLst/>
-          </a:prstGeom>
-          <a:noFill/>
-        </p:spPr>
-        <p:txBody>
-          <a:bodyPr wrap="square" rtlCol="0">
-            <a:spAutoFit/>
-          </a:bodyPr>
-          <a:lstStyle/>
-          <a:p>
-            <a:pPr indent="450000" algn="just">
-              <a:lnSpc>
-                <a:spcPct val="150000"/>
-              </a:lnSpc>
-            </a:pPr>
-            <a:r>
-              <a:rPr lang="ru-RU" sz="2400" dirty="0">
-                <a:effectLst/>
-                <a:latin typeface="Times New Roman" panose="02020603050405020304" pitchFamily="18" charset="0"/>
-                <a:ea typeface="Calibri" panose="020F0502020204030204" pitchFamily="34" charset="0"/>
-                <a:cs typeface="Times New Roman" panose="02020603050405020304" pitchFamily="18" charset="0"/>
-              </a:rPr>
-              <a:t>Производственная практика предоставила возможность закрепить теоретические знания и приобрести практические навыки в области профессиональной деятельности, связанной с проектированием, разработкой и сопровождением информационных систем, </a:t>
-            </a:r>
-            <a:r>
-              <a:rPr lang="ru-RU" sz="2400" dirty="0" err="1">
-                <a:effectLst/>
-                <a:latin typeface="Times New Roman" panose="02020603050405020304" pitchFamily="18" charset="0"/>
-                <a:ea typeface="Calibri" panose="020F0502020204030204" pitchFamily="34" charset="0"/>
-                <a:cs typeface="Times New Roman" panose="02020603050405020304" pitchFamily="18" charset="0"/>
-              </a:rPr>
-              <a:t>соадминистрированием</a:t>
-            </a:r>
-            <a:r>
-              <a:rPr lang="ru-RU" sz="2400" dirty="0">
-                <a:effectLst/>
-                <a:latin typeface="Times New Roman" panose="02020603050405020304" pitchFamily="18" charset="0"/>
-                <a:ea typeface="Calibri" panose="020F0502020204030204" pitchFamily="34" charset="0"/>
-                <a:cs typeface="Times New Roman" panose="02020603050405020304" pitchFamily="18" charset="0"/>
-              </a:rPr>
-              <a:t> баз данных и серверов.</a:t>
-            </a:r>
-          </a:p>
-          <a:p>
-            <a:pPr indent="450000" algn="just">
-              <a:lnSpc>
-                <a:spcPct val="150000"/>
-              </a:lnSpc>
-            </a:pPr>
-            <a:r>
-              <a:rPr lang="ru-RU" sz="2400" dirty="0">
-                <a:effectLst/>
-                <a:latin typeface="Times New Roman" panose="02020603050405020304" pitchFamily="18" charset="0"/>
-                <a:ea typeface="Calibri" panose="020F0502020204030204" pitchFamily="34" charset="0"/>
-                <a:cs typeface="Times New Roman" panose="02020603050405020304" pitchFamily="18" charset="0"/>
-              </a:rPr>
-              <a:t>Работа над индивидуальным заданием позволила закрепить компетенции, связанные с анализом технических процессов и созданием нормативных документов.</a:t>
-            </a:r>
-          </a:p>
-        </p:txBody>
-      </p:sp>
-    </p:spTree>
-    <p:extLst>
-      <p:ext uri="{BB962C8B-B14F-4D97-AF65-F5344CB8AC3E}">
-        <p14:creationId xmlns:p14="http://schemas.microsoft.com/office/powerpoint/2010/main" val="4270700150"/>
+        <p14:creationId xmlns:p14="http://schemas.microsoft.com/office/powerpoint/2010/main" val="1142197290"/>
       </p:ext>
     </p:extLst>
   </p:cSld>
@@ -8288,7 +6561,7 @@
                 <a:ea typeface="+mn-ea"/>
                 <a:cs typeface="Times New Roman" panose="02020603050405020304" pitchFamily="18" charset="0"/>
               </a:rPr>
-              <a:t>Цель производственной практики</a:t>
+              <a:t>Цель преддипломной практики</a:t>
             </a:r>
             <a:endParaRPr kumimoji="0" lang="ru-RU" sz="3600" b="0" i="0" u="none" strike="noStrike" kern="1200" cap="none" spc="0" normalizeH="0" baseline="0" noProof="0" dirty="0">
               <a:ln>
@@ -8322,7 +6595,7 @@
         <p:spPr>
           <a:xfrm>
             <a:off x="1411188" y="2076653"/>
-            <a:ext cx="10035155" cy="906467"/>
+            <a:ext cx="10035155" cy="1586396"/>
           </a:xfrm>
           <a:prstGeom prst="rect">
             <a:avLst/>
@@ -8347,7 +6620,15 @@
               </a:spcAft>
             </a:pPr>
             <a:r>
-              <a:rPr lang="ru-RU" sz="2000" dirty="0">
+              <a:rPr lang="ru-RU" sz="2400" dirty="0">
+                <a:latin typeface="Times New Roman" panose="02020603050405020304" pitchFamily="18" charset="0"/>
+                <a:ea typeface="Calibri" panose="020F0502020204030204" pitchFamily="34" charset="0"/>
+                <a:cs typeface="Times New Roman" panose="02020603050405020304" pitchFamily="18" charset="0"/>
+              </a:rPr>
+              <a:t>П</a:t>
+            </a:r>
+            <a:r>
+              <a:rPr lang="ru-RU" sz="2400" dirty="0">
                 <a:solidFill>
                   <a:schemeClr val="tx1"/>
                 </a:solidFill>
@@ -8356,7 +6637,7 @@
                 <a:ea typeface="Calibri" panose="020F0502020204030204" pitchFamily="34" charset="0"/>
                 <a:cs typeface="Times New Roman" panose="02020603050405020304" pitchFamily="18" charset="0"/>
               </a:rPr>
-              <a:t>Освоение полного цикла работы с ИС: проектирование и разработка, сопровождение и обновление, администрирование серверов и БД</a:t>
+              <a:t>одготовка к выполнению выпускной квалификационной работы (ВКР) и освоение профессиональных компетенций в условиях реального рабочего процесса.</a:t>
             </a:r>
           </a:p>
         </p:txBody>
@@ -8628,1102 +6909,6 @@
   <p:cSld>
     <p:spTree>
       <p:nvGrpSpPr>
-        <p:cNvPr id="1" name=""/>
-        <p:cNvGrpSpPr/>
-        <p:nvPr/>
-      </p:nvGrpSpPr>
-      <p:grpSpPr>
-        <a:xfrm>
-          <a:off x="0" y="0"/>
-          <a:ext cx="0" cy="0"/>
-          <a:chOff x="0" y="0"/>
-          <a:chExt cx="0" cy="0"/>
-        </a:xfrm>
-      </p:grpSpPr>
-      <p:sp>
-        <p:nvSpPr>
-          <p:cNvPr id="2" name="Заголовок 1">
-            <a:extLst>
-              <a:ext uri="{FF2B5EF4-FFF2-40B4-BE49-F238E27FC236}">
-                <a16:creationId xmlns:a16="http://schemas.microsoft.com/office/drawing/2014/main" id="{A4A5146D-C620-6133-2B7E-B4FB41E595C6}"/>
-              </a:ext>
-            </a:extLst>
-          </p:cNvPr>
-          <p:cNvSpPr>
-            <a:spLocks noGrp="1"/>
-          </p:cNvSpPr>
-          <p:nvPr>
-            <p:ph type="title"/>
-          </p:nvPr>
-        </p:nvSpPr>
-        <p:spPr>
-          <a:xfrm>
-            <a:off x="695960" y="701040"/>
-            <a:ext cx="10800080" cy="762000"/>
-          </a:xfrm>
-        </p:spPr>
-        <p:txBody>
-          <a:bodyPr>
-            <a:noAutofit/>
-          </a:bodyPr>
-          <a:lstStyle/>
-          <a:p>
-            <a:pPr algn="ctr">
-              <a:lnSpc>
-                <a:spcPct val="150000"/>
-              </a:lnSpc>
-            </a:pPr>
-            <a:r>
-              <a:rPr lang="ru-RU" sz="3200" dirty="0">
-                <a:solidFill>
-                  <a:schemeClr val="tx1"/>
-                </a:solidFill>
-                <a:effectLst/>
-                <a:latin typeface="Times New Roman" panose="02020603050405020304" pitchFamily="18" charset="0"/>
-                <a:ea typeface="Calibri" panose="020F0502020204030204" pitchFamily="34" charset="0"/>
-                <a:cs typeface="Times New Roman" panose="02020603050405020304" pitchFamily="18" charset="0"/>
-              </a:rPr>
-              <a:t>ПМ 05 Проектирование и разработка информационных систем</a:t>
-            </a:r>
-            <a:endParaRPr lang="ru-RU" sz="6600" dirty="0">
-              <a:solidFill>
-                <a:schemeClr val="tx1"/>
-              </a:solidFill>
-              <a:latin typeface="Times New Roman" panose="02020603050405020304" pitchFamily="18" charset="0"/>
-              <a:cs typeface="Times New Roman" panose="02020603050405020304" pitchFamily="18" charset="0"/>
-            </a:endParaRPr>
-          </a:p>
-        </p:txBody>
-      </p:sp>
-      <p:sp>
-        <p:nvSpPr>
-          <p:cNvPr id="5" name="Объект 4">
-            <a:extLst>
-              <a:ext uri="{FF2B5EF4-FFF2-40B4-BE49-F238E27FC236}">
-                <a16:creationId xmlns:a16="http://schemas.microsoft.com/office/drawing/2014/main" id="{3BBE52F2-4234-3BBF-6DB6-15E4A5A98C7F}"/>
-              </a:ext>
-            </a:extLst>
-          </p:cNvPr>
-          <p:cNvSpPr>
-            <a:spLocks noGrp="1"/>
-          </p:cNvSpPr>
-          <p:nvPr>
-            <p:ph idx="1"/>
-          </p:nvPr>
-        </p:nvSpPr>
-        <p:spPr>
-          <a:xfrm>
-            <a:off x="1097280" y="1788160"/>
-            <a:ext cx="10058400" cy="4561840"/>
-          </a:xfrm>
-        </p:spPr>
-        <p:txBody>
-          <a:bodyPr>
-            <a:noAutofit/>
-          </a:bodyPr>
-          <a:lstStyle/>
-          <a:p>
-            <a:pPr marL="0" lvl="0" indent="450000" algn="just">
-              <a:lnSpc>
-                <a:spcPct val="150000"/>
-              </a:lnSpc>
-              <a:spcBef>
-                <a:spcPts val="0"/>
-              </a:spcBef>
-              <a:spcAft>
-                <a:spcPts val="0"/>
-              </a:spcAft>
-              <a:buFont typeface="+mj-lt"/>
-              <a:buAutoNum type="arabicParenR"/>
-            </a:pPr>
-            <a:r>
-              <a:rPr lang="ru-RU" sz="2400" dirty="0">
-                <a:solidFill>
-                  <a:schemeClr val="tx1"/>
-                </a:solidFill>
-                <a:effectLst/>
-                <a:latin typeface="Times New Roman" panose="02020603050405020304" pitchFamily="18" charset="0"/>
-                <a:ea typeface="Calibri" panose="020F0502020204030204" pitchFamily="34" charset="0"/>
-                <a:cs typeface="Times New Roman" panose="02020603050405020304" pitchFamily="18" charset="0"/>
-              </a:rPr>
-              <a:t>Сбор исходных данных для разработки проектной документации;</a:t>
-            </a:r>
-          </a:p>
-          <a:p>
-            <a:pPr marL="0" lvl="0" indent="450000" algn="just">
-              <a:lnSpc>
-                <a:spcPct val="150000"/>
-              </a:lnSpc>
-              <a:spcBef>
-                <a:spcPts val="0"/>
-              </a:spcBef>
-              <a:spcAft>
-                <a:spcPts val="0"/>
-              </a:spcAft>
-              <a:buFont typeface="+mj-lt"/>
-              <a:buAutoNum type="arabicParenR"/>
-            </a:pPr>
-            <a:r>
-              <a:rPr lang="ru-RU" sz="2400" dirty="0">
-                <a:solidFill>
-                  <a:schemeClr val="tx1"/>
-                </a:solidFill>
-                <a:latin typeface="Times New Roman" panose="02020603050405020304" pitchFamily="18" charset="0"/>
-                <a:ea typeface="Calibri" panose="020F0502020204030204" pitchFamily="34" charset="0"/>
-                <a:cs typeface="Times New Roman" panose="02020603050405020304" pitchFamily="18" charset="0"/>
-              </a:rPr>
-              <a:t>Разработка проектной документации в соответствии с требованиями заказчика</a:t>
-            </a:r>
-            <a:r>
-              <a:rPr lang="ru-RU" sz="2400" dirty="0">
-                <a:solidFill>
-                  <a:schemeClr val="tx1"/>
-                </a:solidFill>
-                <a:effectLst/>
-                <a:latin typeface="Times New Roman" panose="02020603050405020304" pitchFamily="18" charset="0"/>
-                <a:ea typeface="Calibri" panose="020F0502020204030204" pitchFamily="34" charset="0"/>
-                <a:cs typeface="Times New Roman" panose="02020603050405020304" pitchFamily="18" charset="0"/>
-              </a:rPr>
-              <a:t>;</a:t>
-            </a:r>
-          </a:p>
-          <a:p>
-            <a:pPr marL="0" lvl="0" indent="450000" algn="just">
-              <a:lnSpc>
-                <a:spcPct val="150000"/>
-              </a:lnSpc>
-              <a:spcBef>
-                <a:spcPts val="0"/>
-              </a:spcBef>
-              <a:spcAft>
-                <a:spcPts val="0"/>
-              </a:spcAft>
-              <a:buFont typeface="+mj-lt"/>
-              <a:buAutoNum type="arabicParenR"/>
-            </a:pPr>
-            <a:r>
-              <a:rPr lang="ru-RU" sz="2400" dirty="0">
-                <a:solidFill>
-                  <a:schemeClr val="tx1"/>
-                </a:solidFill>
-                <a:latin typeface="Times New Roman" panose="02020603050405020304" pitchFamily="18" charset="0"/>
-                <a:ea typeface="Calibri" panose="020F0502020204030204" pitchFamily="34" charset="0"/>
-                <a:cs typeface="Times New Roman" panose="02020603050405020304" pitchFamily="18" charset="0"/>
-              </a:rPr>
-              <a:t>Разработка проектной документации в соответствии с ТЗ</a:t>
-            </a:r>
-            <a:r>
-              <a:rPr lang="ru-RU" sz="2400" dirty="0">
-                <a:solidFill>
-                  <a:schemeClr val="tx1"/>
-                </a:solidFill>
-                <a:effectLst/>
-                <a:latin typeface="Times New Roman" panose="02020603050405020304" pitchFamily="18" charset="0"/>
-                <a:ea typeface="Calibri" panose="020F0502020204030204" pitchFamily="34" charset="0"/>
-                <a:cs typeface="Times New Roman" panose="02020603050405020304" pitchFamily="18" charset="0"/>
-              </a:rPr>
-              <a:t>;</a:t>
-            </a:r>
-          </a:p>
-          <a:p>
-            <a:pPr marL="0" lvl="0" indent="450000" algn="just">
-              <a:lnSpc>
-                <a:spcPct val="150000"/>
-              </a:lnSpc>
-              <a:spcBef>
-                <a:spcPts val="0"/>
-              </a:spcBef>
-              <a:spcAft>
-                <a:spcPts val="0"/>
-              </a:spcAft>
-              <a:buFont typeface="+mj-lt"/>
-              <a:buAutoNum type="arabicParenR"/>
-            </a:pPr>
-            <a:r>
-              <a:rPr lang="ru-RU" sz="2400" dirty="0">
-                <a:solidFill>
-                  <a:schemeClr val="tx1"/>
-                </a:solidFill>
-                <a:latin typeface="Times New Roman" panose="02020603050405020304" pitchFamily="18" charset="0"/>
-                <a:ea typeface="Calibri" panose="020F0502020204030204" pitchFamily="34" charset="0"/>
-                <a:cs typeface="Times New Roman" panose="02020603050405020304" pitchFamily="18" charset="0"/>
-              </a:rPr>
-              <a:t>Разработка модулей в соответствии с ТЗ</a:t>
-            </a:r>
-            <a:r>
-              <a:rPr lang="ru-RU" sz="2400" dirty="0">
-                <a:solidFill>
-                  <a:schemeClr val="tx1"/>
-                </a:solidFill>
-                <a:effectLst/>
-                <a:latin typeface="Times New Roman" panose="02020603050405020304" pitchFamily="18" charset="0"/>
-                <a:ea typeface="Calibri" panose="020F0502020204030204" pitchFamily="34" charset="0"/>
-                <a:cs typeface="Times New Roman" panose="02020603050405020304" pitchFamily="18" charset="0"/>
-              </a:rPr>
-              <a:t>;</a:t>
-            </a:r>
-          </a:p>
-          <a:p>
-            <a:pPr marL="0" lvl="0" indent="450000" algn="just">
-              <a:lnSpc>
-                <a:spcPct val="150000"/>
-              </a:lnSpc>
-              <a:spcBef>
-                <a:spcPts val="0"/>
-              </a:spcBef>
-              <a:spcAft>
-                <a:spcPts val="0"/>
-              </a:spcAft>
-              <a:buFont typeface="+mj-lt"/>
-              <a:buAutoNum type="arabicParenR"/>
-            </a:pPr>
-            <a:r>
-              <a:rPr lang="ru-RU" sz="2400" dirty="0">
-                <a:solidFill>
-                  <a:schemeClr val="tx1"/>
-                </a:solidFill>
-                <a:effectLst/>
-                <a:latin typeface="Times New Roman" panose="02020603050405020304" pitchFamily="18" charset="0"/>
-                <a:ea typeface="Calibri" panose="020F0502020204030204" pitchFamily="34" charset="0"/>
-                <a:cs typeface="Times New Roman" panose="02020603050405020304" pitchFamily="18" charset="0"/>
-              </a:rPr>
-              <a:t>Тестирование ИС на этапе опытной эксплуатации;</a:t>
-            </a:r>
-          </a:p>
-          <a:p>
-            <a:pPr marL="0" lvl="0" indent="450000" algn="just">
-              <a:lnSpc>
-                <a:spcPct val="150000"/>
-              </a:lnSpc>
-              <a:spcBef>
-                <a:spcPts val="0"/>
-              </a:spcBef>
-              <a:spcAft>
-                <a:spcPts val="0"/>
-              </a:spcAft>
-              <a:buFont typeface="+mj-lt"/>
-              <a:buAutoNum type="arabicParenR"/>
-            </a:pPr>
-            <a:r>
-              <a:rPr lang="ru-RU" sz="2400" dirty="0">
-                <a:solidFill>
-                  <a:schemeClr val="tx1"/>
-                </a:solidFill>
-                <a:effectLst/>
-                <a:latin typeface="Times New Roman" panose="02020603050405020304" pitchFamily="18" charset="0"/>
-                <a:ea typeface="Calibri" panose="020F0502020204030204" pitchFamily="34" charset="0"/>
-                <a:cs typeface="Times New Roman" panose="02020603050405020304" pitchFamily="18" charset="0"/>
-              </a:rPr>
-              <a:t>Разработка технической документации на эксплуатацию ИС;</a:t>
-            </a:r>
-          </a:p>
-          <a:p>
-            <a:pPr marL="0" lvl="0" indent="450000" algn="just">
-              <a:lnSpc>
-                <a:spcPct val="150000"/>
-              </a:lnSpc>
-              <a:spcBef>
-                <a:spcPts val="0"/>
-              </a:spcBef>
-              <a:spcAft>
-                <a:spcPts val="0"/>
-              </a:spcAft>
-              <a:buFont typeface="+mj-lt"/>
-              <a:buAutoNum type="arabicParenR"/>
-            </a:pPr>
-            <a:r>
-              <a:rPr lang="ru-RU" sz="2400" dirty="0">
-                <a:solidFill>
-                  <a:schemeClr val="tx1"/>
-                </a:solidFill>
-                <a:effectLst/>
-                <a:latin typeface="Times New Roman" panose="02020603050405020304" pitchFamily="18" charset="0"/>
-                <a:ea typeface="Calibri" panose="020F0502020204030204" pitchFamily="34" charset="0"/>
-                <a:cs typeface="Times New Roman" panose="02020603050405020304" pitchFamily="18" charset="0"/>
-              </a:rPr>
-              <a:t>Оценка ИС.</a:t>
-            </a:r>
-            <a:endParaRPr lang="en-US" sz="2400" dirty="0">
-              <a:solidFill>
-                <a:schemeClr val="tx1"/>
-              </a:solidFill>
-              <a:effectLst/>
-              <a:latin typeface="Times New Roman" panose="02020603050405020304" pitchFamily="18" charset="0"/>
-              <a:ea typeface="Calibri" panose="020F0502020204030204" pitchFamily="34" charset="0"/>
-              <a:cs typeface="Times New Roman" panose="02020603050405020304" pitchFamily="18" charset="0"/>
-            </a:endParaRPr>
-          </a:p>
-        </p:txBody>
-      </p:sp>
-    </p:spTree>
-    <p:extLst>
-      <p:ext uri="{BB962C8B-B14F-4D97-AF65-F5344CB8AC3E}">
-        <p14:creationId xmlns:p14="http://schemas.microsoft.com/office/powerpoint/2010/main" val="56205481"/>
-      </p:ext>
-    </p:extLst>
-  </p:cSld>
-  <p:clrMapOvr>
-    <a:masterClrMapping/>
-  </p:clrMapOvr>
-</p:sld>
-</file>
-
-<file path=ppt/slides/slide5.xml><?xml version="1.0" encoding="utf-8"?>
-<p:sld xmlns:a="http://schemas.openxmlformats.org/drawingml/2006/main" xmlns:r="http://schemas.openxmlformats.org/officeDocument/2006/relationships" xmlns:p="http://schemas.openxmlformats.org/presentationml/2006/main">
-  <p:cSld>
-    <p:spTree>
-      <p:nvGrpSpPr>
-        <p:cNvPr id="1" name="">
-          <a:extLst>
-            <a:ext uri="{FF2B5EF4-FFF2-40B4-BE49-F238E27FC236}">
-              <a16:creationId xmlns:a16="http://schemas.microsoft.com/office/drawing/2014/main" id="{6325205F-7F12-B5B2-7350-B4DEA2714737}"/>
-            </a:ext>
-          </a:extLst>
-        </p:cNvPr>
-        <p:cNvGrpSpPr/>
-        <p:nvPr/>
-      </p:nvGrpSpPr>
-      <p:grpSpPr>
-        <a:xfrm>
-          <a:off x="0" y="0"/>
-          <a:ext cx="0" cy="0"/>
-          <a:chOff x="0" y="0"/>
-          <a:chExt cx="0" cy="0"/>
-        </a:xfrm>
-      </p:grpSpPr>
-      <p:sp>
-        <p:nvSpPr>
-          <p:cNvPr id="2" name="Заголовок 1">
-            <a:extLst>
-              <a:ext uri="{FF2B5EF4-FFF2-40B4-BE49-F238E27FC236}">
-                <a16:creationId xmlns:a16="http://schemas.microsoft.com/office/drawing/2014/main" id="{AB1C46FF-5495-04A9-30DD-9BD7413AAADF}"/>
-              </a:ext>
-            </a:extLst>
-          </p:cNvPr>
-          <p:cNvSpPr>
-            <a:spLocks noGrp="1"/>
-          </p:cNvSpPr>
-          <p:nvPr>
-            <p:ph type="title"/>
-          </p:nvPr>
-        </p:nvSpPr>
-        <p:spPr>
-          <a:xfrm>
-            <a:off x="1097280" y="355601"/>
-            <a:ext cx="10058400" cy="1127759"/>
-          </a:xfrm>
-        </p:spPr>
-        <p:txBody>
-          <a:bodyPr>
-            <a:noAutofit/>
-          </a:bodyPr>
-          <a:lstStyle/>
-          <a:p>
-            <a:pPr algn="ctr">
-              <a:lnSpc>
-                <a:spcPct val="150000"/>
-              </a:lnSpc>
-            </a:pPr>
-            <a:r>
-              <a:rPr lang="ru-RU" sz="3600" dirty="0">
-                <a:solidFill>
-                  <a:schemeClr val="tx1"/>
-                </a:solidFill>
-                <a:effectLst/>
-                <a:latin typeface="Times New Roman" panose="02020603050405020304" pitchFamily="18" charset="0"/>
-                <a:ea typeface="Calibri" panose="020F0502020204030204" pitchFamily="34" charset="0"/>
-                <a:cs typeface="Times New Roman" panose="02020603050405020304" pitchFamily="18" charset="0"/>
-              </a:rPr>
-              <a:t>ПМ 06 </a:t>
-            </a:r>
-            <a:r>
-              <a:rPr lang="ru-RU" sz="3600" dirty="0">
-                <a:solidFill>
-                  <a:schemeClr val="tx1"/>
-                </a:solidFill>
-                <a:latin typeface="Times New Roman" panose="02020603050405020304" pitchFamily="18" charset="0"/>
-                <a:ea typeface="Calibri" panose="020F0502020204030204" pitchFamily="34" charset="0"/>
-                <a:cs typeface="Times New Roman" panose="02020603050405020304" pitchFamily="18" charset="0"/>
-              </a:rPr>
-              <a:t>Сопровождение информационных систем</a:t>
-            </a:r>
-            <a:endParaRPr lang="ru-RU" sz="7200" dirty="0">
-              <a:solidFill>
-                <a:schemeClr val="tx1"/>
-              </a:solidFill>
-              <a:latin typeface="Times New Roman" panose="02020603050405020304" pitchFamily="18" charset="0"/>
-              <a:cs typeface="Times New Roman" panose="02020603050405020304" pitchFamily="18" charset="0"/>
-            </a:endParaRPr>
-          </a:p>
-        </p:txBody>
-      </p:sp>
-      <p:sp>
-        <p:nvSpPr>
-          <p:cNvPr id="5" name="Объект 4">
-            <a:extLst>
-              <a:ext uri="{FF2B5EF4-FFF2-40B4-BE49-F238E27FC236}">
-                <a16:creationId xmlns:a16="http://schemas.microsoft.com/office/drawing/2014/main" id="{9CBADBF7-ED5C-F908-C83B-F702FFBB7F14}"/>
-              </a:ext>
-            </a:extLst>
-          </p:cNvPr>
-          <p:cNvSpPr>
-            <a:spLocks noGrp="1"/>
-          </p:cNvSpPr>
-          <p:nvPr>
-            <p:ph idx="1"/>
-          </p:nvPr>
-        </p:nvSpPr>
-        <p:spPr>
-          <a:xfrm>
-            <a:off x="1097280" y="1950720"/>
-            <a:ext cx="10058400" cy="4206240"/>
-          </a:xfrm>
-        </p:spPr>
-        <p:txBody>
-          <a:bodyPr>
-            <a:normAutofit/>
-          </a:bodyPr>
-          <a:lstStyle/>
-          <a:p>
-            <a:pPr marL="0" lvl="0" indent="450000" algn="just">
-              <a:lnSpc>
-                <a:spcPct val="150000"/>
-              </a:lnSpc>
-              <a:spcBef>
-                <a:spcPts val="0"/>
-              </a:spcBef>
-              <a:spcAft>
-                <a:spcPts val="0"/>
-              </a:spcAft>
-              <a:buFont typeface="+mj-lt"/>
-              <a:buAutoNum type="arabicParenR"/>
-            </a:pPr>
-            <a:r>
-              <a:rPr lang="ru-RU" sz="2600" dirty="0">
-                <a:solidFill>
-                  <a:schemeClr val="tx1"/>
-                </a:solidFill>
-                <a:effectLst/>
-                <a:latin typeface="Times New Roman" panose="02020603050405020304" pitchFamily="18" charset="0"/>
-                <a:ea typeface="Calibri" panose="020F0502020204030204" pitchFamily="34" charset="0"/>
-                <a:cs typeface="Times New Roman" panose="02020603050405020304" pitchFamily="18" charset="0"/>
-              </a:rPr>
-              <a:t>Разработка ТЗ на сопровождение ИС;</a:t>
-            </a:r>
-          </a:p>
-          <a:p>
-            <a:pPr marL="0" lvl="0" indent="450000" algn="just">
-              <a:lnSpc>
-                <a:spcPct val="150000"/>
-              </a:lnSpc>
-              <a:spcBef>
-                <a:spcPts val="0"/>
-              </a:spcBef>
-              <a:spcAft>
-                <a:spcPts val="0"/>
-              </a:spcAft>
-              <a:buFont typeface="+mj-lt"/>
-              <a:buAutoNum type="arabicParenR"/>
-            </a:pPr>
-            <a:r>
-              <a:rPr lang="ru-RU" sz="2600" dirty="0">
-                <a:solidFill>
-                  <a:schemeClr val="tx1"/>
-                </a:solidFill>
-                <a:latin typeface="Times New Roman" panose="02020603050405020304" pitchFamily="18" charset="0"/>
-                <a:ea typeface="Calibri" panose="020F0502020204030204" pitchFamily="34" charset="0"/>
-                <a:cs typeface="Times New Roman" panose="02020603050405020304" pitchFamily="18" charset="0"/>
-              </a:rPr>
-              <a:t>Исправление ошибок в программном коде</a:t>
-            </a:r>
-            <a:r>
-              <a:rPr lang="ru-RU" sz="2600" dirty="0">
-                <a:solidFill>
-                  <a:schemeClr val="tx1"/>
-                </a:solidFill>
-                <a:effectLst/>
-                <a:latin typeface="Times New Roman" panose="02020603050405020304" pitchFamily="18" charset="0"/>
-                <a:ea typeface="Calibri" panose="020F0502020204030204" pitchFamily="34" charset="0"/>
-                <a:cs typeface="Times New Roman" panose="02020603050405020304" pitchFamily="18" charset="0"/>
-              </a:rPr>
-              <a:t>;</a:t>
-            </a:r>
-          </a:p>
-          <a:p>
-            <a:pPr marL="0" lvl="0" indent="450000" algn="just">
-              <a:lnSpc>
-                <a:spcPct val="150000"/>
-              </a:lnSpc>
-              <a:spcBef>
-                <a:spcPts val="0"/>
-              </a:spcBef>
-              <a:spcAft>
-                <a:spcPts val="0"/>
-              </a:spcAft>
-              <a:buFont typeface="+mj-lt"/>
-              <a:buAutoNum type="arabicParenR"/>
-            </a:pPr>
-            <a:r>
-              <a:rPr lang="ru-RU" sz="2600" dirty="0">
-                <a:solidFill>
-                  <a:schemeClr val="tx1"/>
-                </a:solidFill>
-                <a:latin typeface="Times New Roman" panose="02020603050405020304" pitchFamily="18" charset="0"/>
-                <a:ea typeface="Calibri" panose="020F0502020204030204" pitchFamily="34" charset="0"/>
-                <a:cs typeface="Times New Roman" panose="02020603050405020304" pitchFamily="18" charset="0"/>
-              </a:rPr>
-              <a:t>Разработка обучающей документации</a:t>
-            </a:r>
-            <a:r>
-              <a:rPr lang="ru-RU" sz="2600" dirty="0">
-                <a:solidFill>
-                  <a:schemeClr val="tx1"/>
-                </a:solidFill>
-                <a:effectLst/>
-                <a:latin typeface="Times New Roman" panose="02020603050405020304" pitchFamily="18" charset="0"/>
-                <a:ea typeface="Calibri" panose="020F0502020204030204" pitchFamily="34" charset="0"/>
-                <a:cs typeface="Times New Roman" panose="02020603050405020304" pitchFamily="18" charset="0"/>
-              </a:rPr>
-              <a:t>;</a:t>
-            </a:r>
-          </a:p>
-          <a:p>
-            <a:pPr marL="0" lvl="0" indent="450000" algn="just">
-              <a:lnSpc>
-                <a:spcPct val="150000"/>
-              </a:lnSpc>
-              <a:spcBef>
-                <a:spcPts val="0"/>
-              </a:spcBef>
-              <a:spcAft>
-                <a:spcPts val="0"/>
-              </a:spcAft>
-              <a:buFont typeface="+mj-lt"/>
-              <a:buAutoNum type="arabicParenR"/>
-            </a:pPr>
-            <a:r>
-              <a:rPr lang="ru-RU" sz="2600" dirty="0">
-                <a:solidFill>
-                  <a:schemeClr val="tx1"/>
-                </a:solidFill>
-                <a:latin typeface="Times New Roman" panose="02020603050405020304" pitchFamily="18" charset="0"/>
-                <a:ea typeface="Calibri" panose="020F0502020204030204" pitchFamily="34" charset="0"/>
-                <a:cs typeface="Times New Roman" panose="02020603050405020304" pitchFamily="18" charset="0"/>
-              </a:rPr>
-              <a:t>Оценка функционирования ИС в соответствии с ТЗ;</a:t>
-            </a:r>
-          </a:p>
-          <a:p>
-            <a:pPr marL="0" lvl="0" indent="450000" algn="just">
-              <a:lnSpc>
-                <a:spcPct val="150000"/>
-              </a:lnSpc>
-              <a:spcBef>
-                <a:spcPts val="0"/>
-              </a:spcBef>
-              <a:spcAft>
-                <a:spcPts val="0"/>
-              </a:spcAft>
-              <a:buFont typeface="+mj-lt"/>
-              <a:buAutoNum type="arabicParenR"/>
-            </a:pPr>
-            <a:r>
-              <a:rPr lang="ru-RU" sz="2600" dirty="0">
-                <a:solidFill>
-                  <a:schemeClr val="tx1"/>
-                </a:solidFill>
-                <a:latin typeface="Times New Roman" panose="02020603050405020304" pitchFamily="18" charset="0"/>
-                <a:ea typeface="Calibri" panose="020F0502020204030204" pitchFamily="34" charset="0"/>
-                <a:cs typeface="Times New Roman" panose="02020603050405020304" pitchFamily="18" charset="0"/>
-              </a:rPr>
-              <a:t>Т</a:t>
-            </a:r>
-            <a:r>
-              <a:rPr lang="ru-RU" sz="2600" dirty="0">
-                <a:solidFill>
-                  <a:schemeClr val="tx1"/>
-                </a:solidFill>
-                <a:effectLst/>
-                <a:latin typeface="Times New Roman" panose="02020603050405020304" pitchFamily="18" charset="0"/>
-                <a:ea typeface="Calibri" panose="020F0502020204030204" pitchFamily="34" charset="0"/>
-                <a:cs typeface="Times New Roman" panose="02020603050405020304" pitchFamily="18" charset="0"/>
-              </a:rPr>
-              <a:t>ехническое сопровождение ИС </a:t>
-            </a:r>
-            <a:r>
-              <a:rPr lang="ru-RU" sz="2600" dirty="0">
-                <a:solidFill>
-                  <a:schemeClr val="tx1"/>
-                </a:solidFill>
-                <a:latin typeface="Times New Roman" panose="02020603050405020304" pitchFamily="18" charset="0"/>
-                <a:ea typeface="Calibri" panose="020F0502020204030204" pitchFamily="34" charset="0"/>
-                <a:cs typeface="Times New Roman" panose="02020603050405020304" pitchFamily="18" charset="0"/>
-              </a:rPr>
-              <a:t>в соответствии с ТЗ.</a:t>
-            </a:r>
-            <a:endParaRPr lang="ru-RU" sz="2600" dirty="0">
-              <a:solidFill>
-                <a:schemeClr val="tx1"/>
-              </a:solidFill>
-              <a:effectLst/>
-              <a:latin typeface="Times New Roman" panose="02020603050405020304" pitchFamily="18" charset="0"/>
-              <a:ea typeface="Calibri" panose="020F0502020204030204" pitchFamily="34" charset="0"/>
-              <a:cs typeface="Times New Roman" panose="02020603050405020304" pitchFamily="18" charset="0"/>
-            </a:endParaRPr>
-          </a:p>
-        </p:txBody>
-      </p:sp>
-    </p:spTree>
-    <p:extLst>
-      <p:ext uri="{BB962C8B-B14F-4D97-AF65-F5344CB8AC3E}">
-        <p14:creationId xmlns:p14="http://schemas.microsoft.com/office/powerpoint/2010/main" val="3548550908"/>
-      </p:ext>
-    </p:extLst>
-  </p:cSld>
-  <p:clrMapOvr>
-    <a:masterClrMapping/>
-  </p:clrMapOvr>
-</p:sld>
-</file>
-
-<file path=ppt/slides/slide6.xml><?xml version="1.0" encoding="utf-8"?>
-<p:sld xmlns:a="http://schemas.openxmlformats.org/drawingml/2006/main" xmlns:r="http://schemas.openxmlformats.org/officeDocument/2006/relationships" xmlns:p="http://schemas.openxmlformats.org/presentationml/2006/main">
-  <p:cSld>
-    <p:spTree>
-      <p:nvGrpSpPr>
-        <p:cNvPr id="1" name="">
-          <a:extLst>
-            <a:ext uri="{FF2B5EF4-FFF2-40B4-BE49-F238E27FC236}">
-              <a16:creationId xmlns:a16="http://schemas.microsoft.com/office/drawing/2014/main" id="{2CD31542-CB29-1EB2-E6F3-08FE48F2B7C4}"/>
-            </a:ext>
-          </a:extLst>
-        </p:cNvPr>
-        <p:cNvGrpSpPr/>
-        <p:nvPr/>
-      </p:nvGrpSpPr>
-      <p:grpSpPr>
-        <a:xfrm>
-          <a:off x="0" y="0"/>
-          <a:ext cx="0" cy="0"/>
-          <a:chOff x="0" y="0"/>
-          <a:chExt cx="0" cy="0"/>
-        </a:xfrm>
-      </p:grpSpPr>
-      <p:sp>
-        <p:nvSpPr>
-          <p:cNvPr id="2" name="Заголовок 1">
-            <a:extLst>
-              <a:ext uri="{FF2B5EF4-FFF2-40B4-BE49-F238E27FC236}">
-                <a16:creationId xmlns:a16="http://schemas.microsoft.com/office/drawing/2014/main" id="{2DD78BE8-631B-5C3E-3D2F-BC2F362C5E19}"/>
-              </a:ext>
-            </a:extLst>
-          </p:cNvPr>
-          <p:cNvSpPr>
-            <a:spLocks noGrp="1"/>
-          </p:cNvSpPr>
-          <p:nvPr>
-            <p:ph type="title"/>
-          </p:nvPr>
-        </p:nvSpPr>
-        <p:spPr>
-          <a:xfrm>
-            <a:off x="980440" y="304799"/>
-            <a:ext cx="10292080" cy="1158241"/>
-          </a:xfrm>
-        </p:spPr>
-        <p:txBody>
-          <a:bodyPr>
-            <a:noAutofit/>
-          </a:bodyPr>
-          <a:lstStyle/>
-          <a:p>
-            <a:pPr algn="ctr">
-              <a:lnSpc>
-                <a:spcPct val="150000"/>
-              </a:lnSpc>
-            </a:pPr>
-            <a:r>
-              <a:rPr lang="ru-RU" sz="3600" dirty="0">
-                <a:solidFill>
-                  <a:schemeClr val="tx1"/>
-                </a:solidFill>
-                <a:effectLst/>
-                <a:latin typeface="Times New Roman" panose="02020603050405020304" pitchFamily="18" charset="0"/>
-                <a:ea typeface="Calibri" panose="020F0502020204030204" pitchFamily="34" charset="0"/>
-                <a:cs typeface="Times New Roman" panose="02020603050405020304" pitchFamily="18" charset="0"/>
-              </a:rPr>
-              <a:t>ПМ 07 </a:t>
-            </a:r>
-            <a:r>
-              <a:rPr lang="ru-RU" sz="3600" dirty="0">
-                <a:solidFill>
-                  <a:schemeClr val="tx1"/>
-                </a:solidFill>
-                <a:latin typeface="Times New Roman" panose="02020603050405020304" pitchFamily="18" charset="0"/>
-                <a:ea typeface="Calibri" panose="020F0502020204030204" pitchFamily="34" charset="0"/>
-                <a:cs typeface="Times New Roman" panose="02020603050405020304" pitchFamily="18" charset="0"/>
-              </a:rPr>
-              <a:t>Соадминистрирование баз данных и серверов</a:t>
-            </a:r>
-            <a:endParaRPr lang="ru-RU" sz="7200" dirty="0">
-              <a:solidFill>
-                <a:schemeClr val="tx1"/>
-              </a:solidFill>
-              <a:latin typeface="Times New Roman" panose="02020603050405020304" pitchFamily="18" charset="0"/>
-              <a:cs typeface="Times New Roman" panose="02020603050405020304" pitchFamily="18" charset="0"/>
-            </a:endParaRPr>
-          </a:p>
-        </p:txBody>
-      </p:sp>
-      <p:sp>
-        <p:nvSpPr>
-          <p:cNvPr id="5" name="Объект 4">
-            <a:extLst>
-              <a:ext uri="{FF2B5EF4-FFF2-40B4-BE49-F238E27FC236}">
-                <a16:creationId xmlns:a16="http://schemas.microsoft.com/office/drawing/2014/main" id="{E18BEAE1-066E-F85E-9866-B82C98651810}"/>
-              </a:ext>
-            </a:extLst>
-          </p:cNvPr>
-          <p:cNvSpPr>
-            <a:spLocks noGrp="1"/>
-          </p:cNvSpPr>
-          <p:nvPr>
-            <p:ph idx="1"/>
-          </p:nvPr>
-        </p:nvSpPr>
-        <p:spPr>
-          <a:xfrm>
-            <a:off x="1097280" y="1950720"/>
-            <a:ext cx="10058400" cy="4206240"/>
-          </a:xfrm>
-        </p:spPr>
-        <p:txBody>
-          <a:bodyPr>
-            <a:normAutofit/>
-          </a:bodyPr>
-          <a:lstStyle/>
-          <a:p>
-            <a:pPr marL="0" lvl="0" indent="450000" algn="just">
-              <a:lnSpc>
-                <a:spcPct val="150000"/>
-              </a:lnSpc>
-              <a:spcBef>
-                <a:spcPts val="0"/>
-              </a:spcBef>
-              <a:spcAft>
-                <a:spcPts val="0"/>
-              </a:spcAft>
-              <a:buFont typeface="+mj-lt"/>
-              <a:buAutoNum type="arabicParenR"/>
-            </a:pPr>
-            <a:r>
-              <a:rPr lang="ru-RU" sz="2600" dirty="0">
-                <a:solidFill>
-                  <a:schemeClr val="tx1"/>
-                </a:solidFill>
-                <a:effectLst/>
-                <a:latin typeface="Times New Roman" panose="02020603050405020304" pitchFamily="18" charset="0"/>
-                <a:ea typeface="Calibri" panose="020F0502020204030204" pitchFamily="34" charset="0"/>
-                <a:cs typeface="Times New Roman" panose="02020603050405020304" pitchFamily="18" charset="0"/>
-              </a:rPr>
-              <a:t>Выявление технических проблем при эксплуатации;</a:t>
-            </a:r>
-          </a:p>
-          <a:p>
-            <a:pPr marL="0" lvl="0" indent="450000" algn="just">
-              <a:lnSpc>
-                <a:spcPct val="150000"/>
-              </a:lnSpc>
-              <a:spcBef>
-                <a:spcPts val="0"/>
-              </a:spcBef>
-              <a:spcAft>
-                <a:spcPts val="0"/>
-              </a:spcAft>
-              <a:buFont typeface="+mj-lt"/>
-              <a:buAutoNum type="arabicParenR"/>
-            </a:pPr>
-            <a:r>
-              <a:rPr lang="ru-RU" sz="2600" dirty="0">
-                <a:solidFill>
-                  <a:schemeClr val="tx1"/>
-                </a:solidFill>
-                <a:latin typeface="Times New Roman" panose="02020603050405020304" pitchFamily="18" charset="0"/>
-                <a:ea typeface="Calibri" panose="020F0502020204030204" pitchFamily="34" charset="0"/>
-                <a:cs typeface="Times New Roman" panose="02020603050405020304" pitchFamily="18" charset="0"/>
-              </a:rPr>
-              <a:t>Администрирование отдельных компонент серверов</a:t>
-            </a:r>
-            <a:r>
-              <a:rPr lang="ru-RU" sz="2600" dirty="0">
-                <a:solidFill>
-                  <a:schemeClr val="tx1"/>
-                </a:solidFill>
-                <a:effectLst/>
-                <a:latin typeface="Times New Roman" panose="02020603050405020304" pitchFamily="18" charset="0"/>
-                <a:ea typeface="Calibri" panose="020F0502020204030204" pitchFamily="34" charset="0"/>
-                <a:cs typeface="Times New Roman" panose="02020603050405020304" pitchFamily="18" charset="0"/>
-              </a:rPr>
-              <a:t>;</a:t>
-            </a:r>
-          </a:p>
-          <a:p>
-            <a:pPr marL="0" lvl="0" indent="450000" algn="just">
-              <a:lnSpc>
-                <a:spcPct val="150000"/>
-              </a:lnSpc>
-              <a:spcBef>
-                <a:spcPts val="0"/>
-              </a:spcBef>
-              <a:spcAft>
-                <a:spcPts val="0"/>
-              </a:spcAft>
-              <a:buFont typeface="+mj-lt"/>
-              <a:buAutoNum type="arabicParenR"/>
-            </a:pPr>
-            <a:r>
-              <a:rPr lang="ru-RU" sz="2600" dirty="0">
-                <a:solidFill>
-                  <a:schemeClr val="tx1"/>
-                </a:solidFill>
-                <a:latin typeface="Times New Roman" panose="02020603050405020304" pitchFamily="18" charset="0"/>
-                <a:ea typeface="Calibri" panose="020F0502020204030204" pitchFamily="34" charset="0"/>
-                <a:cs typeface="Times New Roman" panose="02020603050405020304" pitchFamily="18" charset="0"/>
-              </a:rPr>
-              <a:t>Формирование требований к конфигурации локальных компьютерных сетей и серверного оборудования</a:t>
-            </a:r>
-            <a:r>
-              <a:rPr lang="ru-RU" sz="2600" dirty="0">
-                <a:solidFill>
-                  <a:schemeClr val="tx1"/>
-                </a:solidFill>
-                <a:effectLst/>
-                <a:latin typeface="Times New Roman" panose="02020603050405020304" pitchFamily="18" charset="0"/>
-                <a:ea typeface="Calibri" panose="020F0502020204030204" pitchFamily="34" charset="0"/>
-                <a:cs typeface="Times New Roman" panose="02020603050405020304" pitchFamily="18" charset="0"/>
-              </a:rPr>
-              <a:t>;</a:t>
-            </a:r>
-          </a:p>
-          <a:p>
-            <a:pPr marL="0" lvl="0" indent="450000" algn="just">
-              <a:lnSpc>
-                <a:spcPct val="150000"/>
-              </a:lnSpc>
-              <a:spcBef>
-                <a:spcPts val="0"/>
-              </a:spcBef>
-              <a:spcAft>
-                <a:spcPts val="0"/>
-              </a:spcAft>
-              <a:buFont typeface="+mj-lt"/>
-              <a:buAutoNum type="arabicParenR"/>
-            </a:pPr>
-            <a:r>
-              <a:rPr lang="ru-RU" sz="2600" dirty="0">
-                <a:solidFill>
-                  <a:schemeClr val="tx1"/>
-                </a:solidFill>
-                <a:latin typeface="Times New Roman" panose="02020603050405020304" pitchFamily="18" charset="0"/>
-                <a:ea typeface="Calibri" panose="020F0502020204030204" pitchFamily="34" charset="0"/>
-                <a:cs typeface="Times New Roman" panose="02020603050405020304" pitchFamily="18" charset="0"/>
-              </a:rPr>
-              <a:t>Администрирование баз данных;</a:t>
-            </a:r>
-          </a:p>
-          <a:p>
-            <a:pPr marL="0" lvl="0" indent="450000" algn="just">
-              <a:lnSpc>
-                <a:spcPct val="150000"/>
-              </a:lnSpc>
-              <a:spcBef>
-                <a:spcPts val="0"/>
-              </a:spcBef>
-              <a:spcAft>
-                <a:spcPts val="0"/>
-              </a:spcAft>
-              <a:buFont typeface="+mj-lt"/>
-              <a:buAutoNum type="arabicParenR"/>
-            </a:pPr>
-            <a:r>
-              <a:rPr lang="ru-RU" sz="2600" dirty="0">
-                <a:solidFill>
-                  <a:schemeClr val="tx1"/>
-                </a:solidFill>
-                <a:latin typeface="Times New Roman" panose="02020603050405020304" pitchFamily="18" charset="0"/>
-                <a:ea typeface="Calibri" panose="020F0502020204030204" pitchFamily="34" charset="0"/>
-                <a:cs typeface="Times New Roman" panose="02020603050405020304" pitchFamily="18" charset="0"/>
-              </a:rPr>
-              <a:t>Аудит систем безопасности баз данных и серверов.</a:t>
-            </a:r>
-            <a:endParaRPr lang="ru-RU" sz="2600" dirty="0">
-              <a:solidFill>
-                <a:schemeClr val="tx1"/>
-              </a:solidFill>
-              <a:effectLst/>
-              <a:latin typeface="Times New Roman" panose="02020603050405020304" pitchFamily="18" charset="0"/>
-              <a:ea typeface="Calibri" panose="020F0502020204030204" pitchFamily="34" charset="0"/>
-              <a:cs typeface="Times New Roman" panose="02020603050405020304" pitchFamily="18" charset="0"/>
-            </a:endParaRPr>
-          </a:p>
-        </p:txBody>
-      </p:sp>
-    </p:spTree>
-    <p:extLst>
-      <p:ext uri="{BB962C8B-B14F-4D97-AF65-F5344CB8AC3E}">
-        <p14:creationId xmlns:p14="http://schemas.microsoft.com/office/powerpoint/2010/main" val="2486649776"/>
-      </p:ext>
-    </p:extLst>
-  </p:cSld>
-  <p:clrMapOvr>
-    <a:masterClrMapping/>
-  </p:clrMapOvr>
-</p:sld>
-</file>
-
-<file path=ppt/slides/slide7.xml><?xml version="1.0" encoding="utf-8"?>
-<p:sld xmlns:a="http://schemas.openxmlformats.org/drawingml/2006/main" xmlns:r="http://schemas.openxmlformats.org/officeDocument/2006/relationships" xmlns:p="http://schemas.openxmlformats.org/presentationml/2006/main">
-  <p:cSld>
-    <p:spTree>
-      <p:nvGrpSpPr>
-        <p:cNvPr id="1" name=""/>
-        <p:cNvGrpSpPr/>
-        <p:nvPr/>
-      </p:nvGrpSpPr>
-      <p:grpSpPr>
-        <a:xfrm>
-          <a:off x="0" y="0"/>
-          <a:ext cx="0" cy="0"/>
-          <a:chOff x="0" y="0"/>
-          <a:chExt cx="0" cy="0"/>
-        </a:xfrm>
-      </p:grpSpPr>
-      <p:sp>
-        <p:nvSpPr>
-          <p:cNvPr id="2" name="Заголовок 1">
-            <a:extLst>
-              <a:ext uri="{FF2B5EF4-FFF2-40B4-BE49-F238E27FC236}">
-                <a16:creationId xmlns:a16="http://schemas.microsoft.com/office/drawing/2014/main" id="{0AE15423-5860-4CBD-36AE-7A1C748FF96A}"/>
-              </a:ext>
-            </a:extLst>
-          </p:cNvPr>
-          <p:cNvSpPr>
-            <a:spLocks noGrp="1"/>
-          </p:cNvSpPr>
-          <p:nvPr>
-            <p:ph type="title"/>
-          </p:nvPr>
-        </p:nvSpPr>
-        <p:spPr>
-          <a:xfrm>
-            <a:off x="1097280" y="597710"/>
-            <a:ext cx="10058400" cy="888049"/>
-          </a:xfrm>
-        </p:spPr>
-        <p:txBody>
-          <a:bodyPr>
-            <a:normAutofit/>
-          </a:bodyPr>
-          <a:lstStyle/>
-          <a:p>
-            <a:pPr algn="ctr">
-              <a:lnSpc>
-                <a:spcPct val="150000"/>
-              </a:lnSpc>
-            </a:pPr>
-            <a:r>
-              <a:rPr lang="ru-RU" sz="3600" dirty="0">
-                <a:solidFill>
-                  <a:schemeClr val="tx1"/>
-                </a:solidFill>
-                <a:effectLst/>
-                <a:latin typeface="Times New Roman" panose="02020603050405020304" pitchFamily="18" charset="0"/>
-                <a:ea typeface="Calibri" panose="020F0502020204030204" pitchFamily="34" charset="0"/>
-                <a:cs typeface="Times New Roman" panose="02020603050405020304" pitchFamily="18" charset="0"/>
-              </a:rPr>
-              <a:t>Индивидуальное задание</a:t>
-            </a:r>
-            <a:endParaRPr lang="ru-RU" sz="3600" dirty="0">
-              <a:solidFill>
-                <a:schemeClr val="tx1"/>
-              </a:solidFill>
-              <a:latin typeface="Times New Roman" panose="02020603050405020304" pitchFamily="18" charset="0"/>
-              <a:cs typeface="Times New Roman" panose="02020603050405020304" pitchFamily="18" charset="0"/>
-            </a:endParaRPr>
-          </a:p>
-        </p:txBody>
-      </p:sp>
-      <p:sp>
-        <p:nvSpPr>
-          <p:cNvPr id="3" name="Объект 2">
-            <a:extLst>
-              <a:ext uri="{FF2B5EF4-FFF2-40B4-BE49-F238E27FC236}">
-                <a16:creationId xmlns:a16="http://schemas.microsoft.com/office/drawing/2014/main" id="{C49A25D5-3B2F-B457-5560-50539101E104}"/>
-              </a:ext>
-            </a:extLst>
-          </p:cNvPr>
-          <p:cNvSpPr>
-            <a:spLocks noGrp="1"/>
-          </p:cNvSpPr>
-          <p:nvPr>
-            <p:ph idx="1"/>
-          </p:nvPr>
-        </p:nvSpPr>
-        <p:spPr>
-          <a:xfrm>
-            <a:off x="1097280" y="2627312"/>
-            <a:ext cx="10058400" cy="1889760"/>
-          </a:xfrm>
-        </p:spPr>
-        <p:txBody>
-          <a:bodyPr>
-            <a:normAutofit/>
-          </a:bodyPr>
-          <a:lstStyle/>
-          <a:p>
-            <a:pPr marL="0" indent="450000" algn="ctr">
-              <a:lnSpc>
-                <a:spcPct val="150000"/>
-              </a:lnSpc>
-              <a:spcBef>
-                <a:spcPts val="0"/>
-              </a:spcBef>
-              <a:spcAft>
-                <a:spcPts val="0"/>
-              </a:spcAft>
-              <a:buNone/>
-            </a:pPr>
-            <a:r>
-              <a:rPr lang="ru-RU" sz="3200" dirty="0">
-                <a:solidFill>
-                  <a:schemeClr val="tx1"/>
-                </a:solidFill>
-                <a:latin typeface="Times New Roman" panose="02020603050405020304" pitchFamily="18" charset="0"/>
-                <a:cs typeface="Times New Roman" panose="02020603050405020304" pitchFamily="18" charset="0"/>
-              </a:rPr>
-              <a:t>«Разработка эксплуатационной документации для оборудования компьютерного класса»</a:t>
-            </a:r>
-          </a:p>
-        </p:txBody>
-      </p:sp>
-    </p:spTree>
-    <p:extLst>
-      <p:ext uri="{BB962C8B-B14F-4D97-AF65-F5344CB8AC3E}">
-        <p14:creationId xmlns:p14="http://schemas.microsoft.com/office/powerpoint/2010/main" val="2377805182"/>
-      </p:ext>
-    </p:extLst>
-  </p:cSld>
-  <p:clrMapOvr>
-    <a:masterClrMapping/>
-  </p:clrMapOvr>
-</p:sld>
-</file>
-
-<file path=ppt/slides/slide8.xml><?xml version="1.0" encoding="utf-8"?>
-<p:sld xmlns:a="http://schemas.openxmlformats.org/drawingml/2006/main" xmlns:r="http://schemas.openxmlformats.org/officeDocument/2006/relationships" xmlns:p="http://schemas.openxmlformats.org/presentationml/2006/main">
-  <p:cSld>
-    <p:spTree>
-      <p:nvGrpSpPr>
         <p:cNvPr id="1" name="">
           <a:extLst>
             <a:ext uri="{FF2B5EF4-FFF2-40B4-BE49-F238E27FC236}">
@@ -9760,8 +6945,8 @@
         </p:nvSpPr>
         <p:spPr>
           <a:xfrm>
-            <a:off x="1096962" y="633046"/>
-            <a:ext cx="8563086" cy="1032243"/>
+            <a:off x="1935103" y="175847"/>
+            <a:ext cx="8986838" cy="1449754"/>
           </a:xfrm>
           <a:prstGeom prst="rect">
             <a:avLst/>
@@ -9782,7 +6967,7 @@
           </a:bodyPr>
           <a:lstStyle/>
           <a:p>
-            <a:pPr marR="0" lvl="0" algn="l" defTabSz="914400" rtl="0" eaLnBrk="1" fontAlgn="auto" latinLnBrk="0" hangingPunct="1">
+            <a:pPr marR="0" lvl="0" algn="ctr" defTabSz="914400" rtl="0" eaLnBrk="1" fontAlgn="auto" latinLnBrk="0" hangingPunct="1">
               <a:lnSpc>
                 <a:spcPct val="150000"/>
               </a:lnSpc>
@@ -9797,15 +6982,388 @@
               <a:defRPr/>
             </a:pPr>
             <a:r>
-              <a:rPr lang="ru-RU" sz="3600" spc="0" dirty="0">
+              <a:rPr lang="ru-RU" sz="3200" dirty="0">
                 <a:solidFill>
                   <a:schemeClr val="tx1"/>
                 </a:solidFill>
                 <a:latin typeface="Times New Roman" panose="02020603050405020304" pitchFamily="18" charset="0"/>
-                <a:ea typeface="+mn-ea"/>
                 <a:cs typeface="Times New Roman" panose="02020603050405020304" pitchFamily="18" charset="0"/>
               </a:rPr>
-              <a:t>Цель и задачи</a:t>
+              <a:t>Разработка клиентской части веб-сайта для цветочного магазина</a:t>
+            </a:r>
+            <a:endParaRPr kumimoji="0" lang="ru-RU" sz="3200" b="0" i="0" u="none" strike="noStrike" kern="1200" cap="none" spc="0" normalizeH="0" baseline="0" noProof="0" dirty="0">
+              <a:ln>
+                <a:noFill/>
+              </a:ln>
+              <a:solidFill>
+                <a:schemeClr val="tx1"/>
+              </a:solidFill>
+              <a:effectLst/>
+              <a:uLnTx/>
+              <a:uFillTx/>
+              <a:latin typeface="Times New Roman" panose="02020603050405020304" pitchFamily="18" charset="0"/>
+              <a:ea typeface="+mn-ea"/>
+              <a:cs typeface="Times New Roman" panose="02020603050405020304" pitchFamily="18" charset="0"/>
+            </a:endParaRPr>
+          </a:p>
+        </p:txBody>
+      </p:sp>
+      <p:sp>
+        <p:nvSpPr>
+          <p:cNvPr id="11" name="TextBox 10">
+            <a:extLst>
+              <a:ext uri="{FF2B5EF4-FFF2-40B4-BE49-F238E27FC236}">
+                <a16:creationId xmlns:a16="http://schemas.microsoft.com/office/drawing/2014/main" id="{FE673D54-6E73-4F30-FEE4-D73BDABB6624}"/>
+              </a:ext>
+            </a:extLst>
+          </p:cNvPr>
+          <p:cNvSpPr txBox="1"/>
+          <p:nvPr/>
+        </p:nvSpPr>
+        <p:spPr>
+          <a:xfrm>
+            <a:off x="1411188" y="2018233"/>
+            <a:ext cx="10035155" cy="579967"/>
+          </a:xfrm>
+          <a:prstGeom prst="rect">
+            <a:avLst/>
+          </a:prstGeom>
+          <a:noFill/>
+        </p:spPr>
+        <p:txBody>
+          <a:bodyPr wrap="square" rtlCol="0">
+            <a:spAutoFit/>
+          </a:bodyPr>
+          <a:lstStyle/>
+          <a:p>
+            <a:pPr lvl="0" algn="just">
+              <a:lnSpc>
+                <a:spcPct val="150000"/>
+              </a:lnSpc>
+              <a:spcBef>
+                <a:spcPts val="0"/>
+              </a:spcBef>
+            </a:pPr>
+            <a:r>
+              <a:rPr lang="ru-RU" sz="2400" dirty="0">
+                <a:solidFill>
+                  <a:schemeClr val="tx1"/>
+                </a:solidFill>
+                <a:effectLst/>
+                <a:latin typeface="Times New Roman" panose="02020603050405020304" pitchFamily="18" charset="0"/>
+                <a:ea typeface="Calibri" panose="020F0502020204030204" pitchFamily="34" charset="0"/>
+                <a:cs typeface="Times New Roman" panose="02020603050405020304" pitchFamily="18" charset="0"/>
+              </a:rPr>
+              <a:t>Реализовать компонентную архитектуру интерфейса;</a:t>
+            </a:r>
+          </a:p>
+        </p:txBody>
+      </p:sp>
+      <p:pic>
+        <p:nvPicPr>
+          <p:cNvPr id="26" name="Рисунок 25" descr="Линия со стрелкой: небольшой изгиб">
+            <a:extLst>
+              <a:ext uri="{FF2B5EF4-FFF2-40B4-BE49-F238E27FC236}">
+                <a16:creationId xmlns:a16="http://schemas.microsoft.com/office/drawing/2014/main" id="{1D1738E5-CFB5-CC3B-BC3B-2BE97B4E3889}"/>
+              </a:ext>
+            </a:extLst>
+          </p:cNvPr>
+          <p:cNvPicPr>
+            <a:picLocks noChangeAspect="1"/>
+          </p:cNvPicPr>
+          <p:nvPr/>
+        </p:nvPicPr>
+        <p:blipFill>
+          <a:blip r:embed="rId3">
+            <a:extLst>
+              <a:ext uri="{28A0092B-C50C-407E-A947-70E740481C1C}">
+                <a14:useLocalDpi xmlns:a14="http://schemas.microsoft.com/office/drawing/2010/main" val="0"/>
+              </a:ext>
+              <a:ext uri="{96DAC541-7B7A-43D3-8B79-37D633B846F1}">
+                <asvg:svgBlip xmlns:asvg="http://schemas.microsoft.com/office/drawing/2016/SVG/main" r:embed="rId4"/>
+              </a:ext>
+            </a:extLst>
+          </a:blip>
+          <a:stretch>
+            <a:fillRect/>
+          </a:stretch>
+        </p:blipFill>
+        <p:spPr>
+          <a:xfrm>
+            <a:off x="712093" y="2079179"/>
+            <a:ext cx="631001" cy="631001"/>
+          </a:xfrm>
+          <a:prstGeom prst="rect">
+            <a:avLst/>
+          </a:prstGeom>
+        </p:spPr>
+      </p:pic>
+      <p:pic>
+        <p:nvPicPr>
+          <p:cNvPr id="8" name="Рисунок 7" descr="Линия со стрелкой: небольшой изгиб">
+            <a:extLst>
+              <a:ext uri="{FF2B5EF4-FFF2-40B4-BE49-F238E27FC236}">
+                <a16:creationId xmlns:a16="http://schemas.microsoft.com/office/drawing/2014/main" id="{103536B8-908C-6876-CBA7-F5F092A772F0}"/>
+              </a:ext>
+            </a:extLst>
+          </p:cNvPr>
+          <p:cNvPicPr>
+            <a:picLocks noChangeAspect="1"/>
+          </p:cNvPicPr>
+          <p:nvPr/>
+        </p:nvPicPr>
+        <p:blipFill>
+          <a:blip r:embed="rId3">
+            <a:extLst>
+              <a:ext uri="{28A0092B-C50C-407E-A947-70E740481C1C}">
+                <a14:useLocalDpi xmlns:a14="http://schemas.microsoft.com/office/drawing/2010/main" val="0"/>
+              </a:ext>
+              <a:ext uri="{96DAC541-7B7A-43D3-8B79-37D633B846F1}">
+                <asvg:svgBlip xmlns:asvg="http://schemas.microsoft.com/office/drawing/2016/SVG/main" r:embed="rId4"/>
+              </a:ext>
+            </a:extLst>
+          </a:blip>
+          <a:stretch>
+            <a:fillRect/>
+          </a:stretch>
+        </p:blipFill>
+        <p:spPr>
+          <a:xfrm>
+            <a:off x="712093" y="2861691"/>
+            <a:ext cx="631001" cy="631001"/>
+          </a:xfrm>
+          <a:prstGeom prst="rect">
+            <a:avLst/>
+          </a:prstGeom>
+        </p:spPr>
+      </p:pic>
+      <p:sp>
+        <p:nvSpPr>
+          <p:cNvPr id="5" name="TextBox 4">
+            <a:extLst>
+              <a:ext uri="{FF2B5EF4-FFF2-40B4-BE49-F238E27FC236}">
+                <a16:creationId xmlns:a16="http://schemas.microsoft.com/office/drawing/2014/main" id="{22BD5556-B50B-8D9B-E685-CB9957113D6F}"/>
+              </a:ext>
+            </a:extLst>
+          </p:cNvPr>
+          <p:cNvSpPr txBox="1"/>
+          <p:nvPr/>
+        </p:nvSpPr>
+        <p:spPr>
+          <a:xfrm>
+            <a:off x="1411192" y="2800761"/>
+            <a:ext cx="10035155" cy="579967"/>
+          </a:xfrm>
+          <a:prstGeom prst="rect">
+            <a:avLst/>
+          </a:prstGeom>
+          <a:noFill/>
+        </p:spPr>
+        <p:txBody>
+          <a:bodyPr wrap="square" rtlCol="0">
+            <a:spAutoFit/>
+          </a:bodyPr>
+          <a:lstStyle/>
+          <a:p>
+            <a:pPr lvl="0" algn="just">
+              <a:lnSpc>
+                <a:spcPct val="150000"/>
+              </a:lnSpc>
+            </a:pPr>
+            <a:r>
+              <a:rPr lang="ru-RU" sz="2400" dirty="0">
+                <a:latin typeface="Times New Roman" panose="02020603050405020304" pitchFamily="18" charset="0"/>
+                <a:ea typeface="Calibri" panose="020F0502020204030204" pitchFamily="34" charset="0"/>
+                <a:cs typeface="Times New Roman" panose="02020603050405020304" pitchFamily="18" charset="0"/>
+              </a:rPr>
+              <a:t>Сверстать основные разделы;</a:t>
+            </a:r>
+          </a:p>
+        </p:txBody>
+      </p:sp>
+      <p:pic>
+        <p:nvPicPr>
+          <p:cNvPr id="4" name="Рисунок 3" descr="Линия со стрелкой: небольшой изгиб">
+            <a:extLst>
+              <a:ext uri="{FF2B5EF4-FFF2-40B4-BE49-F238E27FC236}">
+                <a16:creationId xmlns:a16="http://schemas.microsoft.com/office/drawing/2014/main" id="{D0986EA8-2B7A-F825-8392-7BEBFBFDAAB0}"/>
+              </a:ext>
+            </a:extLst>
+          </p:cNvPr>
+          <p:cNvPicPr>
+            <a:picLocks noChangeAspect="1"/>
+          </p:cNvPicPr>
+          <p:nvPr/>
+        </p:nvPicPr>
+        <p:blipFill>
+          <a:blip r:embed="rId3">
+            <a:extLst>
+              <a:ext uri="{28A0092B-C50C-407E-A947-70E740481C1C}">
+                <a14:useLocalDpi xmlns:a14="http://schemas.microsoft.com/office/drawing/2010/main" val="0"/>
+              </a:ext>
+              <a:ext uri="{96DAC541-7B7A-43D3-8B79-37D633B846F1}">
+                <asvg:svgBlip xmlns:asvg="http://schemas.microsoft.com/office/drawing/2016/SVG/main" r:embed="rId4"/>
+              </a:ext>
+            </a:extLst>
+          </a:blip>
+          <a:stretch>
+            <a:fillRect/>
+          </a:stretch>
+        </p:blipFill>
+        <p:spPr>
+          <a:xfrm>
+            <a:off x="712093" y="3661821"/>
+            <a:ext cx="631001" cy="631001"/>
+          </a:xfrm>
+          <a:prstGeom prst="rect">
+            <a:avLst/>
+          </a:prstGeom>
+        </p:spPr>
+      </p:pic>
+      <p:sp>
+        <p:nvSpPr>
+          <p:cNvPr id="6" name="TextBox 5">
+            <a:extLst>
+              <a:ext uri="{FF2B5EF4-FFF2-40B4-BE49-F238E27FC236}">
+                <a16:creationId xmlns:a16="http://schemas.microsoft.com/office/drawing/2014/main" id="{32AC08A8-3BBE-CA80-38CB-23E33A232A46}"/>
+              </a:ext>
+            </a:extLst>
+          </p:cNvPr>
+          <p:cNvSpPr txBox="1"/>
+          <p:nvPr/>
+        </p:nvSpPr>
+        <p:spPr>
+          <a:xfrm>
+            <a:off x="1411187" y="3617778"/>
+            <a:ext cx="10034671" cy="587148"/>
+          </a:xfrm>
+          <a:prstGeom prst="rect">
+            <a:avLst/>
+          </a:prstGeom>
+          <a:noFill/>
+        </p:spPr>
+        <p:txBody>
+          <a:bodyPr wrap="square" rtlCol="0">
+            <a:spAutoFit/>
+          </a:bodyPr>
+          <a:lstStyle/>
+          <a:p>
+            <a:pPr algn="just">
+              <a:lnSpc>
+                <a:spcPct val="150000"/>
+              </a:lnSpc>
+            </a:pPr>
+            <a:r>
+              <a:rPr lang="ru-RU" sz="2400" dirty="0">
+                <a:latin typeface="Times New Roman" panose="02020603050405020304" pitchFamily="18" charset="0"/>
+                <a:ea typeface="Calibri" panose="020F0502020204030204" pitchFamily="34" charset="0"/>
+                <a:cs typeface="Times New Roman" panose="02020603050405020304" pitchFamily="18" charset="0"/>
+              </a:rPr>
+              <a:t>Реализовать динамический функционал.</a:t>
+            </a:r>
+            <a:endParaRPr lang="ru-RU" sz="2400" dirty="0"/>
+          </a:p>
+        </p:txBody>
+      </p:sp>
+    </p:spTree>
+    <p:extLst>
+      <p:ext uri="{BB962C8B-B14F-4D97-AF65-F5344CB8AC3E}">
+        <p14:creationId xmlns:p14="http://schemas.microsoft.com/office/powerpoint/2010/main" val="4009383590"/>
+      </p:ext>
+    </p:extLst>
+  </p:cSld>
+  <p:clrMapOvr>
+    <a:masterClrMapping/>
+  </p:clrMapOvr>
+</p:sld>
+</file>
+
+<file path=ppt/slides/slide5.xml><?xml version="1.0" encoding="utf-8"?>
+<p:sld xmlns:a="http://schemas.openxmlformats.org/drawingml/2006/main" xmlns:r="http://schemas.openxmlformats.org/officeDocument/2006/relationships" xmlns:p="http://schemas.openxmlformats.org/presentationml/2006/main">
+  <p:cSld>
+    <p:spTree>
+      <p:nvGrpSpPr>
+        <p:cNvPr id="1" name="">
+          <a:extLst>
+            <a:ext uri="{FF2B5EF4-FFF2-40B4-BE49-F238E27FC236}">
+              <a16:creationId xmlns:a16="http://schemas.microsoft.com/office/drawing/2014/main" id="{FE710A00-797B-978F-BCEE-BA9E474E7360}"/>
+            </a:ext>
+          </a:extLst>
+        </p:cNvPr>
+        <p:cNvGrpSpPr/>
+        <p:nvPr/>
+      </p:nvGrpSpPr>
+      <p:grpSpPr>
+        <a:xfrm>
+          <a:off x="0" y="0"/>
+          <a:ext cx="0" cy="0"/>
+          <a:chOff x="0" y="0"/>
+          <a:chExt cx="0" cy="0"/>
+        </a:xfrm>
+      </p:grpSpPr>
+      <p:sp>
+        <p:nvSpPr>
+          <p:cNvPr id="7" name="Объект 6">
+            <a:extLst>
+              <a:ext uri="{FF2B5EF4-FFF2-40B4-BE49-F238E27FC236}">
+                <a16:creationId xmlns:a16="http://schemas.microsoft.com/office/drawing/2014/main" id="{7690F342-C6FD-4121-5AAF-C826F8F21842}"/>
+              </a:ext>
+            </a:extLst>
+          </p:cNvPr>
+          <p:cNvSpPr>
+            <a:spLocks noGrp="1"/>
+          </p:cNvSpPr>
+          <p:nvPr>
+            <p:ph type="title" idx="4294967295"/>
+          </p:nvPr>
+        </p:nvSpPr>
+        <p:spPr>
+          <a:xfrm>
+            <a:off x="2066102" y="788762"/>
+            <a:ext cx="8724842" cy="815983"/>
+          </a:xfrm>
+          <a:prstGeom prst="rect">
+            <a:avLst/>
+          </a:prstGeom>
+          <a:noFill/>
+          <a:ln>
+            <a:noFill/>
+            <a:prstDash/>
+          </a:ln>
+          <a:effectLst/>
+        </p:spPr>
+        <p:txBody>
+          <a:bodyPr rot="0" spcFirstLastPara="0" vertOverflow="overflow" horzOverflow="overflow" vert="horz" wrap="square" lIns="0" tIns="45720" rIns="0" bIns="45720" numCol="1" spcCol="0" rtlCol="0" fromWordArt="0" anchor="t" anchorCtr="0" forceAA="0" compatLnSpc="1">
+            <a:prstTxWarp prst="textNoShape">
+              <a:avLst/>
+            </a:prstTxWarp>
+            <a:noAutofit/>
+          </a:bodyPr>
+          <a:lstStyle/>
+          <a:p>
+            <a:pPr marR="0" lvl="0" algn="ctr" defTabSz="914400" rtl="0" eaLnBrk="1" fontAlgn="auto" latinLnBrk="0" hangingPunct="1">
+              <a:lnSpc>
+                <a:spcPct val="150000"/>
+              </a:lnSpc>
+              <a:spcBef>
+                <a:spcPts val="0"/>
+              </a:spcBef>
+              <a:buClr>
+                <a:schemeClr val="accent1"/>
+              </a:buClr>
+              <a:buSzPct val="100000"/>
+              <a:tabLst/>
+              <a:defRPr/>
+            </a:pPr>
+            <a:r>
+              <a:rPr lang="ru-RU" sz="3600" dirty="0">
+                <a:solidFill>
+                  <a:schemeClr val="tx1"/>
+                </a:solidFill>
+                <a:latin typeface="Times New Roman" panose="02020603050405020304" pitchFamily="18" charset="0"/>
+                <a:cs typeface="Times New Roman" panose="02020603050405020304" pitchFamily="18" charset="0"/>
+              </a:rPr>
+              <a:t>Структура интерфейса</a:t>
             </a:r>
             <a:endParaRPr kumimoji="0" lang="ru-RU" sz="3600" b="0" i="0" u="none" strike="noStrike" kern="1200" cap="none" spc="0" normalizeH="0" baseline="0" noProof="0" dirty="0">
               <a:ln>
@@ -9829,7 +7387,7 @@
           <p:cNvPr id="11" name="TextBox 10">
             <a:extLst>
               <a:ext uri="{FF2B5EF4-FFF2-40B4-BE49-F238E27FC236}">
-                <a16:creationId xmlns:a16="http://schemas.microsoft.com/office/drawing/2014/main" id="{FE673D54-6E73-4F30-FEE4-D73BDABB6624}"/>
+                <a16:creationId xmlns:a16="http://schemas.microsoft.com/office/drawing/2014/main" id="{FAE359DC-9677-CA20-FC10-69E69D257BBB}"/>
               </a:ext>
             </a:extLst>
           </p:cNvPr>
@@ -9838,8 +7396,8 @@
         </p:nvSpPr>
         <p:spPr>
           <a:xfrm>
-            <a:off x="1411188" y="1954733"/>
-            <a:ext cx="10035155" cy="579967"/>
+            <a:off x="1411188" y="2163846"/>
+            <a:ext cx="10035155" cy="461665"/>
           </a:xfrm>
           <a:prstGeom prst="rect">
             <a:avLst/>
@@ -9852,25 +7410,16 @@
           </a:bodyPr>
           <a:lstStyle/>
           <a:p>
-            <a:pPr lvl="0" algn="just">
-              <a:lnSpc>
-                <a:spcPct val="150000"/>
-              </a:lnSpc>
-              <a:spcBef>
-                <a:spcPts val="0"/>
-              </a:spcBef>
-            </a:pPr>
             <a:r>
               <a:rPr lang="ru-RU" sz="2400" dirty="0">
                 <a:solidFill>
                   <a:schemeClr val="tx1"/>
                 </a:solidFill>
-                <a:effectLst/>
                 <a:latin typeface="Times New Roman" panose="02020603050405020304" pitchFamily="18" charset="0"/>
                 <a:ea typeface="Calibri" panose="020F0502020204030204" pitchFamily="34" charset="0"/>
                 <a:cs typeface="Times New Roman" panose="02020603050405020304" pitchFamily="18" charset="0"/>
               </a:rPr>
-              <a:t>Изучить текущий состав оборудования и ПО класса;</a:t>
+              <a:t>Шапка сайта;</a:t>
             </a:r>
           </a:p>
         </p:txBody>
@@ -9880,7 +7429,7 @@
           <p:cNvPr id="26" name="Рисунок 25" descr="Линия со стрелкой: небольшой изгиб">
             <a:extLst>
               <a:ext uri="{FF2B5EF4-FFF2-40B4-BE49-F238E27FC236}">
-                <a16:creationId xmlns:a16="http://schemas.microsoft.com/office/drawing/2014/main" id="{1D1738E5-CFB5-CC3B-BC3B-2BE97B4E3889}"/>
+                <a16:creationId xmlns:a16="http://schemas.microsoft.com/office/drawing/2014/main" id="{85621E46-711C-D523-E6EF-64DCCA1E0752}"/>
               </a:ext>
             </a:extLst>
           </p:cNvPr>
@@ -9906,7 +7455,7 @@
         </p:blipFill>
         <p:spPr>
           <a:xfrm>
-            <a:off x="712093" y="2015679"/>
+            <a:off x="712093" y="2079179"/>
             <a:ext cx="631001" cy="631001"/>
           </a:xfrm>
           <a:prstGeom prst="rect">
@@ -9919,7 +7468,7 @@
           <p:cNvPr id="8" name="Рисунок 7" descr="Линия со стрелкой: небольшой изгиб">
             <a:extLst>
               <a:ext uri="{FF2B5EF4-FFF2-40B4-BE49-F238E27FC236}">
-                <a16:creationId xmlns:a16="http://schemas.microsoft.com/office/drawing/2014/main" id="{103536B8-908C-6876-CBA7-F5F092A772F0}"/>
+                <a16:creationId xmlns:a16="http://schemas.microsoft.com/office/drawing/2014/main" id="{20D3B874-5368-2E88-3720-09F31789514B}"/>
               </a:ext>
             </a:extLst>
           </p:cNvPr>
@@ -9945,7 +7494,7 @@
         </p:blipFill>
         <p:spPr>
           <a:xfrm>
-            <a:off x="712093" y="2758410"/>
+            <a:off x="712093" y="2876695"/>
             <a:ext cx="631001" cy="631001"/>
           </a:xfrm>
           <a:prstGeom prst="rect">
@@ -9958,7 +7507,7 @@
           <p:cNvPr id="5" name="TextBox 4">
             <a:extLst>
               <a:ext uri="{FF2B5EF4-FFF2-40B4-BE49-F238E27FC236}">
-                <a16:creationId xmlns:a16="http://schemas.microsoft.com/office/drawing/2014/main" id="{22BD5556-B50B-8D9B-E685-CB9957113D6F}"/>
+                <a16:creationId xmlns:a16="http://schemas.microsoft.com/office/drawing/2014/main" id="{0AA4BF7E-EC16-4B6F-32DF-63918887B473}"/>
               </a:ext>
             </a:extLst>
           </p:cNvPr>
@@ -9967,7 +7516,7 @@
         </p:nvSpPr>
         <p:spPr>
           <a:xfrm>
-            <a:off x="1411192" y="2697480"/>
+            <a:off x="1411192" y="2815765"/>
             <a:ext cx="10035155" cy="579967"/>
           </a:xfrm>
           <a:prstGeom prst="rect">
@@ -9981,18 +7530,29 @@
           </a:bodyPr>
           <a:lstStyle/>
           <a:p>
-            <a:pPr lvl="0" algn="just">
+            <a:pPr algn="just">
               <a:lnSpc>
                 <a:spcPct val="150000"/>
               </a:lnSpc>
             </a:pPr>
+            <a:r>
+              <a:rPr lang="ru-RU" sz="2400" dirty="0">
+                <a:solidFill>
+                  <a:schemeClr val="tx1"/>
+                </a:solidFill>
+                <a:latin typeface="Times New Roman" panose="02020603050405020304" pitchFamily="18" charset="0"/>
+                <a:ea typeface="Calibri" panose="020F0502020204030204" pitchFamily="34" charset="0"/>
+                <a:cs typeface="Times New Roman" panose="02020603050405020304" pitchFamily="18" charset="0"/>
+              </a:rPr>
+              <a:t>Навигационное меню</a:t>
+            </a:r>
             <a:r>
               <a:rPr lang="ru-RU" sz="2400" dirty="0">
                 <a:latin typeface="Times New Roman" panose="02020603050405020304" pitchFamily="18" charset="0"/>
                 <a:ea typeface="Calibri" panose="020F0502020204030204" pitchFamily="34" charset="0"/>
                 <a:cs typeface="Times New Roman" panose="02020603050405020304" pitchFamily="18" charset="0"/>
               </a:rPr>
-              <a:t>Провести анализ типовых сценариев использования техники;</a:t>
+              <a:t>;</a:t>
             </a:r>
           </a:p>
         </p:txBody>
@@ -10002,7 +7562,7 @@
           <p:cNvPr id="4" name="Рисунок 3" descr="Линия со стрелкой: небольшой изгиб">
             <a:extLst>
               <a:ext uri="{FF2B5EF4-FFF2-40B4-BE49-F238E27FC236}">
-                <a16:creationId xmlns:a16="http://schemas.microsoft.com/office/drawing/2014/main" id="{D0986EA8-2B7A-F825-8392-7BEBFBFDAAB0}"/>
+                <a16:creationId xmlns:a16="http://schemas.microsoft.com/office/drawing/2014/main" id="{185CC6F8-D82A-C9CD-0A34-1395A2102DF7}"/>
               </a:ext>
             </a:extLst>
           </p:cNvPr>
@@ -10028,7 +7588,7 @@
         </p:blipFill>
         <p:spPr>
           <a:xfrm>
-            <a:off x="712093" y="3520440"/>
+            <a:off x="712093" y="3613284"/>
             <a:ext cx="631001" cy="631001"/>
           </a:xfrm>
           <a:prstGeom prst="rect">
@@ -10041,7 +7601,7 @@
           <p:cNvPr id="6" name="TextBox 5">
             <a:extLst>
               <a:ext uri="{FF2B5EF4-FFF2-40B4-BE49-F238E27FC236}">
-                <a16:creationId xmlns:a16="http://schemas.microsoft.com/office/drawing/2014/main" id="{32AC08A8-3BBE-CA80-38CB-23E33A232A46}"/>
+                <a16:creationId xmlns:a16="http://schemas.microsoft.com/office/drawing/2014/main" id="{FD485436-9C36-6388-12F8-4D6E88487260}"/>
               </a:ext>
             </a:extLst>
           </p:cNvPr>
@@ -10050,8 +7610,8 @@
         </p:nvSpPr>
         <p:spPr>
           <a:xfrm>
-            <a:off x="1411187" y="3476397"/>
-            <a:ext cx="10034671" cy="1141146"/>
+            <a:off x="1411188" y="3697951"/>
+            <a:ext cx="10034671" cy="461665"/>
           </a:xfrm>
           <a:prstGeom prst="rect">
             <a:avLst/>
@@ -10064,73 +7624,26 @@
           </a:bodyPr>
           <a:lstStyle/>
           <a:p>
-            <a:pPr algn="just">
-              <a:lnSpc>
-                <a:spcPct val="150000"/>
-              </a:lnSpc>
-            </a:pPr>
             <a:r>
               <a:rPr lang="ru-RU" sz="2400" dirty="0">
+                <a:solidFill>
+                  <a:schemeClr val="tx1"/>
+                </a:solidFill>
                 <a:latin typeface="Times New Roman" panose="02020603050405020304" pitchFamily="18" charset="0"/>
                 <a:ea typeface="Calibri" panose="020F0502020204030204" pitchFamily="34" charset="0"/>
                 <a:cs typeface="Times New Roman" panose="02020603050405020304" pitchFamily="18" charset="0"/>
               </a:rPr>
-              <a:t>Разработать инструкции для разных категорий пользователей (учителя, учащиеся, администратор);</a:t>
-            </a:r>
-            <a:endParaRPr lang="ru-RU" sz="2400" dirty="0"/>
-          </a:p>
-        </p:txBody>
-      </p:sp>
-      <p:sp>
-        <p:nvSpPr>
-          <p:cNvPr id="3" name="TextBox 2">
+              <a:t>Каталог товаров (адаптивная сетка);</a:t>
+            </a:r>
+          </a:p>
+        </p:txBody>
+      </p:sp>
+      <p:pic>
+        <p:nvPicPr>
+          <p:cNvPr id="12" name="Рисунок 11" descr="Линия со стрелкой: небольшой изгиб">
             <a:extLst>
               <a:ext uri="{FF2B5EF4-FFF2-40B4-BE49-F238E27FC236}">
-                <a16:creationId xmlns:a16="http://schemas.microsoft.com/office/drawing/2014/main" id="{F3D070FE-B47B-EDF1-ABDE-86FAC6755589}"/>
-              </a:ext>
-            </a:extLst>
-          </p:cNvPr>
-          <p:cNvSpPr txBox="1"/>
-          <p:nvPr/>
-        </p:nvSpPr>
-        <p:spPr>
-          <a:xfrm>
-            <a:off x="1411187" y="4758178"/>
-            <a:ext cx="10034671" cy="1133965"/>
-          </a:xfrm>
-          <a:prstGeom prst="rect">
-            <a:avLst/>
-          </a:prstGeom>
-          <a:noFill/>
-        </p:spPr>
-        <p:txBody>
-          <a:bodyPr wrap="square">
-            <a:spAutoFit/>
-          </a:bodyPr>
-          <a:lstStyle/>
-          <a:p>
-            <a:pPr algn="just">
-              <a:lnSpc>
-                <a:spcPct val="150000"/>
-              </a:lnSpc>
-            </a:pPr>
-            <a:r>
-              <a:rPr lang="ru-RU" sz="2400" dirty="0">
-                <a:latin typeface="Times New Roman" panose="02020603050405020304" pitchFamily="18" charset="0"/>
-                <a:ea typeface="Calibri" panose="020F0502020204030204" pitchFamily="34" charset="0"/>
-                <a:cs typeface="Times New Roman" panose="02020603050405020304" pitchFamily="18" charset="0"/>
-              </a:rPr>
-              <a:t>Создать формы отчётности для фиксации состояния техники и выполненных работ.</a:t>
-            </a:r>
-          </a:p>
-        </p:txBody>
-      </p:sp>
-      <p:pic>
-        <p:nvPicPr>
-          <p:cNvPr id="14" name="Рисунок 13" descr="Линия со стрелкой: небольшой изгиб">
-            <a:extLst>
-              <a:ext uri="{FF2B5EF4-FFF2-40B4-BE49-F238E27FC236}">
-                <a16:creationId xmlns:a16="http://schemas.microsoft.com/office/drawing/2014/main" id="{774D33FB-2F12-A699-FDA4-E4A4D8F77C29}"/>
+                <a16:creationId xmlns:a16="http://schemas.microsoft.com/office/drawing/2014/main" id="{801B6155-B3CC-A0CF-9A09-D1A22B89C6CF}"/>
               </a:ext>
             </a:extLst>
           </p:cNvPr>
@@ -10156,18 +7669,638 @@
         </p:blipFill>
         <p:spPr>
           <a:xfrm>
-            <a:off x="712092" y="4758178"/>
+            <a:off x="712093" y="4349873"/>
             <a:ext cx="631001" cy="631001"/>
           </a:xfrm>
           <a:prstGeom prst="rect">
             <a:avLst/>
           </a:prstGeom>
+        </p:spPr>
+      </p:pic>
+      <p:sp>
+        <p:nvSpPr>
+          <p:cNvPr id="13" name="TextBox 12">
+            <a:extLst>
+              <a:ext uri="{FF2B5EF4-FFF2-40B4-BE49-F238E27FC236}">
+                <a16:creationId xmlns:a16="http://schemas.microsoft.com/office/drawing/2014/main" id="{67A87699-BB78-495E-B3A2-101B7631DF7C}"/>
+              </a:ext>
+            </a:extLst>
+          </p:cNvPr>
+          <p:cNvSpPr txBox="1"/>
+          <p:nvPr/>
+        </p:nvSpPr>
+        <p:spPr>
+          <a:xfrm>
+            <a:off x="1411188" y="4434540"/>
+            <a:ext cx="10034671" cy="461665"/>
+          </a:xfrm>
+          <a:prstGeom prst="rect">
+            <a:avLst/>
+          </a:prstGeom>
+          <a:noFill/>
+        </p:spPr>
+        <p:txBody>
+          <a:bodyPr wrap="square" rtlCol="0">
+            <a:spAutoFit/>
+          </a:bodyPr>
+          <a:lstStyle/>
+          <a:p>
+            <a:r>
+              <a:rPr lang="ru-RU" sz="2400" dirty="0">
+                <a:solidFill>
+                  <a:schemeClr val="tx1"/>
+                </a:solidFill>
+                <a:latin typeface="Times New Roman" panose="02020603050405020304" pitchFamily="18" charset="0"/>
+                <a:ea typeface="Calibri" panose="020F0502020204030204" pitchFamily="34" charset="0"/>
+                <a:cs typeface="Times New Roman" panose="02020603050405020304" pitchFamily="18" charset="0"/>
+              </a:rPr>
+              <a:t>Подвал (</a:t>
+            </a:r>
+            <a:r>
+              <a:rPr lang="ru-RU" sz="2400" dirty="0" err="1">
+                <a:solidFill>
+                  <a:schemeClr val="tx1"/>
+                </a:solidFill>
+                <a:latin typeface="Times New Roman" panose="02020603050405020304" pitchFamily="18" charset="0"/>
+                <a:ea typeface="Calibri" panose="020F0502020204030204" pitchFamily="34" charset="0"/>
+                <a:cs typeface="Times New Roman" panose="02020603050405020304" pitchFamily="18" charset="0"/>
+              </a:rPr>
+              <a:t>footer</a:t>
+            </a:r>
+            <a:r>
+              <a:rPr lang="ru-RU" sz="2400" dirty="0">
+                <a:solidFill>
+                  <a:schemeClr val="tx1"/>
+                </a:solidFill>
+                <a:latin typeface="Times New Roman" panose="02020603050405020304" pitchFamily="18" charset="0"/>
+                <a:ea typeface="Calibri" panose="020F0502020204030204" pitchFamily="34" charset="0"/>
+                <a:cs typeface="Times New Roman" panose="02020603050405020304" pitchFamily="18" charset="0"/>
+              </a:rPr>
+              <a:t>).</a:t>
+            </a:r>
+          </a:p>
+        </p:txBody>
+      </p:sp>
+    </p:spTree>
+    <p:extLst>
+      <p:ext uri="{BB962C8B-B14F-4D97-AF65-F5344CB8AC3E}">
+        <p14:creationId xmlns:p14="http://schemas.microsoft.com/office/powerpoint/2010/main" val="2150898224"/>
+      </p:ext>
+    </p:extLst>
+  </p:cSld>
+  <p:clrMapOvr>
+    <a:masterClrMapping/>
+  </p:clrMapOvr>
+</p:sld>
+</file>
+
+<file path=ppt/slides/slide6.xml><?xml version="1.0" encoding="utf-8"?>
+<p:sld xmlns:a="http://schemas.openxmlformats.org/drawingml/2006/main" xmlns:r="http://schemas.openxmlformats.org/officeDocument/2006/relationships" xmlns:p="http://schemas.openxmlformats.org/presentationml/2006/main">
+  <p:cSld>
+    <p:spTree>
+      <p:nvGrpSpPr>
+        <p:cNvPr id="1" name="">
+          <a:extLst>
+            <a:ext uri="{FF2B5EF4-FFF2-40B4-BE49-F238E27FC236}">
+              <a16:creationId xmlns:a16="http://schemas.microsoft.com/office/drawing/2014/main" id="{824581F1-EDD4-4B61-6AB8-6D82140B2594}"/>
+            </a:ext>
+          </a:extLst>
+        </p:cNvPr>
+        <p:cNvGrpSpPr/>
+        <p:nvPr/>
+      </p:nvGrpSpPr>
+      <p:grpSpPr>
+        <a:xfrm>
+          <a:off x="0" y="0"/>
+          <a:ext cx="0" cy="0"/>
+          <a:chOff x="0" y="0"/>
+          <a:chExt cx="0" cy="0"/>
+        </a:xfrm>
+      </p:grpSpPr>
+      <p:sp>
+        <p:nvSpPr>
+          <p:cNvPr id="7" name="Объект 6">
+            <a:extLst>
+              <a:ext uri="{FF2B5EF4-FFF2-40B4-BE49-F238E27FC236}">
+                <a16:creationId xmlns:a16="http://schemas.microsoft.com/office/drawing/2014/main" id="{D48C37F7-4377-AE61-B065-7CE01800931F}"/>
+              </a:ext>
+            </a:extLst>
+          </p:cNvPr>
+          <p:cNvSpPr>
+            <a:spLocks noGrp="1"/>
+          </p:cNvSpPr>
+          <p:nvPr>
+            <p:ph type="title" idx="4294967295"/>
+          </p:nvPr>
+        </p:nvSpPr>
+        <p:spPr>
+          <a:xfrm>
+            <a:off x="1935104" y="788762"/>
+            <a:ext cx="8986838" cy="815983"/>
+          </a:xfrm>
+          <a:prstGeom prst="rect">
+            <a:avLst/>
+          </a:prstGeom>
+          <a:noFill/>
+          <a:ln>
+            <a:noFill/>
+            <a:prstDash/>
+          </a:ln>
+          <a:effectLst/>
+        </p:spPr>
+        <p:txBody>
+          <a:bodyPr rot="0" spcFirstLastPara="0" vertOverflow="overflow" horzOverflow="overflow" vert="horz" wrap="square" lIns="0" tIns="45720" rIns="0" bIns="45720" numCol="1" spcCol="0" rtlCol="0" fromWordArt="0" anchor="t" anchorCtr="0" forceAA="0" compatLnSpc="1">
+            <a:prstTxWarp prst="textNoShape">
+              <a:avLst/>
+            </a:prstTxWarp>
+            <a:noAutofit/>
+          </a:bodyPr>
+          <a:lstStyle/>
+          <a:p>
+            <a:pPr marR="0" lvl="0" algn="ctr" defTabSz="914400" rtl="0" eaLnBrk="1" fontAlgn="auto" latinLnBrk="0" hangingPunct="1">
+              <a:lnSpc>
+                <a:spcPct val="150000"/>
+              </a:lnSpc>
+              <a:spcBef>
+                <a:spcPts val="0"/>
+              </a:spcBef>
+              <a:buClr>
+                <a:schemeClr val="accent1"/>
+              </a:buClr>
+              <a:buSzPct val="100000"/>
+              <a:tabLst/>
+              <a:defRPr/>
+            </a:pPr>
+            <a:r>
+              <a:rPr lang="ru-RU" sz="3600" dirty="0">
+                <a:solidFill>
+                  <a:schemeClr val="tx1"/>
+                </a:solidFill>
+                <a:latin typeface="Times New Roman" panose="02020603050405020304" pitchFamily="18" charset="0"/>
+                <a:cs typeface="Times New Roman" panose="02020603050405020304" pitchFamily="18" charset="0"/>
+              </a:rPr>
+              <a:t>Основные компоненты</a:t>
+            </a:r>
+            <a:endParaRPr kumimoji="0" lang="ru-RU" sz="3600" b="0" i="0" u="none" strike="noStrike" kern="1200" cap="none" spc="0" normalizeH="0" baseline="0" noProof="0" dirty="0">
+              <a:ln>
+                <a:noFill/>
+              </a:ln>
+              <a:solidFill>
+                <a:schemeClr val="tx1"/>
+              </a:solidFill>
+              <a:effectLst/>
+              <a:uLnTx/>
+              <a:uFillTx/>
+              <a:latin typeface="Times New Roman" panose="02020603050405020304" pitchFamily="18" charset="0"/>
+              <a:ea typeface="+mn-ea"/>
+              <a:cs typeface="Times New Roman" panose="02020603050405020304" pitchFamily="18" charset="0"/>
+            </a:endParaRPr>
+          </a:p>
+        </p:txBody>
+      </p:sp>
+      <p:pic>
+        <p:nvPicPr>
+          <p:cNvPr id="2" name="Рисунок 1">
+            <a:extLst>
+              <a:ext uri="{FF2B5EF4-FFF2-40B4-BE49-F238E27FC236}">
+                <a16:creationId xmlns:a16="http://schemas.microsoft.com/office/drawing/2014/main" id="{EC797306-498E-51C6-AA7B-DAA229505117}"/>
+              </a:ext>
+            </a:extLst>
+          </p:cNvPr>
+          <p:cNvPicPr>
+            <a:picLocks noChangeAspect="1"/>
+          </p:cNvPicPr>
+          <p:nvPr/>
+        </p:nvPicPr>
+        <p:blipFill>
+          <a:blip r:embed="rId3"/>
+          <a:stretch>
+            <a:fillRect/>
+          </a:stretch>
+        </p:blipFill>
+        <p:spPr>
+          <a:xfrm>
+            <a:off x="2859853" y="3385686"/>
+            <a:ext cx="6472294" cy="2256815"/>
+          </a:xfrm>
+          <a:prstGeom prst="rect">
+            <a:avLst/>
+          </a:prstGeom>
+        </p:spPr>
+      </p:pic>
+      <p:pic>
+        <p:nvPicPr>
+          <p:cNvPr id="3" name="Рисунок 2">
+            <a:extLst>
+              <a:ext uri="{FF2B5EF4-FFF2-40B4-BE49-F238E27FC236}">
+                <a16:creationId xmlns:a16="http://schemas.microsoft.com/office/drawing/2014/main" id="{A337C789-6662-A760-7878-3C7625D3A23E}"/>
+              </a:ext>
+            </a:extLst>
+          </p:cNvPr>
+          <p:cNvPicPr>
+            <a:picLocks noChangeAspect="1"/>
+          </p:cNvPicPr>
+          <p:nvPr/>
+        </p:nvPicPr>
+        <p:blipFill rotWithShape="1">
+          <a:blip r:embed="rId4"/>
+          <a:srcRect t="4500"/>
+          <a:stretch/>
+        </p:blipFill>
+        <p:spPr bwMode="auto">
+          <a:xfrm>
+            <a:off x="1678600" y="1885448"/>
+            <a:ext cx="8834798" cy="1068020"/>
+          </a:xfrm>
+          <a:prstGeom prst="rect">
+            <a:avLst/>
+          </a:prstGeom>
+          <a:ln>
+            <a:noFill/>
+          </a:ln>
+          <a:extLst>
+            <a:ext uri="{53640926-AAD7-44D8-BBD7-CCE9431645EC}">
+              <a14:shadowObscured xmlns:a14="http://schemas.microsoft.com/office/drawing/2010/main"/>
+            </a:ext>
+          </a:extLst>
         </p:spPr>
       </p:pic>
     </p:spTree>
     <p:extLst>
       <p:ext uri="{BB962C8B-B14F-4D97-AF65-F5344CB8AC3E}">
-        <p14:creationId xmlns:p14="http://schemas.microsoft.com/office/powerpoint/2010/main" val="4009383590"/>
+        <p14:creationId xmlns:p14="http://schemas.microsoft.com/office/powerpoint/2010/main" val="7336177"/>
+      </p:ext>
+    </p:extLst>
+  </p:cSld>
+  <p:clrMapOvr>
+    <a:masterClrMapping/>
+  </p:clrMapOvr>
+</p:sld>
+</file>
+
+<file path=ppt/slides/slide7.xml><?xml version="1.0" encoding="utf-8"?>
+<p:sld xmlns:a="http://schemas.openxmlformats.org/drawingml/2006/main" xmlns:r="http://schemas.openxmlformats.org/officeDocument/2006/relationships" xmlns:p="http://schemas.openxmlformats.org/presentationml/2006/main">
+  <p:cSld>
+    <p:spTree>
+      <p:nvGrpSpPr>
+        <p:cNvPr id="1" name="">
+          <a:extLst>
+            <a:ext uri="{FF2B5EF4-FFF2-40B4-BE49-F238E27FC236}">
+              <a16:creationId xmlns:a16="http://schemas.microsoft.com/office/drawing/2014/main" id="{6CF8F49D-706B-E844-F25D-3A12B7EA3A8D}"/>
+            </a:ext>
+          </a:extLst>
+        </p:cNvPr>
+        <p:cNvGrpSpPr/>
+        <p:nvPr/>
+      </p:nvGrpSpPr>
+      <p:grpSpPr>
+        <a:xfrm>
+          <a:off x="0" y="0"/>
+          <a:ext cx="0" cy="0"/>
+          <a:chOff x="0" y="0"/>
+          <a:chExt cx="0" cy="0"/>
+        </a:xfrm>
+      </p:grpSpPr>
+      <p:sp>
+        <p:nvSpPr>
+          <p:cNvPr id="7" name="Объект 6">
+            <a:extLst>
+              <a:ext uri="{FF2B5EF4-FFF2-40B4-BE49-F238E27FC236}">
+                <a16:creationId xmlns:a16="http://schemas.microsoft.com/office/drawing/2014/main" id="{BCF49A5C-4B80-2883-5B51-334F498C4B30}"/>
+              </a:ext>
+            </a:extLst>
+          </p:cNvPr>
+          <p:cNvSpPr>
+            <a:spLocks noGrp="1"/>
+          </p:cNvSpPr>
+          <p:nvPr>
+            <p:ph type="title" idx="4294967295"/>
+          </p:nvPr>
+        </p:nvSpPr>
+        <p:spPr>
+          <a:xfrm>
+            <a:off x="1935104" y="788762"/>
+            <a:ext cx="8986838" cy="815983"/>
+          </a:xfrm>
+          <a:prstGeom prst="rect">
+            <a:avLst/>
+          </a:prstGeom>
+          <a:noFill/>
+          <a:ln>
+            <a:noFill/>
+            <a:prstDash/>
+          </a:ln>
+          <a:effectLst/>
+        </p:spPr>
+        <p:txBody>
+          <a:bodyPr rot="0" spcFirstLastPara="0" vertOverflow="overflow" horzOverflow="overflow" vert="horz" wrap="square" lIns="0" tIns="45720" rIns="0" bIns="45720" numCol="1" spcCol="0" rtlCol="0" fromWordArt="0" anchor="t" anchorCtr="0" forceAA="0" compatLnSpc="1">
+            <a:prstTxWarp prst="textNoShape">
+              <a:avLst/>
+            </a:prstTxWarp>
+            <a:noAutofit/>
+          </a:bodyPr>
+          <a:lstStyle/>
+          <a:p>
+            <a:pPr marR="0" lvl="0" algn="ctr" defTabSz="914400" rtl="0" eaLnBrk="1" fontAlgn="auto" latinLnBrk="0" hangingPunct="1">
+              <a:lnSpc>
+                <a:spcPct val="150000"/>
+              </a:lnSpc>
+              <a:spcBef>
+                <a:spcPts val="0"/>
+              </a:spcBef>
+              <a:buClr>
+                <a:schemeClr val="accent1"/>
+              </a:buClr>
+              <a:buSzPct val="100000"/>
+              <a:tabLst/>
+              <a:defRPr/>
+            </a:pPr>
+            <a:r>
+              <a:rPr lang="ru-RU" sz="3600" dirty="0">
+                <a:solidFill>
+                  <a:schemeClr val="tx1"/>
+                </a:solidFill>
+                <a:latin typeface="Times New Roman" panose="02020603050405020304" pitchFamily="18" charset="0"/>
+                <a:cs typeface="Times New Roman" panose="02020603050405020304" pitchFamily="18" charset="0"/>
+              </a:rPr>
+              <a:t>Основные компоненты</a:t>
+            </a:r>
+            <a:endParaRPr kumimoji="0" lang="ru-RU" sz="3600" b="0" i="0" u="none" strike="noStrike" kern="1200" cap="none" spc="0" normalizeH="0" baseline="0" noProof="0" dirty="0">
+              <a:ln>
+                <a:noFill/>
+              </a:ln>
+              <a:solidFill>
+                <a:schemeClr val="tx1"/>
+              </a:solidFill>
+              <a:effectLst/>
+              <a:uLnTx/>
+              <a:uFillTx/>
+              <a:latin typeface="Times New Roman" panose="02020603050405020304" pitchFamily="18" charset="0"/>
+              <a:ea typeface="+mn-ea"/>
+              <a:cs typeface="Times New Roman" panose="02020603050405020304" pitchFamily="18" charset="0"/>
+            </a:endParaRPr>
+          </a:p>
+        </p:txBody>
+      </p:sp>
+      <p:pic>
+        <p:nvPicPr>
+          <p:cNvPr id="2" name="Рисунок 1">
+            <a:extLst>
+              <a:ext uri="{FF2B5EF4-FFF2-40B4-BE49-F238E27FC236}">
+                <a16:creationId xmlns:a16="http://schemas.microsoft.com/office/drawing/2014/main" id="{336B2315-49D4-0D66-C4C6-196AF77325C5}"/>
+              </a:ext>
+            </a:extLst>
+          </p:cNvPr>
+          <p:cNvPicPr>
+            <a:picLocks noChangeAspect="1"/>
+          </p:cNvPicPr>
+          <p:nvPr/>
+        </p:nvPicPr>
+        <p:blipFill>
+          <a:blip r:embed="rId3">
+            <a:extLst>
+              <a:ext uri="{28A0092B-C50C-407E-A947-70E740481C1C}">
+                <a14:useLocalDpi xmlns:a14="http://schemas.microsoft.com/office/drawing/2010/main" val="0"/>
+              </a:ext>
+            </a:extLst>
+          </a:blip>
+          <a:srcRect/>
+          <a:stretch/>
+        </p:blipFill>
+        <p:spPr>
+          <a:xfrm>
+            <a:off x="3178099" y="3429000"/>
+            <a:ext cx="5835800" cy="1647659"/>
+          </a:xfrm>
+          <a:prstGeom prst="rect">
+            <a:avLst/>
+          </a:prstGeom>
+        </p:spPr>
+      </p:pic>
+      <p:pic>
+        <p:nvPicPr>
+          <p:cNvPr id="3" name="Рисунок 2">
+            <a:extLst>
+              <a:ext uri="{FF2B5EF4-FFF2-40B4-BE49-F238E27FC236}">
+                <a16:creationId xmlns:a16="http://schemas.microsoft.com/office/drawing/2014/main" id="{BD5659ED-1A4C-840D-DDED-52014E4EDEAF}"/>
+              </a:ext>
+            </a:extLst>
+          </p:cNvPr>
+          <p:cNvPicPr>
+            <a:picLocks noChangeAspect="1"/>
+          </p:cNvPicPr>
+          <p:nvPr/>
+        </p:nvPicPr>
+        <p:blipFill rotWithShape="1">
+          <a:blip r:embed="rId4">
+            <a:extLst>
+              <a:ext uri="{28A0092B-C50C-407E-A947-70E740481C1C}">
+                <a14:useLocalDpi xmlns:a14="http://schemas.microsoft.com/office/drawing/2010/main" val="0"/>
+              </a:ext>
+            </a:extLst>
+          </a:blip>
+          <a:srcRect l="3880" r="3880"/>
+          <a:stretch/>
+        </p:blipFill>
+        <p:spPr bwMode="auto">
+          <a:xfrm>
+            <a:off x="1678600" y="1885448"/>
+            <a:ext cx="8834798" cy="1068020"/>
+          </a:xfrm>
+          <a:prstGeom prst="rect">
+            <a:avLst/>
+          </a:prstGeom>
+          <a:ln>
+            <a:noFill/>
+          </a:ln>
+          <a:extLst>
+            <a:ext uri="{53640926-AAD7-44D8-BBD7-CCE9431645EC}">
+              <a14:shadowObscured xmlns:a14="http://schemas.microsoft.com/office/drawing/2010/main"/>
+            </a:ext>
+          </a:extLst>
+        </p:spPr>
+      </p:pic>
+    </p:spTree>
+    <p:extLst>
+      <p:ext uri="{BB962C8B-B14F-4D97-AF65-F5344CB8AC3E}">
+        <p14:creationId xmlns:p14="http://schemas.microsoft.com/office/powerpoint/2010/main" val="696534176"/>
+      </p:ext>
+    </p:extLst>
+  </p:cSld>
+  <p:clrMapOvr>
+    <a:masterClrMapping/>
+  </p:clrMapOvr>
+</p:sld>
+</file>
+
+<file path=ppt/slides/slide8.xml><?xml version="1.0" encoding="utf-8"?>
+<p:sld xmlns:a="http://schemas.openxmlformats.org/drawingml/2006/main" xmlns:r="http://schemas.openxmlformats.org/officeDocument/2006/relationships" xmlns:p="http://schemas.openxmlformats.org/presentationml/2006/main">
+  <p:cSld>
+    <p:spTree>
+      <p:nvGrpSpPr>
+        <p:cNvPr id="1" name="">
+          <a:extLst>
+            <a:ext uri="{FF2B5EF4-FFF2-40B4-BE49-F238E27FC236}">
+              <a16:creationId xmlns:a16="http://schemas.microsoft.com/office/drawing/2014/main" id="{64D530AC-0F3F-D752-946D-A09CBA51AB12}"/>
+            </a:ext>
+          </a:extLst>
+        </p:cNvPr>
+        <p:cNvGrpSpPr/>
+        <p:nvPr/>
+      </p:nvGrpSpPr>
+      <p:grpSpPr>
+        <a:xfrm>
+          <a:off x="0" y="0"/>
+          <a:ext cx="0" cy="0"/>
+          <a:chOff x="0" y="0"/>
+          <a:chExt cx="0" cy="0"/>
+        </a:xfrm>
+      </p:grpSpPr>
+      <p:sp>
+        <p:nvSpPr>
+          <p:cNvPr id="7" name="Объект 6">
+            <a:extLst>
+              <a:ext uri="{FF2B5EF4-FFF2-40B4-BE49-F238E27FC236}">
+                <a16:creationId xmlns:a16="http://schemas.microsoft.com/office/drawing/2014/main" id="{1A3D333E-79A5-2D30-5854-50EDC5BE1BE3}"/>
+              </a:ext>
+            </a:extLst>
+          </p:cNvPr>
+          <p:cNvSpPr>
+            <a:spLocks noGrp="1"/>
+          </p:cNvSpPr>
+          <p:nvPr>
+            <p:ph type="title" idx="4294967295"/>
+          </p:nvPr>
+        </p:nvSpPr>
+        <p:spPr>
+          <a:xfrm>
+            <a:off x="1935104" y="788762"/>
+            <a:ext cx="8986838" cy="815983"/>
+          </a:xfrm>
+          <a:prstGeom prst="rect">
+            <a:avLst/>
+          </a:prstGeom>
+          <a:noFill/>
+          <a:ln>
+            <a:noFill/>
+            <a:prstDash/>
+          </a:ln>
+          <a:effectLst/>
+        </p:spPr>
+        <p:txBody>
+          <a:bodyPr rot="0" spcFirstLastPara="0" vertOverflow="overflow" horzOverflow="overflow" vert="horz" wrap="square" lIns="0" tIns="45720" rIns="0" bIns="45720" numCol="1" spcCol="0" rtlCol="0" fromWordArt="0" anchor="t" anchorCtr="0" forceAA="0" compatLnSpc="1">
+            <a:prstTxWarp prst="textNoShape">
+              <a:avLst/>
+            </a:prstTxWarp>
+            <a:noAutofit/>
+          </a:bodyPr>
+          <a:lstStyle/>
+          <a:p>
+            <a:pPr marR="0" lvl="0" algn="ctr" defTabSz="914400" rtl="0" eaLnBrk="1" fontAlgn="auto" latinLnBrk="0" hangingPunct="1">
+              <a:lnSpc>
+                <a:spcPct val="150000"/>
+              </a:lnSpc>
+              <a:spcBef>
+                <a:spcPts val="0"/>
+              </a:spcBef>
+              <a:buClr>
+                <a:schemeClr val="accent1"/>
+              </a:buClr>
+              <a:buSzPct val="100000"/>
+              <a:tabLst/>
+              <a:defRPr/>
+            </a:pPr>
+            <a:r>
+              <a:rPr lang="ru-RU" sz="3600" dirty="0">
+                <a:solidFill>
+                  <a:schemeClr val="tx1"/>
+                </a:solidFill>
+                <a:latin typeface="Times New Roman" panose="02020603050405020304" pitchFamily="18" charset="0"/>
+                <a:cs typeface="Times New Roman" panose="02020603050405020304" pitchFamily="18" charset="0"/>
+              </a:rPr>
+              <a:t>Основные компоненты</a:t>
+            </a:r>
+            <a:endParaRPr kumimoji="0" lang="ru-RU" sz="3600" b="0" i="0" u="none" strike="noStrike" kern="1200" cap="none" spc="0" normalizeH="0" baseline="0" noProof="0" dirty="0">
+              <a:ln>
+                <a:noFill/>
+              </a:ln>
+              <a:solidFill>
+                <a:schemeClr val="tx1"/>
+              </a:solidFill>
+              <a:effectLst/>
+              <a:uLnTx/>
+              <a:uFillTx/>
+              <a:latin typeface="Times New Roman" panose="02020603050405020304" pitchFamily="18" charset="0"/>
+              <a:ea typeface="+mn-ea"/>
+              <a:cs typeface="Times New Roman" panose="02020603050405020304" pitchFamily="18" charset="0"/>
+            </a:endParaRPr>
+          </a:p>
+        </p:txBody>
+      </p:sp>
+      <p:pic>
+        <p:nvPicPr>
+          <p:cNvPr id="4" name="Рисунок 3">
+            <a:extLst>
+              <a:ext uri="{FF2B5EF4-FFF2-40B4-BE49-F238E27FC236}">
+                <a16:creationId xmlns:a16="http://schemas.microsoft.com/office/drawing/2014/main" id="{ACAF01A4-5E33-C561-32B2-9BB77E775132}"/>
+              </a:ext>
+            </a:extLst>
+          </p:cNvPr>
+          <p:cNvPicPr>
+            <a:picLocks noChangeAspect="1"/>
+          </p:cNvPicPr>
+          <p:nvPr/>
+        </p:nvPicPr>
+        <p:blipFill>
+          <a:blip r:embed="rId3"/>
+          <a:stretch>
+            <a:fillRect/>
+          </a:stretch>
+        </p:blipFill>
+        <p:spPr>
+          <a:xfrm>
+            <a:off x="5202173" y="2759387"/>
+            <a:ext cx="6787199" cy="1904576"/>
+          </a:xfrm>
+          <a:prstGeom prst="rect">
+            <a:avLst/>
+          </a:prstGeom>
+        </p:spPr>
+      </p:pic>
+      <p:pic>
+        <p:nvPicPr>
+          <p:cNvPr id="5" name="Рисунок 4">
+            <a:extLst>
+              <a:ext uri="{FF2B5EF4-FFF2-40B4-BE49-F238E27FC236}">
+                <a16:creationId xmlns:a16="http://schemas.microsoft.com/office/drawing/2014/main" id="{8B9C1452-EA28-E4D0-C9F0-F503A7D9F9DE}"/>
+              </a:ext>
+            </a:extLst>
+          </p:cNvPr>
+          <p:cNvPicPr>
+            <a:picLocks noChangeAspect="1"/>
+          </p:cNvPicPr>
+          <p:nvPr/>
+        </p:nvPicPr>
+        <p:blipFill>
+          <a:blip r:embed="rId4"/>
+          <a:stretch>
+            <a:fillRect/>
+          </a:stretch>
+        </p:blipFill>
+        <p:spPr>
+          <a:xfrm>
+            <a:off x="382648" y="1987006"/>
+            <a:ext cx="4545954" cy="4110400"/>
+          </a:xfrm>
+          <a:prstGeom prst="rect">
+            <a:avLst/>
+          </a:prstGeom>
+        </p:spPr>
+      </p:pic>
+    </p:spTree>
+    <p:extLst>
+      <p:ext uri="{BB962C8B-B14F-4D97-AF65-F5344CB8AC3E}">
+        <p14:creationId xmlns:p14="http://schemas.microsoft.com/office/powerpoint/2010/main" val="994671096"/>
       </p:ext>
     </p:extLst>
   </p:cSld>
@@ -10182,7 +8315,13 @@
   <p:cSld>
     <p:spTree>
       <p:nvGrpSpPr>
-        <p:cNvPr id="1" name=""/>
+        <p:cNvPr id="1" name="">
+          <a:extLst>
+            <a:ext uri="{FF2B5EF4-FFF2-40B4-BE49-F238E27FC236}">
+              <a16:creationId xmlns:a16="http://schemas.microsoft.com/office/drawing/2014/main" id="{A5A26541-A012-0108-4BC4-046FCE30012E}"/>
+            </a:ext>
+          </a:extLst>
+        </p:cNvPr>
         <p:cNvGrpSpPr/>
         <p:nvPr/>
       </p:nvGrpSpPr>
@@ -10196,10 +8335,10 @@
       </p:grpSpPr>
       <p:sp>
         <p:nvSpPr>
-          <p:cNvPr id="2" name="Заголовок 1">
+          <p:cNvPr id="7" name="Объект 6">
             <a:extLst>
               <a:ext uri="{FF2B5EF4-FFF2-40B4-BE49-F238E27FC236}">
-                <a16:creationId xmlns:a16="http://schemas.microsoft.com/office/drawing/2014/main" id="{6C2B07F4-5B31-9E18-A577-EFEBD6C938AD}"/>
+                <a16:creationId xmlns:a16="http://schemas.microsoft.com/office/drawing/2014/main" id="{B7D4EBFA-3E88-9542-2A4F-7DB8D4E918FB}"/>
               </a:ext>
             </a:extLst>
           </p:cNvPr>
@@ -10207,184 +8346,145 @@
             <a:spLocks noGrp="1"/>
           </p:cNvSpPr>
           <p:nvPr>
-            <p:ph type="title"/>
-          </p:nvPr>
-        </p:nvSpPr>
-        <p:spPr>
-          <a:xfrm>
-            <a:off x="1097280" y="365760"/>
-            <a:ext cx="10058400" cy="1158240"/>
-          </a:xfrm>
-        </p:spPr>
-        <p:txBody>
-          <a:bodyPr>
-            <a:normAutofit/>
+            <p:ph type="title" idx="4294967295"/>
+          </p:nvPr>
+        </p:nvSpPr>
+        <p:spPr>
+          <a:xfrm>
+            <a:off x="1935104" y="788762"/>
+            <a:ext cx="8986838" cy="815983"/>
+          </a:xfrm>
+          <a:prstGeom prst="rect">
+            <a:avLst/>
+          </a:prstGeom>
+          <a:noFill/>
+          <a:ln>
+            <a:noFill/>
+            <a:prstDash/>
+          </a:ln>
+          <a:effectLst/>
+        </p:spPr>
+        <p:txBody>
+          <a:bodyPr rot="0" spcFirstLastPara="0" vertOverflow="overflow" horzOverflow="overflow" vert="horz" wrap="square" lIns="0" tIns="45720" rIns="0" bIns="45720" numCol="1" spcCol="0" rtlCol="0" fromWordArt="0" anchor="t" anchorCtr="0" forceAA="0" compatLnSpc="1">
+            <a:prstTxWarp prst="textNoShape">
+              <a:avLst/>
+            </a:prstTxWarp>
+            <a:noAutofit/>
           </a:bodyPr>
           <a:lstStyle/>
           <a:p>
-            <a:pPr algn="ctr">
-              <a:lnSpc>
-                <a:spcPct val="150000"/>
-              </a:lnSpc>
-            </a:pPr>
-            <a:r>
-              <a:rPr lang="ru-RU" sz="3600" dirty="0">
-                <a:solidFill>
-                  <a:schemeClr val="tx1"/>
-                </a:solidFill>
-                <a:latin typeface="Times New Roman" panose="02020603050405020304" pitchFamily="18" charset="0"/>
-                <a:ea typeface="Times New Roman" panose="02020603050405020304" pitchFamily="18" charset="0"/>
-                <a:cs typeface="Times New Roman" panose="02020603050405020304" pitchFamily="18" charset="0"/>
-              </a:rPr>
-              <a:t>Эксплуатационная документация </a:t>
-            </a:r>
-            <a:endParaRPr lang="ru-RU" sz="3600" dirty="0">
-              <a:solidFill>
-                <a:schemeClr val="tx1"/>
-              </a:solidFill>
-              <a:latin typeface="Times New Roman" panose="02020603050405020304" pitchFamily="18" charset="0"/>
-              <a:cs typeface="Times New Roman" panose="02020603050405020304" pitchFamily="18" charset="0"/>
-            </a:endParaRPr>
-          </a:p>
-        </p:txBody>
-      </p:sp>
-      <p:sp>
-        <p:nvSpPr>
-          <p:cNvPr id="3" name="Объект 2">
-            <a:extLst>
-              <a:ext uri="{FF2B5EF4-FFF2-40B4-BE49-F238E27FC236}">
-                <a16:creationId xmlns:a16="http://schemas.microsoft.com/office/drawing/2014/main" id="{198B6146-C11D-3C01-9FCE-4E9783EAEF70}"/>
-              </a:ext>
-            </a:extLst>
-          </p:cNvPr>
-          <p:cNvSpPr>
-            <a:spLocks noGrp="1"/>
-          </p:cNvSpPr>
-          <p:nvPr>
-            <p:ph idx="1"/>
-          </p:nvPr>
-        </p:nvSpPr>
-        <p:spPr>
-          <a:xfrm>
-            <a:off x="1097280" y="1905000"/>
-            <a:ext cx="10058400" cy="3964094"/>
-          </a:xfrm>
-        </p:spPr>
-        <p:txBody>
-          <a:bodyPr>
-            <a:normAutofit/>
-          </a:bodyPr>
-          <a:lstStyle/>
-          <a:p>
-            <a:pPr marL="0" indent="450000" algn="just">
+            <a:pPr marR="0" lvl="0" algn="ctr" defTabSz="914400" rtl="0" eaLnBrk="1" fontAlgn="auto" latinLnBrk="0" hangingPunct="1">
               <a:lnSpc>
                 <a:spcPct val="150000"/>
               </a:lnSpc>
               <a:spcBef>
                 <a:spcPts val="0"/>
               </a:spcBef>
-              <a:spcAft>
-                <a:spcPts val="0"/>
-              </a:spcAft>
-              <a:buFont typeface="+mj-lt"/>
-              <a:buAutoNum type="arabicParenR"/>
+              <a:buClr>
+                <a:schemeClr val="accent1"/>
+              </a:buClr>
+              <a:buSzPct val="100000"/>
+              <a:tabLst/>
+              <a:defRPr/>
             </a:pPr>
             <a:r>
-              <a:rPr lang="ru-RU" sz="2600" dirty="0">
+              <a:rPr lang="ru-RU" sz="3600" dirty="0">
                 <a:solidFill>
                   <a:schemeClr val="tx1"/>
                 </a:solidFill>
                 <a:latin typeface="Times New Roman" panose="02020603050405020304" pitchFamily="18" charset="0"/>
-                <a:ea typeface="Calibri" panose="020F0502020204030204" pitchFamily="34" charset="0"/>
                 <a:cs typeface="Times New Roman" panose="02020603050405020304" pitchFamily="18" charset="0"/>
               </a:rPr>
-              <a:t>Памятка по правилам эксплуатации и технике безопасности;</a:t>
-            </a:r>
-          </a:p>
-          <a:p>
-            <a:pPr marL="0" indent="450000" algn="just">
-              <a:lnSpc>
-                <a:spcPct val="150000"/>
-              </a:lnSpc>
-              <a:spcBef>
-                <a:spcPts val="0"/>
-              </a:spcBef>
-              <a:spcAft>
-                <a:spcPts val="0"/>
-              </a:spcAft>
-              <a:buFont typeface="+mj-lt"/>
-              <a:buAutoNum type="arabicParenR"/>
-            </a:pPr>
-            <a:r>
-              <a:rPr lang="ru-RU" sz="2600" dirty="0">
-                <a:solidFill>
-                  <a:schemeClr val="tx1"/>
-                </a:solidFill>
-                <a:latin typeface="Times New Roman" panose="02020603050405020304" pitchFamily="18" charset="0"/>
-                <a:ea typeface="Calibri" panose="020F0502020204030204" pitchFamily="34" charset="0"/>
-                <a:cs typeface="Times New Roman" panose="02020603050405020304" pitchFamily="18" charset="0"/>
-              </a:rPr>
-              <a:t>Регламент планового технического обслуживания;</a:t>
-            </a:r>
-          </a:p>
-          <a:p>
-            <a:pPr marL="0" indent="450000" algn="just">
-              <a:lnSpc>
-                <a:spcPct val="150000"/>
-              </a:lnSpc>
-              <a:spcBef>
-                <a:spcPts val="0"/>
-              </a:spcBef>
-              <a:spcAft>
-                <a:spcPts val="0"/>
-              </a:spcAft>
-              <a:buFont typeface="+mj-lt"/>
-              <a:buAutoNum type="arabicParenR"/>
-            </a:pPr>
-            <a:r>
-              <a:rPr lang="ru-RU" sz="2600" dirty="0">
-                <a:solidFill>
-                  <a:schemeClr val="tx1"/>
-                </a:solidFill>
-                <a:latin typeface="Times New Roman" panose="02020603050405020304" pitchFamily="18" charset="0"/>
-                <a:ea typeface="Calibri" panose="020F0502020204030204" pitchFamily="34" charset="0"/>
-                <a:cs typeface="Times New Roman" panose="02020603050405020304" pitchFamily="18" charset="0"/>
-              </a:rPr>
-              <a:t>Справочник типовых неисправностей и алгоритмов их первичного устранения;</a:t>
-            </a:r>
-          </a:p>
-          <a:p>
-            <a:pPr marL="0" indent="450000" algn="just">
-              <a:lnSpc>
-                <a:spcPct val="150000"/>
-              </a:lnSpc>
-              <a:spcBef>
-                <a:spcPts val="0"/>
-              </a:spcBef>
-              <a:spcAft>
-                <a:spcPts val="0"/>
-              </a:spcAft>
-              <a:buFont typeface="+mj-lt"/>
-              <a:buAutoNum type="arabicParenR"/>
-            </a:pPr>
-            <a:r>
-              <a:rPr lang="ru-RU" sz="2600" dirty="0">
-                <a:solidFill>
-                  <a:schemeClr val="tx1"/>
-                </a:solidFill>
-                <a:latin typeface="Times New Roman" panose="02020603050405020304" pitchFamily="18" charset="0"/>
-                <a:ea typeface="Calibri" panose="020F0502020204030204" pitchFamily="34" charset="0"/>
-                <a:cs typeface="Times New Roman" panose="02020603050405020304" pitchFamily="18" charset="0"/>
-              </a:rPr>
-              <a:t>Журнал учёта оборудования и регистрации инцидентов.</a:t>
-            </a:r>
-          </a:p>
-        </p:txBody>
-      </p:sp>
+              <a:t>Основные компоненты</a:t>
+            </a:r>
+            <a:endParaRPr kumimoji="0" lang="ru-RU" sz="3600" b="0" i="0" u="none" strike="noStrike" kern="1200" cap="none" spc="0" normalizeH="0" baseline="0" noProof="0" dirty="0">
+              <a:ln>
+                <a:noFill/>
+              </a:ln>
+              <a:solidFill>
+                <a:schemeClr val="tx1"/>
+              </a:solidFill>
+              <a:effectLst/>
+              <a:uLnTx/>
+              <a:uFillTx/>
+              <a:latin typeface="Times New Roman" panose="02020603050405020304" pitchFamily="18" charset="0"/>
+              <a:ea typeface="+mn-ea"/>
+              <a:cs typeface="Times New Roman" panose="02020603050405020304" pitchFamily="18" charset="0"/>
+            </a:endParaRPr>
+          </a:p>
+        </p:txBody>
+      </p:sp>
+      <p:pic>
+        <p:nvPicPr>
+          <p:cNvPr id="4" name="Рисунок 3">
+            <a:extLst>
+              <a:ext uri="{FF2B5EF4-FFF2-40B4-BE49-F238E27FC236}">
+                <a16:creationId xmlns:a16="http://schemas.microsoft.com/office/drawing/2014/main" id="{E5DC6BC1-4DFD-0B34-89F0-074539B7326E}"/>
+              </a:ext>
+            </a:extLst>
+          </p:cNvPr>
+          <p:cNvPicPr>
+            <a:picLocks noChangeAspect="1"/>
+          </p:cNvPicPr>
+          <p:nvPr/>
+        </p:nvPicPr>
+        <p:blipFill rotWithShape="1">
+          <a:blip r:embed="rId3"/>
+          <a:srcRect l="9237" t="17945" r="8120"/>
+          <a:stretch/>
+        </p:blipFill>
+        <p:spPr bwMode="auto">
+          <a:xfrm>
+            <a:off x="1880222" y="2199894"/>
+            <a:ext cx="8431551" cy="561594"/>
+          </a:xfrm>
+          <a:prstGeom prst="rect">
+            <a:avLst/>
+          </a:prstGeom>
+          <a:ln>
+            <a:noFill/>
+          </a:ln>
+          <a:extLst>
+            <a:ext uri="{53640926-AAD7-44D8-BBD7-CCE9431645EC}">
+              <a14:shadowObscured xmlns:a14="http://schemas.microsoft.com/office/drawing/2010/main"/>
+            </a:ext>
+          </a:extLst>
+        </p:spPr>
+      </p:pic>
+      <p:pic>
+        <p:nvPicPr>
+          <p:cNvPr id="5" name="Рисунок 4">
+            <a:extLst>
+              <a:ext uri="{FF2B5EF4-FFF2-40B4-BE49-F238E27FC236}">
+                <a16:creationId xmlns:a16="http://schemas.microsoft.com/office/drawing/2014/main" id="{801976FC-CACB-B4C5-C81E-3444ED519E06}"/>
+              </a:ext>
+            </a:extLst>
+          </p:cNvPr>
+          <p:cNvPicPr>
+            <a:picLocks noChangeAspect="1"/>
+          </p:cNvPicPr>
+          <p:nvPr/>
+        </p:nvPicPr>
+        <p:blipFill>
+          <a:blip r:embed="rId4"/>
+          <a:stretch>
+            <a:fillRect/>
+          </a:stretch>
+        </p:blipFill>
+        <p:spPr>
+          <a:xfrm>
+            <a:off x="3230567" y="3429000"/>
+            <a:ext cx="5730865" cy="2154878"/>
+          </a:xfrm>
+          <a:prstGeom prst="rect">
+            <a:avLst/>
+          </a:prstGeom>
+        </p:spPr>
+      </p:pic>
     </p:spTree>
     <p:extLst>
       <p:ext uri="{BB962C8B-B14F-4D97-AF65-F5344CB8AC3E}">
-        <p14:creationId xmlns:p14="http://schemas.microsoft.com/office/powerpoint/2010/main" val="3423088021"/>
+        <p14:creationId xmlns:p14="http://schemas.microsoft.com/office/powerpoint/2010/main" val="2807896593"/>
       </p:ext>
     </p:extLst>
   </p:cSld>
